--- a/python/CourseDesign/Week07e/Week7_Lecture13_Polyphase_Efficient_Decimation.pptx
+++ b/python/CourseDesign/Week07e/Week7_Lecture13_Polyphase_Efficient_Decimation.pptx
@@ -4,6 +4,9 @@
   <p:sldMasterIdLst>
     <p:sldMasterId id="2147483648" r:id="rId1"/>
   </p:sldMasterIdLst>
+  <p:notesMasterIdLst>
+    <p:notesMasterId r:id="rId22"/>
+  </p:notesMasterIdLst>
   <p:sldIdLst>
     <p:sldId id="256" r:id="rId2"/>
     <p:sldId id="257" r:id="rId3"/>
@@ -11,22 +14,21 @@
     <p:sldId id="259" r:id="rId5"/>
     <p:sldId id="260" r:id="rId6"/>
     <p:sldId id="261" r:id="rId7"/>
-    <p:sldId id="262" r:id="rId8"/>
-    <p:sldId id="263" r:id="rId9"/>
-    <p:sldId id="264" r:id="rId10"/>
-    <p:sldId id="265" r:id="rId11"/>
-    <p:sldId id="266" r:id="rId12"/>
-    <p:sldId id="267" r:id="rId13"/>
-    <p:sldId id="268" r:id="rId14"/>
-    <p:sldId id="269" r:id="rId15"/>
-    <p:sldId id="270" r:id="rId16"/>
-    <p:sldId id="271" r:id="rId17"/>
-    <p:sldId id="272" r:id="rId18"/>
-    <p:sldId id="273" r:id="rId19"/>
+    <p:sldId id="274" r:id="rId8"/>
+    <p:sldId id="262" r:id="rId9"/>
+    <p:sldId id="263" r:id="rId10"/>
+    <p:sldId id="264" r:id="rId11"/>
+    <p:sldId id="265" r:id="rId12"/>
+    <p:sldId id="266" r:id="rId13"/>
+    <p:sldId id="267" r:id="rId14"/>
+    <p:sldId id="275" r:id="rId15"/>
+    <p:sldId id="268" r:id="rId16"/>
+    <p:sldId id="269" r:id="rId17"/>
+    <p:sldId id="270" r:id="rId18"/>
+    <p:sldId id="271" r:id="rId19"/>
+    <p:sldId id="272" r:id="rId20"/>
+    <p:sldId id="273" r:id="rId21"/>
   </p:sldIdLst>
-  <p:notesMasterIdLst>
-    <p:notesMasterId r:id="rId20"/>
-  </p:notesMasterIdLst>
   <p:sldSz cx="12192000" cy="6858000"/>
   <p:notesSz cx="6858000" cy="12192000"/>
   <p:defaultTextStyle>
@@ -121,6 +123,11 @@
       </a:defRPr>
     </a:lvl9pPr>
   </p:defaultTextStyle>
+  <p:extLst>
+    <p:ext uri="{EFAFB233-063F-42B5-8137-9DF3F51BA10A}">
+      <p15:sldGuideLst xmlns:p15="http://schemas.microsoft.com/office/powerpoint/2012/main"/>
+    </p:ext>
+  </p:extLst>
 </p:presentation>
 </file>
 
@@ -146,234 +153,10 @@
           <a:chExt cx="0" cy="0"/>
         </a:xfrm>
       </p:grpSpPr>
-      <p:sp>
-        <p:nvSpPr>
-          <p:cNvPr id="2" name="Header Placeholder 1"/>
-          <p:cNvSpPr>
-            <a:spLocks noGrp="1"/>
-          </p:cNvSpPr>
-          <p:nvPr>
-            <p:ph type="hdr" sz="quarter"/>
-          </p:nvPr>
-        </p:nvSpPr>
-        <p:spPr>
-          <a:xfrm>
-            <a:off x="0" y="0"/>
-            <a:ext cx="2971800" cy="458788"/>
-          </a:xfrm>
-          <a:prstGeom prst="rect">
-            <a:avLst/>
-          </a:prstGeom>
-        </p:spPr>
-        <p:txBody>
-          <a:bodyPr vert="horz" lIns="91440" tIns="45720" rIns="91440" bIns="45720" rtlCol="0"/>
-          <a:lstStyle>
-            <a:lvl1pPr algn="l">
-              <a:defRPr sz="1200"/>
-            </a:lvl1pPr>
-          </a:lstStyle>
-          <a:p>
-            <a:endParaRPr lang="en-US"/>
-          </a:p>
-        </p:txBody>
-      </p:sp>
-      <p:sp>
-        <p:nvSpPr>
-          <p:cNvPr id="3" name="Date Placeholder 2"/>
-          <p:cNvSpPr>
-            <a:spLocks noGrp="1"/>
-          </p:cNvSpPr>
-          <p:nvPr>
-            <p:ph type="dt" idx="1"/>
-          </p:nvPr>
-        </p:nvSpPr>
-        <p:spPr>
-          <a:xfrm>
-            <a:off x="3884613" y="0"/>
-            <a:ext cx="2971800" cy="458788"/>
-          </a:xfrm>
-          <a:prstGeom prst="rect">
-            <a:avLst/>
-          </a:prstGeom>
-        </p:spPr>
-        <p:txBody>
-          <a:bodyPr vert="horz" lIns="91440" tIns="45720" rIns="91440" bIns="45720" rtlCol="0"/>
-          <a:lstStyle>
-            <a:lvl1pPr algn="r">
-              <a:defRPr sz="1200"/>
-            </a:lvl1pPr>
-          </a:lstStyle>
-          <a:p>
-            <a:fld id="{5282F153-3F37-0F45-9E97-73ACFA13230C}" type="datetimeFigureOut">
-              <a:rPr lang="en-US"/>
-              <a:t>7/23/19</a:t>
-            </a:fld>
-            <a:endParaRPr lang="en-US"/>
-          </a:p>
-        </p:txBody>
-      </p:sp>
-      <p:sp>
-        <p:nvSpPr>
-          <p:cNvPr id="4" name="Slide Image Placeholder 3"/>
-          <p:cNvSpPr>
-            <a:spLocks noGrp="1" noRot="1" noChangeAspect="1"/>
-          </p:cNvSpPr>
-          <p:nvPr>
-            <p:ph type="sldImg" idx="2"/>
-          </p:nvPr>
-        </p:nvSpPr>
-        <p:spPr>
-          <a:xfrm>
-            <a:off x="685800" y="1143000"/>
-            <a:ext cx="5486400" cy="3086100"/>
-          </a:xfrm>
-          <a:prstGeom prst="rect">
-            <a:avLst/>
-          </a:prstGeom>
-          <a:noFill/>
-          <a:ln w="12700">
-            <a:solidFill>
-              <a:prstClr val="black"/>
-            </a:solidFill>
-          </a:ln>
-        </p:spPr>
-        <p:txBody>
-          <a:bodyPr vert="horz" lIns="91440" tIns="45720" rIns="91440" bIns="45720" rtlCol="0" anchor="ctr"/>
-          <a:lstStyle/>
-          <a:p>
-            <a:endParaRPr lang="en-US"/>
-          </a:p>
-        </p:txBody>
-      </p:sp>
-      <p:sp>
-        <p:nvSpPr>
-          <p:cNvPr id="5" name="Notes Placeholder 4"/>
-          <p:cNvSpPr>
-            <a:spLocks noGrp="1"/>
-          </p:cNvSpPr>
-          <p:nvPr>
-            <p:ph type="body" sz="quarter" idx="3"/>
-          </p:nvPr>
-        </p:nvSpPr>
-        <p:spPr>
-          <a:xfrm>
-            <a:off x="685800" y="4400550"/>
-            <a:ext cx="5486400" cy="3600450"/>
-          </a:xfrm>
-          <a:prstGeom prst="rect">
-            <a:avLst/>
-          </a:prstGeom>
-        </p:spPr>
-        <p:txBody>
-          <a:bodyPr vert="horz" lIns="91440" tIns="45720" rIns="91440" bIns="45720" rtlCol="0"/>
-          <a:lstStyle/>
-          <a:p>
-            <a:pPr lvl="0"/>
-            <a:r>
-              <a:rPr lang="en-US"/>
-              <a:t>Click to edit Master text styles</a:t>
-            </a:r>
-          </a:p>
-          <a:p>
-            <a:pPr lvl="1"/>
-            <a:r>
-              <a:rPr lang="en-US"/>
-              <a:t>Second level</a:t>
-            </a:r>
-          </a:p>
-          <a:p>
-            <a:pPr lvl="2"/>
-            <a:r>
-              <a:rPr lang="en-US"/>
-              <a:t>Third level</a:t>
-            </a:r>
-          </a:p>
-          <a:p>
-            <a:pPr lvl="3"/>
-            <a:r>
-              <a:rPr lang="en-US"/>
-              <a:t>Fourth level</a:t>
-            </a:r>
-          </a:p>
-          <a:p>
-            <a:pPr lvl="4"/>
-            <a:r>
-              <a:rPr lang="en-US"/>
-              <a:t>Fifth level</a:t>
-            </a:r>
-          </a:p>
-        </p:txBody>
-      </p:sp>
-      <p:sp>
-        <p:nvSpPr>
-          <p:cNvPr id="6" name="Footer Placeholder 5"/>
-          <p:cNvSpPr>
-            <a:spLocks noGrp="1"/>
-          </p:cNvSpPr>
-          <p:nvPr>
-            <p:ph type="ftr" sz="quarter" idx="4"/>
-          </p:nvPr>
-        </p:nvSpPr>
-        <p:spPr>
-          <a:xfrm>
-            <a:off x="0" y="8685213"/>
-            <a:ext cx="2971800" cy="458787"/>
-          </a:xfrm>
-          <a:prstGeom prst="rect">
-            <a:avLst/>
-          </a:prstGeom>
-        </p:spPr>
-        <p:txBody>
-          <a:bodyPr vert="horz" lIns="91440" tIns="45720" rIns="91440" bIns="45720" rtlCol="0" anchor="b"/>
-          <a:lstStyle>
-            <a:lvl1pPr algn="l">
-              <a:defRPr sz="1200"/>
-            </a:lvl1pPr>
-          </a:lstStyle>
-          <a:p>
-            <a:endParaRPr lang="en-US"/>
-          </a:p>
-        </p:txBody>
-      </p:sp>
-      <p:sp>
-        <p:nvSpPr>
-          <p:cNvPr id="7" name="Slide Number Placeholder 6"/>
-          <p:cNvSpPr>
-            <a:spLocks noGrp="1"/>
-          </p:cNvSpPr>
-          <p:nvPr>
-            <p:ph type="sldNum" sz="quarter" idx="5"/>
-          </p:nvPr>
-        </p:nvSpPr>
-        <p:spPr>
-          <a:xfrm>
-            <a:off x="3884613" y="8685213"/>
-            <a:ext cx="2971800" cy="458787"/>
-          </a:xfrm>
-          <a:prstGeom prst="rect">
-            <a:avLst/>
-          </a:prstGeom>
-        </p:spPr>
-        <p:txBody>
-          <a:bodyPr vert="horz" lIns="91440" tIns="45720" rIns="91440" bIns="45720" rtlCol="0" anchor="b"/>
-          <a:lstStyle>
-            <a:lvl1pPr algn="r">
-              <a:defRPr sz="1200"/>
-            </a:lvl1pPr>
-          </a:lstStyle>
-          <a:p>
-            <a:fld id="{CE5E9CC1-C706-0F49-92D6-E571CC5EEA8F}" type="slidenum">
-              <a:rPr lang="en-US"/>
-              <a:t>‹#›</a:t>
-            </a:fld>
-            <a:endParaRPr lang="en-US"/>
-          </a:p>
-        </p:txBody>
-      </p:sp>
     </p:spTree>
     <p:extLst>
       <p:ext uri="{BB962C8B-B14F-4D97-AF65-F5344CB8AC3E}">
-        <p14:creationId xmlns:p14="http://schemas.microsoft.com/office/powerpoint/2010/main" val="1024086991"/>
+        <p14:creationId xmlns:p14="http://schemas.microsoft.com/office/powerpoint/2010/main" val="802149704"/>
       </p:ext>
     </p:extLst>
   </p:cSld>
@@ -521,7 +304,6 @@
               <a:rPr lang="en-US" dirty="0"/>
               <a:t>0:00–0:02. Connect to Week 6: decimation requires filtering before downsampling. Today we do the same input-output operation, but reorganize it to avoid wasted arithmetic.</a:t>
             </a:r>
-            <a:endParaRPr lang="en-US" dirty="0"/>
           </a:p>
         </p:txBody>
       </p:sp>
@@ -607,9 +389,8 @@
           <a:p>
             <a:r>
               <a:rPr lang="en-US" dirty="0"/>
-              <a:t>0:36–0:45. The branch input includes phase offsets/delays; do not imply all branches receive x[::M] identically. The implementation is often drawn with a commutator that distributes input samples by phase.</a:t>
-            </a:r>
-            <a:endParaRPr lang="en-US" dirty="0"/>
+              <a:t>0:28–0:36. This is a critical precision point. The phrase “move the filter through the downsampler” is dangerous unless students remember the z^M condition.</a:t>
+            </a:r>
           </a:p>
         </p:txBody>
       </p:sp>
@@ -695,9 +476,8 @@
           <a:p>
             <a:r>
               <a:rPr lang="en-US" dirty="0"/>
-              <a:t>0:45–0:51. The polyphase algorithm still uses roughly N taps per output sample, but there are only Fs/M output samples per second.</a:t>
-            </a:r>
-            <a:endParaRPr lang="en-US" dirty="0"/>
+              <a:t>0:36–0:45. The branch input includes phase offsets/delays; do not imply all branches receive x[::M] identically. The implementation is often drawn with a commutator that distributes input samples by phase.</a:t>
+            </a:r>
           </a:p>
         </p:txBody>
       </p:sp>
@@ -783,9 +563,8 @@
           <a:p>
             <a:r>
               <a:rPr lang="en-US" dirty="0"/>
-              <a:t>0:51–0:55. Accept “6× savings” if they explain the rate argument.</a:t>
-            </a:r>
-            <a:endParaRPr lang="en-US" dirty="0"/>
+              <a:t>0:45–0:51. The polyphase algorithm still uses roughly N taps per output sample, but there are only Fs/M output samples per second.</a:t>
+            </a:r>
           </a:p>
         </p:txBody>
       </p:sp>
@@ -871,9 +650,8 @@
           <a:p>
             <a:r>
               <a:rPr lang="en-US" dirty="0"/>
-              <a:t>0:55. Bridge carefully: analogy, not equivalence.</a:t>
-            </a:r>
-            <a:endParaRPr lang="en-US" dirty="0"/>
+              <a:t>0:51–0:55. Accept “6× savings” if they explain the rate argument.</a:t>
+            </a:r>
           </a:p>
         </p:txBody>
       </p:sp>
@@ -918,7 +696,13 @@
   <p:cSld>
     <p:spTree>
       <p:nvGrpSpPr>
-        <p:cNvPr id="1" name=""/>
+        <p:cNvPr id="1" name="">
+          <a:extLst>
+            <a:ext uri="{FF2B5EF4-FFF2-40B4-BE49-F238E27FC236}">
+              <a16:creationId xmlns:a16="http://schemas.microsoft.com/office/drawing/2014/main" id="{A1CFB9CD-B96D-45F9-6584-CA3E8B94CA7C}"/>
+            </a:ext>
+          </a:extLst>
+        </p:cNvPr>
         <p:cNvGrpSpPr/>
         <p:nvPr/>
       </p:nvGrpSpPr>
@@ -932,7 +716,13 @@
       </p:grpSpPr>
       <p:sp>
         <p:nvSpPr>
-          <p:cNvPr id="2" name="Slide Image Placeholder 1"/>
+          <p:cNvPr id="2" name="Slide Image Placeholder 1">
+            <a:extLst>
+              <a:ext uri="{FF2B5EF4-FFF2-40B4-BE49-F238E27FC236}">
+                <a16:creationId xmlns:a16="http://schemas.microsoft.com/office/drawing/2014/main" id="{8998580C-A7DF-DD9F-1650-6872DA061D7A}"/>
+              </a:ext>
+            </a:extLst>
+          </p:cNvPr>
           <p:cNvSpPr>
             <a:spLocks noGrp="1" noRot="1" noChangeAspect="1"/>
           </p:cNvSpPr>
@@ -944,7 +734,13 @@
       </p:sp>
       <p:sp>
         <p:nvSpPr>
-          <p:cNvPr id="3" name="Notes Placeholder 2"/>
+          <p:cNvPr id="3" name="Notes Placeholder 2">
+            <a:extLst>
+              <a:ext uri="{FF2B5EF4-FFF2-40B4-BE49-F238E27FC236}">
+                <a16:creationId xmlns:a16="http://schemas.microsoft.com/office/drawing/2014/main" id="{2EF4ADEF-062D-526D-3543-B48ED6C425B7}"/>
+              </a:ext>
+            </a:extLst>
+          </p:cNvPr>
           <p:cNvSpPr>
             <a:spLocks noGrp="1"/>
           </p:cNvSpPr>
@@ -959,15 +755,20 @@
           <a:p>
             <a:r>
               <a:rPr lang="en-US" dirty="0"/>
-              <a:t>0:55–1:03. Mention MobileNet-style depthwise separable convolution as an example of factorizing spatial filtering and channel mixing. Do not claim it is a polyphase implementation.</a:t>
-            </a:r>
-            <a:endParaRPr lang="en-US" dirty="0"/>
-          </a:p>
-        </p:txBody>
-      </p:sp>
-      <p:sp>
-        <p:nvSpPr>
-          <p:cNvPr id="4" name="Slide Number Placeholder 3"/>
+              <a:t>0:51–0:55. Accept “6× savings” if they explain the rate argument.</a:t>
+            </a:r>
+          </a:p>
+        </p:txBody>
+      </p:sp>
+      <p:sp>
+        <p:nvSpPr>
+          <p:cNvPr id="4" name="Slide Number Placeholder 3">
+            <a:extLst>
+              <a:ext uri="{FF2B5EF4-FFF2-40B4-BE49-F238E27FC236}">
+                <a16:creationId xmlns:a16="http://schemas.microsoft.com/office/drawing/2014/main" id="{98925D3E-3060-06B9-F0A8-572F4C5D60F2}"/>
+              </a:ext>
+            </a:extLst>
+          </p:cNvPr>
           <p:cNvSpPr>
             <a:spLocks noGrp="1"/>
           </p:cNvSpPr>
@@ -991,7 +792,7 @@
     </p:spTree>
     <p:extLst>
       <p:ext uri="{BB962C8B-B14F-4D97-AF65-F5344CB8AC3E}">
-        <p14:creationId xmlns:p14="http://schemas.microsoft.com/office/powerpoint/2010/main" val="1024086991"/>
+        <p14:creationId xmlns:p14="http://schemas.microsoft.com/office/powerpoint/2010/main" val="1857420617"/>
       </p:ext>
     </p:extLst>
   </p:cSld>
@@ -1047,9 +848,8 @@
           <a:p>
             <a:r>
               <a:rPr lang="en-US" dirty="0"/>
-              <a:t>1:03–1:10. This comparison is worth making explicit because students otherwise overgeneralize the analogy.</a:t>
-            </a:r>
-            <a:endParaRPr lang="en-US" dirty="0"/>
+              <a:t>0:55. Bridge carefully: analogy, not equivalence.</a:t>
+            </a:r>
           </a:p>
         </p:txBody>
       </p:sp>
@@ -1135,9 +935,8 @@
           <a:p>
             <a:r>
               <a:rPr lang="en-US" dirty="0"/>
-              <a:t>1:10–1:14. A fast live demo works better than a long algebraic derivation here.</a:t>
-            </a:r>
-            <a:endParaRPr lang="en-US" dirty="0"/>
+              <a:t>0:55–1:03. Mention MobileNet-style depthwise separable convolution as an example of factorizing spatial filtering and channel mixing. Do not claim it is a polyphase implementation.</a:t>
+            </a:r>
           </a:p>
         </p:txBody>
       </p:sp>
@@ -1223,9 +1022,8 @@
           <a:p>
             <a:r>
               <a:rPr lang="en-US" dirty="0"/>
-              <a:t>1:14–1:15. This exit question targets the most dangerous misconception in the lecture.</a:t>
-            </a:r>
-            <a:endParaRPr lang="en-US" dirty="0"/>
+              <a:t>1:03–1:10. This comparison is worth making explicit because students otherwise overgeneralize the analogy.</a:t>
+            </a:r>
           </a:p>
         </p:txBody>
       </p:sp>
@@ -1311,9 +1109,8 @@
           <a:p>
             <a:r>
               <a:rPr lang="en-US" dirty="0"/>
-              <a:t>Appendix slide for course-site distribution.</a:t>
-            </a:r>
-            <a:endParaRPr lang="en-US" dirty="0"/>
+              <a:t>1:10–1:14. A fast live demo works better than a long algebraic derivation here.</a:t>
+            </a:r>
           </a:p>
         </p:txBody>
       </p:sp>
@@ -1335,6 +1132,93 @@
             <a:fld id="{F7021451-1387-4CA6-816F-3879F97B5CBC}" type="slidenum">
               <a:rPr lang="en-US"/>
               <a:t>18</a:t>
+            </a:fld>
+            <a:endParaRPr lang="en-US"/>
+          </a:p>
+        </p:txBody>
+      </p:sp>
+    </p:spTree>
+    <p:extLst>
+      <p:ext uri="{BB962C8B-B14F-4D97-AF65-F5344CB8AC3E}">
+        <p14:creationId xmlns:p14="http://schemas.microsoft.com/office/powerpoint/2010/main" val="1024086991"/>
+      </p:ext>
+    </p:extLst>
+  </p:cSld>
+  <p:clrMapOvr>
+    <a:masterClrMapping/>
+  </p:clrMapOvr>
+</p:notes>
+</file>
+
+<file path=ppt/notesSlides/notesSlide19.xml><?xml version="1.0" encoding="utf-8"?>
+<p:notes xmlns:a="http://schemas.openxmlformats.org/drawingml/2006/main" xmlns:r="http://schemas.openxmlformats.org/officeDocument/2006/relationships" xmlns:p="http://schemas.openxmlformats.org/presentationml/2006/main">
+  <p:cSld>
+    <p:spTree>
+      <p:nvGrpSpPr>
+        <p:cNvPr id="1" name=""/>
+        <p:cNvGrpSpPr/>
+        <p:nvPr/>
+      </p:nvGrpSpPr>
+      <p:grpSpPr>
+        <a:xfrm>
+          <a:off x="0" y="0"/>
+          <a:ext cx="0" cy="0"/>
+          <a:chOff x="0" y="0"/>
+          <a:chExt cx="0" cy="0"/>
+        </a:xfrm>
+      </p:grpSpPr>
+      <p:sp>
+        <p:nvSpPr>
+          <p:cNvPr id="2" name="Slide Image Placeholder 1"/>
+          <p:cNvSpPr>
+            <a:spLocks noGrp="1" noRot="1" noChangeAspect="1"/>
+          </p:cNvSpPr>
+          <p:nvPr>
+            <p:ph type="sldImg"/>
+          </p:nvPr>
+        </p:nvSpPr>
+        <p:spPr/>
+      </p:sp>
+      <p:sp>
+        <p:nvSpPr>
+          <p:cNvPr id="3" name="Notes Placeholder 2"/>
+          <p:cNvSpPr>
+            <a:spLocks noGrp="1"/>
+          </p:cNvSpPr>
+          <p:nvPr>
+            <p:ph type="body" idx="1"/>
+          </p:nvPr>
+        </p:nvSpPr>
+        <p:spPr/>
+        <p:txBody>
+          <a:bodyPr/>
+          <a:lstStyle/>
+          <a:p>
+            <a:r>
+              <a:rPr lang="en-US" dirty="0"/>
+              <a:t>1:14–1:15. This exit question targets the most dangerous misconception in the lecture.</a:t>
+            </a:r>
+          </a:p>
+        </p:txBody>
+      </p:sp>
+      <p:sp>
+        <p:nvSpPr>
+          <p:cNvPr id="4" name="Slide Number Placeholder 3"/>
+          <p:cNvSpPr>
+            <a:spLocks noGrp="1"/>
+          </p:cNvSpPr>
+          <p:nvPr>
+            <p:ph type="sldNum" sz="quarter" idx="10"/>
+          </p:nvPr>
+        </p:nvSpPr>
+        <p:spPr/>
+        <p:txBody>
+          <a:bodyPr/>
+          <a:lstStyle/>
+          <a:p>
+            <a:fld id="{F7021451-1387-4CA6-816F-3879F97B5CBC}" type="slidenum">
+              <a:rPr lang="en-US"/>
+              <a:t>19</a:t>
             </a:fld>
             <a:endParaRPr lang="en-US"/>
           </a:p>
@@ -1401,7 +1285,6 @@
               <a:rPr lang="en-US" dirty="0"/>
               <a:t>Core question: If only every Mth filtered sample survives, why compute the other M−1 outputs at all?</a:t>
             </a:r>
-            <a:endParaRPr lang="en-US" dirty="0"/>
           </a:p>
         </p:txBody>
       </p:sp>
@@ -1423,6 +1306,93 @@
             <a:fld id="{F7021451-1387-4CA6-816F-3879F97B5CBC}" type="slidenum">
               <a:rPr lang="en-US"/>
               <a:t>2</a:t>
+            </a:fld>
+            <a:endParaRPr lang="en-US"/>
+          </a:p>
+        </p:txBody>
+      </p:sp>
+    </p:spTree>
+    <p:extLst>
+      <p:ext uri="{BB962C8B-B14F-4D97-AF65-F5344CB8AC3E}">
+        <p14:creationId xmlns:p14="http://schemas.microsoft.com/office/powerpoint/2010/main" val="1024086991"/>
+      </p:ext>
+    </p:extLst>
+  </p:cSld>
+  <p:clrMapOvr>
+    <a:masterClrMapping/>
+  </p:clrMapOvr>
+</p:notes>
+</file>
+
+<file path=ppt/notesSlides/notesSlide20.xml><?xml version="1.0" encoding="utf-8"?>
+<p:notes xmlns:a="http://schemas.openxmlformats.org/drawingml/2006/main" xmlns:r="http://schemas.openxmlformats.org/officeDocument/2006/relationships" xmlns:p="http://schemas.openxmlformats.org/presentationml/2006/main">
+  <p:cSld>
+    <p:spTree>
+      <p:nvGrpSpPr>
+        <p:cNvPr id="1" name=""/>
+        <p:cNvGrpSpPr/>
+        <p:nvPr/>
+      </p:nvGrpSpPr>
+      <p:grpSpPr>
+        <a:xfrm>
+          <a:off x="0" y="0"/>
+          <a:ext cx="0" cy="0"/>
+          <a:chOff x="0" y="0"/>
+          <a:chExt cx="0" cy="0"/>
+        </a:xfrm>
+      </p:grpSpPr>
+      <p:sp>
+        <p:nvSpPr>
+          <p:cNvPr id="2" name="Slide Image Placeholder 1"/>
+          <p:cNvSpPr>
+            <a:spLocks noGrp="1" noRot="1" noChangeAspect="1"/>
+          </p:cNvSpPr>
+          <p:nvPr>
+            <p:ph type="sldImg"/>
+          </p:nvPr>
+        </p:nvSpPr>
+        <p:spPr/>
+      </p:sp>
+      <p:sp>
+        <p:nvSpPr>
+          <p:cNvPr id="3" name="Notes Placeholder 2"/>
+          <p:cNvSpPr>
+            <a:spLocks noGrp="1"/>
+          </p:cNvSpPr>
+          <p:nvPr>
+            <p:ph type="body" idx="1"/>
+          </p:nvPr>
+        </p:nvSpPr>
+        <p:spPr/>
+        <p:txBody>
+          <a:bodyPr/>
+          <a:lstStyle/>
+          <a:p>
+            <a:r>
+              <a:rPr lang="en-US" dirty="0"/>
+              <a:t>Appendix slide for course-site distribution.</a:t>
+            </a:r>
+          </a:p>
+        </p:txBody>
+      </p:sp>
+      <p:sp>
+        <p:nvSpPr>
+          <p:cNvPr id="4" name="Slide Number Placeholder 3"/>
+          <p:cNvSpPr>
+            <a:spLocks noGrp="1"/>
+          </p:cNvSpPr>
+          <p:nvPr>
+            <p:ph type="sldNum" sz="quarter" idx="10"/>
+          </p:nvPr>
+        </p:nvSpPr>
+        <p:spPr/>
+        <p:txBody>
+          <a:bodyPr/>
+          <a:lstStyle/>
+          <a:p>
+            <a:fld id="{F7021451-1387-4CA6-816F-3879F97B5CBC}" type="slidenum">
+              <a:rPr lang="en-US"/>
+              <a:t>20</a:t>
             </a:fld>
             <a:endParaRPr lang="en-US"/>
           </a:p>
@@ -1489,7 +1459,6 @@
               <a:rPr lang="en-US" dirty="0"/>
               <a:t>0:02–0:03. Emphasize exact equivalence, not a new filter design.</a:t>
             </a:r>
-            <a:endParaRPr lang="en-US" dirty="0"/>
           </a:p>
         </p:txBody>
       </p:sp>
@@ -1577,7 +1546,6 @@
               <a:rPr lang="en-US" dirty="0"/>
               <a:t>0:03–0:10. Work M=3 with h={1,…,8}: e0={1,4,7}, e1={2,5,8}, e2={3,6}. Ask students to identify phases before showing the plot.</a:t>
             </a:r>
-            <a:endParaRPr lang="en-US" dirty="0"/>
           </a:p>
         </p:txBody>
       </p:sp>
@@ -1665,7 +1633,6 @@
               <a:rPr lang="en-US" dirty="0"/>
               <a:t>0:10–0:16. Derive by writing n=rM+k. This index substitution is the heart of the formula.</a:t>
             </a:r>
-            <a:endParaRPr lang="en-US" dirty="0"/>
           </a:p>
         </p:txBody>
       </p:sp>
@@ -1753,7 +1720,6 @@
               <a:rPr lang="en-US" dirty="0"/>
               <a:t>0:16–0:20. This catches indexing errors before the efficient-decimator derivation.</a:t>
             </a:r>
-            <a:endParaRPr lang="en-US" dirty="0"/>
           </a:p>
         </p:txBody>
       </p:sp>
@@ -1798,7 +1764,13 @@
   <p:cSld>
     <p:spTree>
       <p:nvGrpSpPr>
-        <p:cNvPr id="1" name=""/>
+        <p:cNvPr id="1" name="">
+          <a:extLst>
+            <a:ext uri="{FF2B5EF4-FFF2-40B4-BE49-F238E27FC236}">
+              <a16:creationId xmlns:a16="http://schemas.microsoft.com/office/drawing/2014/main" id="{2481F16F-41AC-2D8B-9DB0-02776776FE58}"/>
+            </a:ext>
+          </a:extLst>
+        </p:cNvPr>
         <p:cNvGrpSpPr/>
         <p:nvPr/>
       </p:nvGrpSpPr>
@@ -1812,7 +1784,13 @@
       </p:grpSpPr>
       <p:sp>
         <p:nvSpPr>
-          <p:cNvPr id="2" name="Slide Image Placeholder 1"/>
+          <p:cNvPr id="2" name="Slide Image Placeholder 1">
+            <a:extLst>
+              <a:ext uri="{FF2B5EF4-FFF2-40B4-BE49-F238E27FC236}">
+                <a16:creationId xmlns:a16="http://schemas.microsoft.com/office/drawing/2014/main" id="{A33F9A28-A5D2-2DEE-BA81-B83F74D04001}"/>
+              </a:ext>
+            </a:extLst>
+          </p:cNvPr>
           <p:cNvSpPr>
             <a:spLocks noGrp="1" noRot="1" noChangeAspect="1"/>
           </p:cNvSpPr>
@@ -1824,7 +1802,13 @@
       </p:sp>
       <p:sp>
         <p:nvSpPr>
-          <p:cNvPr id="3" name="Notes Placeholder 2"/>
+          <p:cNvPr id="3" name="Notes Placeholder 2">
+            <a:extLst>
+              <a:ext uri="{FF2B5EF4-FFF2-40B4-BE49-F238E27FC236}">
+                <a16:creationId xmlns:a16="http://schemas.microsoft.com/office/drawing/2014/main" id="{C9E16507-BAB1-68D6-B0B0-EB3351CFFF4C}"/>
+              </a:ext>
+            </a:extLst>
+          </p:cNvPr>
           <p:cNvSpPr>
             <a:spLocks noGrp="1"/>
           </p:cNvSpPr>
@@ -1839,15 +1823,20 @@
           <a:p>
             <a:r>
               <a:rPr lang="en-US" dirty="0"/>
-              <a:t>0:20. Transition: polyphase is valuable because decimation already contains a downsampler.</a:t>
-            </a:r>
-            <a:endParaRPr lang="en-US" dirty="0"/>
-          </a:p>
-        </p:txBody>
-      </p:sp>
-      <p:sp>
-        <p:nvSpPr>
-          <p:cNvPr id="4" name="Slide Number Placeholder 3"/>
+              <a:t>0:16–0:20. This catches indexing errors before the efficient-decimator derivation.</a:t>
+            </a:r>
+          </a:p>
+        </p:txBody>
+      </p:sp>
+      <p:sp>
+        <p:nvSpPr>
+          <p:cNvPr id="4" name="Slide Number Placeholder 3">
+            <a:extLst>
+              <a:ext uri="{FF2B5EF4-FFF2-40B4-BE49-F238E27FC236}">
+                <a16:creationId xmlns:a16="http://schemas.microsoft.com/office/drawing/2014/main" id="{D40B6B05-DB50-B5AB-E36F-A16809AA662D}"/>
+              </a:ext>
+            </a:extLst>
+          </p:cNvPr>
           <p:cNvSpPr>
             <a:spLocks noGrp="1"/>
           </p:cNvSpPr>
@@ -1871,7 +1860,7 @@
     </p:spTree>
     <p:extLst>
       <p:ext uri="{BB962C8B-B14F-4D97-AF65-F5344CB8AC3E}">
-        <p14:creationId xmlns:p14="http://schemas.microsoft.com/office/powerpoint/2010/main" val="1024086991"/>
+        <p14:creationId xmlns:p14="http://schemas.microsoft.com/office/powerpoint/2010/main" val="2911041547"/>
       </p:ext>
     </p:extLst>
   </p:cSld>
@@ -1927,9 +1916,8 @@
           <a:p>
             <a:r>
               <a:rPr lang="en-US" dirty="0"/>
-              <a:t>0:20–0:28. Give a concrete number: N=32, M=4. Naive ≈32Fs multiplies/s; efficient ≈8Fs multiplies/s. Same filter, same output.</a:t>
-            </a:r>
-            <a:endParaRPr lang="en-US" dirty="0"/>
+              <a:t>0:20. Transition: polyphase is valuable because decimation already contains a downsampler.</a:t>
+            </a:r>
           </a:p>
         </p:txBody>
       </p:sp>
@@ -2015,9 +2003,8 @@
           <a:p>
             <a:r>
               <a:rPr lang="en-US" dirty="0"/>
-              <a:t>0:28–0:36. This is a critical precision point. The phrase “move the filter through the downsampler” is dangerous unless students remember the z^M condition.</a:t>
-            </a:r>
-            <a:endParaRPr lang="en-US" dirty="0"/>
+              <a:t>0:20–0:28. Give a concrete number: N=32, M=4. Naive ≈32Fs multiplies/s; efficient ≈8Fs multiplies/s. Same filter, same output.</a:t>
+            </a:r>
           </a:p>
         </p:txBody>
       </p:sp>
@@ -2095,6 +2082,7 @@
         <a:solidFill>
           <a:srgbClr val="FFFFFF"/>
         </a:solidFill>
+        <a:effectLst/>
       </p:bgPr>
     </p:bg>
     <p:spTree>
@@ -2157,7 +2145,7 @@
           <a:bodyPr wrap="square" lIns="0" tIns="0" rIns="0" bIns="0" rtlCol="0" anchor="ctr"/>
           <a:lstStyle/>
           <a:p>
-            <a:pPr indent="0" marL="0">
+            <a:pPr marL="0" indent="0">
               <a:buNone/>
             </a:pPr>
             <a:r>
@@ -2196,7 +2184,7 @@
           <a:bodyPr wrap="square" lIns="0" tIns="0" rIns="0" bIns="0" rtlCol="0" anchor="ctr"/>
           <a:lstStyle/>
           <a:p>
-            <a:pPr algn="r" indent="0" marL="0">
+            <a:pPr marL="0" indent="0" algn="r">
               <a:buNone/>
             </a:pPr>
             <a:r>
@@ -2257,7 +2245,7 @@
           </a:prstGeom>
           <a:extLst>
             <a:ext uri="{C572A759-6A51-4108-AA02-DFA0A04FC94B}">
-              <ma14:wrappingTextBoxFlag xmlns:ma14="http://schemas.microsoft.com/office/mac/drawingml/2011/main" val="0"/>
+              <ma14:wrappingTextBoxFlag xmlns:ma14="http://schemas.microsoft.com/office/mac/drawingml/2011/main" xmlns="" val="0"/>
             </a:ext>
           </a:extLst>
         </p:spPr>
@@ -2278,8 +2266,8 @@
           <a:p>
             <a:pPr algn="r"/>
             <a:fld id="{F7021451-1387-4CA6-816F-3879F97B5CBC}" type="slidenum">
-              <a:rPr b="0" lang="en-US"/>
-              <a:t>1002</a:t>
+              <a:rPr lang="en-US" b="0"/>
+              <a:t>‹#›</a:t>
             </a:fld>
             <a:endParaRPr lang="en-US"/>
           </a:p>
@@ -2296,6 +2284,11 @@
 <file path=ppt/slideMasters/slideMaster1.xml><?xml version="1.0" encoding="utf-8"?>
 <p:sldMaster xmlns:a="http://schemas.openxmlformats.org/drawingml/2006/main" xmlns:r="http://schemas.openxmlformats.org/officeDocument/2006/relationships" xmlns:p="http://schemas.openxmlformats.org/presentationml/2006/main">
   <p:cSld>
+    <p:bg>
+      <p:bgRef idx="1001">
+        <a:schemeClr val="bg1"/>
+      </p:bgRef>
+    </p:bg>
     <p:spTree>
       <p:nvGrpSpPr>
         <p:cNvPr id="1" name=""/>
@@ -2330,7 +2323,7 @@
           </a:prstGeom>
           <a:extLst>
             <a:ext uri="{C572A759-6A51-4108-AA02-DFA0A04FC94B}">
-              <ma14:wrappingTextBoxFlag xmlns:ma14="http://schemas.microsoft.com/office/mac/drawingml/2011/main" val="0"/>
+              <ma14:wrappingTextBoxFlag xmlns:ma14="http://schemas.microsoft.com/office/mac/drawingml/2011/main" xmlns="" val="0"/>
             </a:ext>
           </a:extLst>
         </p:spPr>
@@ -2351,8 +2344,8 @@
           <a:p>
             <a:pPr algn="r"/>
             <a:fld id="{F7021451-1387-4CA6-816F-3879F97B5CBC}" type="slidenum">
-              <a:rPr b="0" lang="en-US"/>
-              <a:t>null</a:t>
+              <a:rPr lang="en-US" b="0"/>
+              <a:t>‹#›</a:t>
             </a:fld>
             <a:endParaRPr lang="en-US"/>
           </a:p>
@@ -2627,6 +2620,7 @@
         <a:solidFill>
           <a:srgbClr val="17324D"/>
         </a:solidFill>
+        <a:effectLst/>
       </p:bgPr>
     </p:bg>
     <p:spTree>
@@ -2667,6 +2661,13 @@
             <a:prstDash val="solid"/>
           </a:ln>
         </p:spPr>
+        <p:txBody>
+          <a:bodyPr/>
+          <a:lstStyle/>
+          <a:p>
+            <a:endParaRPr lang="en-US"/>
+          </a:p>
+        </p:txBody>
       </p:sp>
       <p:sp>
         <p:nvSpPr>
@@ -2689,7 +2690,7 @@
           <a:bodyPr wrap="square" lIns="0" tIns="0" rIns="0" bIns="0" rtlCol="0" anchor="ctr"/>
           <a:lstStyle/>
           <a:p>
-            <a:pPr indent="0" marL="0">
+            <a:pPr marL="0" indent="0">
               <a:buNone/>
             </a:pPr>
             <a:r>
@@ -2701,7 +2702,7 @@
                 <a:ea typeface="Aptos" pitchFamily="34" charset="-122"/>
                 <a:cs typeface="Aptos" pitchFamily="34" charset="-120"/>
               </a:rPr>
-              <a:t>LECTURE 13</a:t>
+              <a:t>WEEK 7 ● LECTURE 13</a:t>
             </a:r>
             <a:endParaRPr lang="en-US" sz="1200" dirty="0"/>
           </a:p>
@@ -2730,7 +2731,7 @@
           </a:bodyPr>
           <a:lstStyle/>
           <a:p>
-            <a:pPr indent="0" marL="0">
+            <a:pPr marL="0" indent="0">
               <a:buNone/>
             </a:pPr>
             <a:r>
@@ -2769,7 +2770,7 @@
           <a:bodyPr wrap="square" lIns="0" tIns="0" rIns="0" bIns="0" rtlCol="0" anchor="ctr"/>
           <a:lstStyle/>
           <a:p>
-            <a:pPr indent="0" marL="0">
+            <a:pPr marL="0" indent="0">
               <a:buNone/>
             </a:pPr>
             <a:r>
@@ -2811,6 +2812,13 @@
             <a:prstDash val="solid"/>
           </a:ln>
         </p:spPr>
+        <p:txBody>
+          <a:bodyPr/>
+          <a:lstStyle/>
+          <a:p>
+            <a:endParaRPr lang="en-US"/>
+          </a:p>
+        </p:txBody>
       </p:sp>
       <p:sp>
         <p:nvSpPr>
@@ -2835,7 +2843,7 @@
           </a:bodyPr>
           <a:lstStyle/>
           <a:p>
-            <a:pPr algn="ctr" indent="0" marL="0">
+            <a:pPr marL="0" indent="0" algn="ctr">
               <a:buNone/>
             </a:pPr>
             <a:r>
@@ -2877,6 +2885,13 @@
             <a:prstDash val="solid"/>
           </a:ln>
         </p:spPr>
+        <p:txBody>
+          <a:bodyPr/>
+          <a:lstStyle/>
+          <a:p>
+            <a:endParaRPr lang="en-US"/>
+          </a:p>
+        </p:txBody>
       </p:sp>
       <p:sp>
         <p:nvSpPr>
@@ -2897,11 +2912,11 @@
         </p:spPr>
         <p:txBody>
           <a:bodyPr wrap="square" lIns="0" tIns="0" rIns="0" bIns="0" rtlCol="0" anchor="ctr">
-            <a:normAutofit/>
+            <a:normAutofit fontScale="92500" lnSpcReduction="10000"/>
           </a:bodyPr>
           <a:lstStyle/>
           <a:p>
-            <a:pPr algn="ctr" indent="0" marL="0">
+            <a:pPr marL="0" indent="0" algn="ctr">
               <a:buNone/>
             </a:pPr>
             <a:r>
@@ -2940,7 +2955,7 @@
           <a:bodyPr wrap="square" lIns="0" tIns="0" rIns="0" bIns="0" rtlCol="0" anchor="ctr"/>
           <a:lstStyle/>
           <a:p>
-            <a:pPr indent="0" marL="0">
+            <a:pPr marL="0" indent="0">
               <a:buNone/>
             </a:pPr>
             <a:r>
@@ -2967,6 +2982,1487 @@
 </file>
 
 <file path=ppt/slides/slide10.xml><?xml version="1.0" encoding="utf-8"?>
+<p:sld xmlns:a="http://schemas.openxmlformats.org/drawingml/2006/main" xmlns:r="http://schemas.openxmlformats.org/officeDocument/2006/relationships" xmlns:p="http://schemas.openxmlformats.org/presentationml/2006/main">
+  <p:cSld name="Slide 9">
+    <p:spTree>
+      <p:nvGrpSpPr>
+        <p:cNvPr id="1" name=""/>
+        <p:cNvGrpSpPr/>
+        <p:nvPr/>
+      </p:nvGrpSpPr>
+      <p:grpSpPr>
+        <a:xfrm>
+          <a:off x="0" y="0"/>
+          <a:ext cx="0" cy="0"/>
+          <a:chOff x="0" y="0"/>
+          <a:chExt cx="0" cy="0"/>
+        </a:xfrm>
+      </p:grpSpPr>
+      <p:sp>
+        <p:nvSpPr>
+          <p:cNvPr id="2" name="Text 0"/>
+          <p:cNvSpPr/>
+          <p:nvPr/>
+        </p:nvSpPr>
+        <p:spPr>
+          <a:xfrm>
+            <a:off x="566928" y="310896"/>
+            <a:ext cx="11018520" cy="438912"/>
+          </a:xfrm>
+          <a:prstGeom prst="rect">
+            <a:avLst/>
+          </a:prstGeom>
+          <a:noFill/>
+          <a:ln/>
+        </p:spPr>
+        <p:txBody>
+          <a:bodyPr wrap="square" lIns="0" tIns="0" rIns="0" bIns="0" rtlCol="0" anchor="ctr">
+            <a:normAutofit/>
+          </a:bodyPr>
+          <a:lstStyle/>
+          <a:p>
+            <a:pPr marL="0" indent="0">
+              <a:buNone/>
+            </a:pPr>
+            <a:r>
+              <a:rPr lang="en-US" sz="2500" b="1" dirty="0">
+                <a:solidFill>
+                  <a:srgbClr val="17324D"/>
+                </a:solidFill>
+                <a:latin typeface="Aptos" pitchFamily="34" charset="0"/>
+                <a:ea typeface="Aptos" pitchFamily="34" charset="-122"/>
+                <a:cs typeface="Aptos" pitchFamily="34" charset="-120"/>
+              </a:rPr>
+              <a:t>First Noble Identity: the precise statement</a:t>
+            </a:r>
+            <a:endParaRPr lang="en-US" sz="2500" dirty="0"/>
+          </a:p>
+        </p:txBody>
+      </p:sp>
+      <p:sp>
+        <p:nvSpPr>
+          <p:cNvPr id="3" name="Text 1"/>
+          <p:cNvSpPr/>
+          <p:nvPr/>
+        </p:nvSpPr>
+        <p:spPr>
+          <a:xfrm>
+            <a:off x="585216" y="795528"/>
+            <a:ext cx="10744200" cy="292608"/>
+          </a:xfrm>
+          <a:prstGeom prst="rect">
+            <a:avLst/>
+          </a:prstGeom>
+          <a:noFill/>
+          <a:ln/>
+        </p:spPr>
+        <p:txBody>
+          <a:bodyPr wrap="square" lIns="0" tIns="0" rIns="0" bIns="0" rtlCol="0" anchor="ctr">
+            <a:normAutofit/>
+          </a:bodyPr>
+          <a:lstStyle/>
+          <a:p>
+            <a:pPr marL="0" indent="0">
+              <a:buNone/>
+            </a:pPr>
+            <a:r>
+              <a:rPr lang="en-US" sz="1150" dirty="0">
+                <a:solidFill>
+                  <a:srgbClr val="64748B"/>
+                </a:solidFill>
+                <a:latin typeface="Aptos" pitchFamily="34" charset="0"/>
+                <a:ea typeface="Aptos" pitchFamily="34" charset="-122"/>
+                <a:cs typeface="Aptos" pitchFamily="34" charset="-120"/>
+              </a:rPr>
+              <a:t>A rate changer commutes with a filter only after the filter has the required zᴹ structure.</a:t>
+            </a:r>
+            <a:endParaRPr lang="en-US" sz="1150" dirty="0"/>
+          </a:p>
+        </p:txBody>
+      </p:sp>
+      <p:sp>
+        <p:nvSpPr>
+          <p:cNvPr id="4" name="Shape 2"/>
+          <p:cNvSpPr/>
+          <p:nvPr/>
+        </p:nvSpPr>
+        <p:spPr>
+          <a:xfrm>
+            <a:off x="914400" y="1417320"/>
+            <a:ext cx="1017270" cy="658368"/>
+          </a:xfrm>
+          <a:prstGeom prst="roundRect">
+            <a:avLst/>
+          </a:prstGeom>
+          <a:solidFill>
+            <a:srgbClr val="F8FAFC"/>
+          </a:solidFill>
+          <a:ln w="19050">
+            <a:solidFill>
+              <a:srgbClr val="1F7A8C"/>
+            </a:solidFill>
+            <a:prstDash val="solid"/>
+          </a:ln>
+        </p:spPr>
+        <p:txBody>
+          <a:bodyPr/>
+          <a:lstStyle/>
+          <a:p>
+            <a:endParaRPr lang="en-US"/>
+          </a:p>
+        </p:txBody>
+      </p:sp>
+      <p:sp>
+        <p:nvSpPr>
+          <p:cNvPr id="5" name="Text 3"/>
+          <p:cNvSpPr/>
+          <p:nvPr/>
+        </p:nvSpPr>
+        <p:spPr>
+          <a:xfrm>
+            <a:off x="960120" y="1490472"/>
+            <a:ext cx="925830" cy="512064"/>
+          </a:xfrm>
+          <a:prstGeom prst="rect">
+            <a:avLst/>
+          </a:prstGeom>
+          <a:noFill/>
+          <a:ln/>
+        </p:spPr>
+        <p:txBody>
+          <a:bodyPr wrap="square" lIns="0" tIns="0" rIns="0" bIns="0" rtlCol="0" anchor="ctr">
+            <a:normAutofit/>
+          </a:bodyPr>
+          <a:lstStyle/>
+          <a:p>
+            <a:pPr marL="0" indent="0" algn="ctr">
+              <a:buNone/>
+            </a:pPr>
+            <a:r>
+              <a:rPr lang="en-US" sz="1400" b="1" dirty="0">
+                <a:solidFill>
+                  <a:srgbClr val="17324D"/>
+                </a:solidFill>
+                <a:latin typeface="Aptos" pitchFamily="34" charset="0"/>
+                <a:ea typeface="Aptos" pitchFamily="34" charset="-122"/>
+                <a:cs typeface="Aptos" pitchFamily="34" charset="-120"/>
+              </a:rPr>
+              <a:t>x[n]</a:t>
+            </a:r>
+            <a:endParaRPr lang="en-US" sz="1400" dirty="0"/>
+          </a:p>
+        </p:txBody>
+      </p:sp>
+      <p:sp>
+        <p:nvSpPr>
+          <p:cNvPr id="6" name="Shape 4"/>
+          <p:cNvSpPr/>
+          <p:nvPr/>
+        </p:nvSpPr>
+        <p:spPr>
+          <a:xfrm>
+            <a:off x="1931670" y="1746504"/>
+            <a:ext cx="201168" cy="0"/>
+          </a:xfrm>
+          <a:prstGeom prst="line">
+            <a:avLst/>
+          </a:prstGeom>
+          <a:noFill/>
+          <a:ln w="21590">
+            <a:solidFill>
+              <a:srgbClr val="64748B"/>
+            </a:solidFill>
+            <a:prstDash val="solid"/>
+            <a:headEnd type="none"/>
+            <a:tailEnd type="triangle"/>
+          </a:ln>
+        </p:spPr>
+        <p:txBody>
+          <a:bodyPr/>
+          <a:lstStyle/>
+          <a:p>
+            <a:endParaRPr lang="en-US"/>
+          </a:p>
+        </p:txBody>
+      </p:sp>
+      <p:sp>
+        <p:nvSpPr>
+          <p:cNvPr id="7" name="Shape 5"/>
+          <p:cNvSpPr/>
+          <p:nvPr/>
+        </p:nvSpPr>
+        <p:spPr>
+          <a:xfrm>
+            <a:off x="2160270" y="1417320"/>
+            <a:ext cx="1017270" cy="658368"/>
+          </a:xfrm>
+          <a:prstGeom prst="roundRect">
+            <a:avLst/>
+          </a:prstGeom>
+          <a:solidFill>
+            <a:srgbClr val="F8FAFC"/>
+          </a:solidFill>
+          <a:ln w="19050">
+            <a:solidFill>
+              <a:srgbClr val="1F7A8C"/>
+            </a:solidFill>
+            <a:prstDash val="solid"/>
+          </a:ln>
+        </p:spPr>
+        <p:txBody>
+          <a:bodyPr/>
+          <a:lstStyle/>
+          <a:p>
+            <a:endParaRPr lang="en-US"/>
+          </a:p>
+        </p:txBody>
+      </p:sp>
+      <p:sp>
+        <p:nvSpPr>
+          <p:cNvPr id="8" name="Text 6"/>
+          <p:cNvSpPr/>
+          <p:nvPr/>
+        </p:nvSpPr>
+        <p:spPr>
+          <a:xfrm>
+            <a:off x="2205990" y="1490472"/>
+            <a:ext cx="925830" cy="512064"/>
+          </a:xfrm>
+          <a:prstGeom prst="rect">
+            <a:avLst/>
+          </a:prstGeom>
+          <a:noFill/>
+          <a:ln/>
+        </p:spPr>
+        <p:txBody>
+          <a:bodyPr wrap="square" lIns="0" tIns="0" rIns="0" bIns="0" rtlCol="0" anchor="ctr">
+            <a:normAutofit/>
+          </a:bodyPr>
+          <a:lstStyle/>
+          <a:p>
+            <a:pPr marL="0" indent="0" algn="ctr">
+              <a:buNone/>
+            </a:pPr>
+            <a:r>
+              <a:rPr lang="en-US" sz="1400" b="1" dirty="0">
+                <a:solidFill>
+                  <a:srgbClr val="17324D"/>
+                </a:solidFill>
+                <a:latin typeface="Aptos" pitchFamily="34" charset="0"/>
+                <a:ea typeface="Aptos" pitchFamily="34" charset="-122"/>
+                <a:cs typeface="Aptos" pitchFamily="34" charset="-120"/>
+              </a:rPr>
+              <a:t>G(zᴹ)</a:t>
+            </a:r>
+            <a:endParaRPr lang="en-US" sz="1400" dirty="0"/>
+          </a:p>
+        </p:txBody>
+      </p:sp>
+      <p:sp>
+        <p:nvSpPr>
+          <p:cNvPr id="9" name="Shape 7"/>
+          <p:cNvSpPr/>
+          <p:nvPr/>
+        </p:nvSpPr>
+        <p:spPr>
+          <a:xfrm>
+            <a:off x="3177540" y="1746504"/>
+            <a:ext cx="201168" cy="0"/>
+          </a:xfrm>
+          <a:prstGeom prst="line">
+            <a:avLst/>
+          </a:prstGeom>
+          <a:noFill/>
+          <a:ln w="21590">
+            <a:solidFill>
+              <a:srgbClr val="64748B"/>
+            </a:solidFill>
+            <a:prstDash val="solid"/>
+            <a:headEnd type="none"/>
+            <a:tailEnd type="triangle"/>
+          </a:ln>
+        </p:spPr>
+        <p:txBody>
+          <a:bodyPr/>
+          <a:lstStyle/>
+          <a:p>
+            <a:endParaRPr lang="en-US"/>
+          </a:p>
+        </p:txBody>
+      </p:sp>
+      <p:sp>
+        <p:nvSpPr>
+          <p:cNvPr id="10" name="Shape 8"/>
+          <p:cNvSpPr/>
+          <p:nvPr/>
+        </p:nvSpPr>
+        <p:spPr>
+          <a:xfrm>
+            <a:off x="3406140" y="1417320"/>
+            <a:ext cx="1017270" cy="658368"/>
+          </a:xfrm>
+          <a:prstGeom prst="roundRect">
+            <a:avLst/>
+          </a:prstGeom>
+          <a:solidFill>
+            <a:srgbClr val="F8FAFC"/>
+          </a:solidFill>
+          <a:ln w="19050">
+            <a:solidFill>
+              <a:srgbClr val="D97706"/>
+            </a:solidFill>
+            <a:prstDash val="solid"/>
+          </a:ln>
+        </p:spPr>
+        <p:txBody>
+          <a:bodyPr/>
+          <a:lstStyle/>
+          <a:p>
+            <a:endParaRPr lang="en-US"/>
+          </a:p>
+        </p:txBody>
+      </p:sp>
+      <p:sp>
+        <p:nvSpPr>
+          <p:cNvPr id="11" name="Text 9"/>
+          <p:cNvSpPr/>
+          <p:nvPr/>
+        </p:nvSpPr>
+        <p:spPr>
+          <a:xfrm>
+            <a:off x="3451860" y="1490472"/>
+            <a:ext cx="925830" cy="512064"/>
+          </a:xfrm>
+          <a:prstGeom prst="rect">
+            <a:avLst/>
+          </a:prstGeom>
+          <a:noFill/>
+          <a:ln/>
+        </p:spPr>
+        <p:txBody>
+          <a:bodyPr wrap="square" lIns="0" tIns="0" rIns="0" bIns="0" rtlCol="0" anchor="ctr">
+            <a:normAutofit/>
+          </a:bodyPr>
+          <a:lstStyle/>
+          <a:p>
+            <a:pPr marL="0" indent="0" algn="ctr">
+              <a:buNone/>
+            </a:pPr>
+            <a:r>
+              <a:rPr lang="en-US" sz="1400" b="1" dirty="0">
+                <a:solidFill>
+                  <a:srgbClr val="17324D"/>
+                </a:solidFill>
+                <a:latin typeface="Aptos" pitchFamily="34" charset="0"/>
+                <a:ea typeface="Aptos" pitchFamily="34" charset="-122"/>
+                <a:cs typeface="Aptos" pitchFamily="34" charset="-120"/>
+              </a:rPr>
+              <a:t>↓ M</a:t>
+            </a:r>
+            <a:endParaRPr lang="en-US" sz="1400" dirty="0"/>
+          </a:p>
+        </p:txBody>
+      </p:sp>
+      <p:sp>
+        <p:nvSpPr>
+          <p:cNvPr id="12" name="Shape 10"/>
+          <p:cNvSpPr/>
+          <p:nvPr/>
+        </p:nvSpPr>
+        <p:spPr>
+          <a:xfrm>
+            <a:off x="4423410" y="1746504"/>
+            <a:ext cx="201168" cy="0"/>
+          </a:xfrm>
+          <a:prstGeom prst="line">
+            <a:avLst/>
+          </a:prstGeom>
+          <a:noFill/>
+          <a:ln w="21590">
+            <a:solidFill>
+              <a:srgbClr val="64748B"/>
+            </a:solidFill>
+            <a:prstDash val="solid"/>
+            <a:headEnd type="none"/>
+            <a:tailEnd type="triangle"/>
+          </a:ln>
+        </p:spPr>
+        <p:txBody>
+          <a:bodyPr/>
+          <a:lstStyle/>
+          <a:p>
+            <a:endParaRPr lang="en-US"/>
+          </a:p>
+        </p:txBody>
+      </p:sp>
+      <p:sp>
+        <p:nvSpPr>
+          <p:cNvPr id="13" name="Shape 11"/>
+          <p:cNvSpPr/>
+          <p:nvPr/>
+        </p:nvSpPr>
+        <p:spPr>
+          <a:xfrm>
+            <a:off x="4652010" y="1417320"/>
+            <a:ext cx="1017270" cy="658368"/>
+          </a:xfrm>
+          <a:prstGeom prst="roundRect">
+            <a:avLst/>
+          </a:prstGeom>
+          <a:solidFill>
+            <a:srgbClr val="F8FAFC"/>
+          </a:solidFill>
+          <a:ln w="19050">
+            <a:solidFill>
+              <a:srgbClr val="1F7A8C"/>
+            </a:solidFill>
+            <a:prstDash val="solid"/>
+          </a:ln>
+        </p:spPr>
+        <p:txBody>
+          <a:bodyPr/>
+          <a:lstStyle/>
+          <a:p>
+            <a:endParaRPr lang="en-US"/>
+          </a:p>
+        </p:txBody>
+      </p:sp>
+      <p:sp>
+        <p:nvSpPr>
+          <p:cNvPr id="14" name="Text 12"/>
+          <p:cNvSpPr/>
+          <p:nvPr/>
+        </p:nvSpPr>
+        <p:spPr>
+          <a:xfrm>
+            <a:off x="4697730" y="1490472"/>
+            <a:ext cx="925830" cy="512064"/>
+          </a:xfrm>
+          <a:prstGeom prst="rect">
+            <a:avLst/>
+          </a:prstGeom>
+          <a:noFill/>
+          <a:ln/>
+        </p:spPr>
+        <p:txBody>
+          <a:bodyPr wrap="square" lIns="0" tIns="0" rIns="0" bIns="0" rtlCol="0" anchor="ctr">
+            <a:normAutofit/>
+          </a:bodyPr>
+          <a:lstStyle/>
+          <a:p>
+            <a:pPr marL="0" indent="0" algn="ctr">
+              <a:buNone/>
+            </a:pPr>
+            <a:r>
+              <a:rPr lang="en-US" sz="1400" b="1" dirty="0">
+                <a:solidFill>
+                  <a:srgbClr val="17324D"/>
+                </a:solidFill>
+                <a:latin typeface="Aptos" pitchFamily="34" charset="0"/>
+                <a:ea typeface="Aptos" pitchFamily="34" charset="-122"/>
+                <a:cs typeface="Aptos" pitchFamily="34" charset="-120"/>
+              </a:rPr>
+              <a:t>y[m]</a:t>
+            </a:r>
+            <a:endParaRPr lang="en-US" sz="1400" dirty="0"/>
+          </a:p>
+        </p:txBody>
+      </p:sp>
+      <p:sp>
+        <p:nvSpPr>
+          <p:cNvPr id="15" name="Text 13"/>
+          <p:cNvSpPr/>
+          <p:nvPr/>
+        </p:nvSpPr>
+        <p:spPr>
+          <a:xfrm>
+            <a:off x="5669280" y="1481328"/>
+            <a:ext cx="640080" cy="457200"/>
+          </a:xfrm>
+          <a:prstGeom prst="rect">
+            <a:avLst/>
+          </a:prstGeom>
+          <a:noFill/>
+          <a:ln/>
+        </p:spPr>
+        <p:txBody>
+          <a:bodyPr wrap="square" lIns="0" tIns="0" rIns="0" bIns="0" rtlCol="0" anchor="ctr"/>
+          <a:lstStyle/>
+          <a:p>
+            <a:pPr marL="0" indent="0" algn="ctr">
+              <a:buNone/>
+            </a:pPr>
+            <a:r>
+              <a:rPr lang="en-US" sz="2800" b="1" dirty="0">
+                <a:solidFill>
+                  <a:srgbClr val="17324D"/>
+                </a:solidFill>
+                <a:latin typeface="Cambria Math" pitchFamily="34" charset="0"/>
+                <a:ea typeface="Cambria Math" pitchFamily="34" charset="-122"/>
+                <a:cs typeface="Cambria Math" pitchFamily="34" charset="-120"/>
+              </a:rPr>
+              <a:t>≡</a:t>
+            </a:r>
+            <a:endParaRPr lang="en-US" sz="2800" dirty="0"/>
+          </a:p>
+        </p:txBody>
+      </p:sp>
+      <p:sp>
+        <p:nvSpPr>
+          <p:cNvPr id="16" name="Shape 14"/>
+          <p:cNvSpPr/>
+          <p:nvPr/>
+        </p:nvSpPr>
+        <p:spPr>
+          <a:xfrm>
+            <a:off x="6355080" y="1417320"/>
+            <a:ext cx="1017270" cy="658368"/>
+          </a:xfrm>
+          <a:prstGeom prst="roundRect">
+            <a:avLst/>
+          </a:prstGeom>
+          <a:solidFill>
+            <a:srgbClr val="F8FAFC"/>
+          </a:solidFill>
+          <a:ln w="19050">
+            <a:solidFill>
+              <a:srgbClr val="1F7A8C"/>
+            </a:solidFill>
+            <a:prstDash val="solid"/>
+          </a:ln>
+        </p:spPr>
+        <p:txBody>
+          <a:bodyPr/>
+          <a:lstStyle/>
+          <a:p>
+            <a:endParaRPr lang="en-US"/>
+          </a:p>
+        </p:txBody>
+      </p:sp>
+      <p:sp>
+        <p:nvSpPr>
+          <p:cNvPr id="17" name="Text 15"/>
+          <p:cNvSpPr/>
+          <p:nvPr/>
+        </p:nvSpPr>
+        <p:spPr>
+          <a:xfrm>
+            <a:off x="6400800" y="1490472"/>
+            <a:ext cx="925830" cy="512064"/>
+          </a:xfrm>
+          <a:prstGeom prst="rect">
+            <a:avLst/>
+          </a:prstGeom>
+          <a:noFill/>
+          <a:ln/>
+        </p:spPr>
+        <p:txBody>
+          <a:bodyPr wrap="square" lIns="0" tIns="0" rIns="0" bIns="0" rtlCol="0" anchor="ctr">
+            <a:normAutofit/>
+          </a:bodyPr>
+          <a:lstStyle/>
+          <a:p>
+            <a:pPr marL="0" indent="0" algn="ctr">
+              <a:buNone/>
+            </a:pPr>
+            <a:r>
+              <a:rPr lang="en-US" sz="1400" b="1" dirty="0">
+                <a:solidFill>
+                  <a:srgbClr val="17324D"/>
+                </a:solidFill>
+                <a:latin typeface="Aptos" pitchFamily="34" charset="0"/>
+                <a:ea typeface="Aptos" pitchFamily="34" charset="-122"/>
+                <a:cs typeface="Aptos" pitchFamily="34" charset="-120"/>
+              </a:rPr>
+              <a:t>x[n]</a:t>
+            </a:r>
+            <a:endParaRPr lang="en-US" sz="1400" dirty="0"/>
+          </a:p>
+        </p:txBody>
+      </p:sp>
+      <p:sp>
+        <p:nvSpPr>
+          <p:cNvPr id="18" name="Shape 16"/>
+          <p:cNvSpPr/>
+          <p:nvPr/>
+        </p:nvSpPr>
+        <p:spPr>
+          <a:xfrm>
+            <a:off x="7372350" y="1746504"/>
+            <a:ext cx="201168" cy="0"/>
+          </a:xfrm>
+          <a:prstGeom prst="line">
+            <a:avLst/>
+          </a:prstGeom>
+          <a:noFill/>
+          <a:ln w="21590">
+            <a:solidFill>
+              <a:srgbClr val="64748B"/>
+            </a:solidFill>
+            <a:prstDash val="solid"/>
+            <a:headEnd type="none"/>
+            <a:tailEnd type="triangle"/>
+          </a:ln>
+        </p:spPr>
+        <p:txBody>
+          <a:bodyPr/>
+          <a:lstStyle/>
+          <a:p>
+            <a:endParaRPr lang="en-US"/>
+          </a:p>
+        </p:txBody>
+      </p:sp>
+      <p:sp>
+        <p:nvSpPr>
+          <p:cNvPr id="19" name="Shape 17"/>
+          <p:cNvSpPr/>
+          <p:nvPr/>
+        </p:nvSpPr>
+        <p:spPr>
+          <a:xfrm>
+            <a:off x="7600950" y="1417320"/>
+            <a:ext cx="1017270" cy="658368"/>
+          </a:xfrm>
+          <a:prstGeom prst="roundRect">
+            <a:avLst/>
+          </a:prstGeom>
+          <a:solidFill>
+            <a:srgbClr val="F8FAFC"/>
+          </a:solidFill>
+          <a:ln w="19050">
+            <a:solidFill>
+              <a:srgbClr val="D97706"/>
+            </a:solidFill>
+            <a:prstDash val="solid"/>
+          </a:ln>
+        </p:spPr>
+        <p:txBody>
+          <a:bodyPr/>
+          <a:lstStyle/>
+          <a:p>
+            <a:endParaRPr lang="en-US"/>
+          </a:p>
+        </p:txBody>
+      </p:sp>
+      <p:sp>
+        <p:nvSpPr>
+          <p:cNvPr id="20" name="Text 18"/>
+          <p:cNvSpPr/>
+          <p:nvPr/>
+        </p:nvSpPr>
+        <p:spPr>
+          <a:xfrm>
+            <a:off x="7646670" y="1490472"/>
+            <a:ext cx="925830" cy="512064"/>
+          </a:xfrm>
+          <a:prstGeom prst="rect">
+            <a:avLst/>
+          </a:prstGeom>
+          <a:noFill/>
+          <a:ln/>
+        </p:spPr>
+        <p:txBody>
+          <a:bodyPr wrap="square" lIns="0" tIns="0" rIns="0" bIns="0" rtlCol="0" anchor="ctr">
+            <a:normAutofit/>
+          </a:bodyPr>
+          <a:lstStyle/>
+          <a:p>
+            <a:pPr marL="0" indent="0" algn="ctr">
+              <a:buNone/>
+            </a:pPr>
+            <a:r>
+              <a:rPr lang="en-US" sz="1400" b="1" dirty="0">
+                <a:solidFill>
+                  <a:srgbClr val="17324D"/>
+                </a:solidFill>
+                <a:latin typeface="Aptos" pitchFamily="34" charset="0"/>
+                <a:ea typeface="Aptos" pitchFamily="34" charset="-122"/>
+                <a:cs typeface="Aptos" pitchFamily="34" charset="-120"/>
+              </a:rPr>
+              <a:t>↓ M</a:t>
+            </a:r>
+            <a:endParaRPr lang="en-US" sz="1400" dirty="0"/>
+          </a:p>
+        </p:txBody>
+      </p:sp>
+      <p:sp>
+        <p:nvSpPr>
+          <p:cNvPr id="21" name="Shape 19"/>
+          <p:cNvSpPr/>
+          <p:nvPr/>
+        </p:nvSpPr>
+        <p:spPr>
+          <a:xfrm>
+            <a:off x="8618220" y="1746504"/>
+            <a:ext cx="201168" cy="0"/>
+          </a:xfrm>
+          <a:prstGeom prst="line">
+            <a:avLst/>
+          </a:prstGeom>
+          <a:noFill/>
+          <a:ln w="21590">
+            <a:solidFill>
+              <a:srgbClr val="64748B"/>
+            </a:solidFill>
+            <a:prstDash val="solid"/>
+            <a:headEnd type="none"/>
+            <a:tailEnd type="triangle"/>
+          </a:ln>
+        </p:spPr>
+        <p:txBody>
+          <a:bodyPr/>
+          <a:lstStyle/>
+          <a:p>
+            <a:endParaRPr lang="en-US"/>
+          </a:p>
+        </p:txBody>
+      </p:sp>
+      <p:sp>
+        <p:nvSpPr>
+          <p:cNvPr id="22" name="Shape 20"/>
+          <p:cNvSpPr/>
+          <p:nvPr/>
+        </p:nvSpPr>
+        <p:spPr>
+          <a:xfrm>
+            <a:off x="8846820" y="1417320"/>
+            <a:ext cx="1017270" cy="658368"/>
+          </a:xfrm>
+          <a:prstGeom prst="roundRect">
+            <a:avLst/>
+          </a:prstGeom>
+          <a:solidFill>
+            <a:srgbClr val="F8FAFC"/>
+          </a:solidFill>
+          <a:ln w="19050">
+            <a:solidFill>
+              <a:srgbClr val="1F7A8C"/>
+            </a:solidFill>
+            <a:prstDash val="solid"/>
+          </a:ln>
+        </p:spPr>
+        <p:txBody>
+          <a:bodyPr/>
+          <a:lstStyle/>
+          <a:p>
+            <a:endParaRPr lang="en-US"/>
+          </a:p>
+        </p:txBody>
+      </p:sp>
+      <p:sp>
+        <p:nvSpPr>
+          <p:cNvPr id="23" name="Text 21"/>
+          <p:cNvSpPr/>
+          <p:nvPr/>
+        </p:nvSpPr>
+        <p:spPr>
+          <a:xfrm>
+            <a:off x="8892540" y="1490472"/>
+            <a:ext cx="925830" cy="512064"/>
+          </a:xfrm>
+          <a:prstGeom prst="rect">
+            <a:avLst/>
+          </a:prstGeom>
+          <a:noFill/>
+          <a:ln/>
+        </p:spPr>
+        <p:txBody>
+          <a:bodyPr wrap="square" lIns="0" tIns="0" rIns="0" bIns="0" rtlCol="0" anchor="ctr">
+            <a:normAutofit/>
+          </a:bodyPr>
+          <a:lstStyle/>
+          <a:p>
+            <a:pPr marL="0" indent="0" algn="ctr">
+              <a:buNone/>
+            </a:pPr>
+            <a:r>
+              <a:rPr lang="en-US" sz="1400" b="1" dirty="0">
+                <a:solidFill>
+                  <a:srgbClr val="17324D"/>
+                </a:solidFill>
+                <a:latin typeface="Aptos" pitchFamily="34" charset="0"/>
+                <a:ea typeface="Aptos" pitchFamily="34" charset="-122"/>
+                <a:cs typeface="Aptos" pitchFamily="34" charset="-120"/>
+              </a:rPr>
+              <a:t>G(z)</a:t>
+            </a:r>
+            <a:endParaRPr lang="en-US" sz="1400" dirty="0"/>
+          </a:p>
+        </p:txBody>
+      </p:sp>
+      <p:sp>
+        <p:nvSpPr>
+          <p:cNvPr id="24" name="Shape 22"/>
+          <p:cNvSpPr/>
+          <p:nvPr/>
+        </p:nvSpPr>
+        <p:spPr>
+          <a:xfrm>
+            <a:off x="9864090" y="1746504"/>
+            <a:ext cx="201168" cy="0"/>
+          </a:xfrm>
+          <a:prstGeom prst="line">
+            <a:avLst/>
+          </a:prstGeom>
+          <a:noFill/>
+          <a:ln w="21590">
+            <a:solidFill>
+              <a:srgbClr val="64748B"/>
+            </a:solidFill>
+            <a:prstDash val="solid"/>
+            <a:headEnd type="none"/>
+            <a:tailEnd type="triangle"/>
+          </a:ln>
+        </p:spPr>
+        <p:txBody>
+          <a:bodyPr/>
+          <a:lstStyle/>
+          <a:p>
+            <a:endParaRPr lang="en-US"/>
+          </a:p>
+        </p:txBody>
+      </p:sp>
+      <p:sp>
+        <p:nvSpPr>
+          <p:cNvPr id="25" name="Shape 23"/>
+          <p:cNvSpPr/>
+          <p:nvPr/>
+        </p:nvSpPr>
+        <p:spPr>
+          <a:xfrm>
+            <a:off x="10092690" y="1417320"/>
+            <a:ext cx="1017270" cy="658368"/>
+          </a:xfrm>
+          <a:prstGeom prst="roundRect">
+            <a:avLst/>
+          </a:prstGeom>
+          <a:solidFill>
+            <a:srgbClr val="F8FAFC"/>
+          </a:solidFill>
+          <a:ln w="19050">
+            <a:solidFill>
+              <a:srgbClr val="1F7A8C"/>
+            </a:solidFill>
+            <a:prstDash val="solid"/>
+          </a:ln>
+        </p:spPr>
+        <p:txBody>
+          <a:bodyPr/>
+          <a:lstStyle/>
+          <a:p>
+            <a:endParaRPr lang="en-US"/>
+          </a:p>
+        </p:txBody>
+      </p:sp>
+      <p:sp>
+        <p:nvSpPr>
+          <p:cNvPr id="26" name="Text 24"/>
+          <p:cNvSpPr/>
+          <p:nvPr/>
+        </p:nvSpPr>
+        <p:spPr>
+          <a:xfrm>
+            <a:off x="10138410" y="1490472"/>
+            <a:ext cx="925830" cy="512064"/>
+          </a:xfrm>
+          <a:prstGeom prst="rect">
+            <a:avLst/>
+          </a:prstGeom>
+          <a:noFill/>
+          <a:ln/>
+        </p:spPr>
+        <p:txBody>
+          <a:bodyPr wrap="square" lIns="0" tIns="0" rIns="0" bIns="0" rtlCol="0" anchor="ctr">
+            <a:normAutofit/>
+          </a:bodyPr>
+          <a:lstStyle/>
+          <a:p>
+            <a:pPr marL="0" indent="0" algn="ctr">
+              <a:buNone/>
+            </a:pPr>
+            <a:r>
+              <a:rPr lang="en-US" sz="1400" b="1" dirty="0">
+                <a:solidFill>
+                  <a:srgbClr val="17324D"/>
+                </a:solidFill>
+                <a:latin typeface="Aptos" pitchFamily="34" charset="0"/>
+                <a:ea typeface="Aptos" pitchFamily="34" charset="-122"/>
+                <a:cs typeface="Aptos" pitchFamily="34" charset="-120"/>
+              </a:rPr>
+              <a:t>y[m]</a:t>
+            </a:r>
+            <a:endParaRPr lang="en-US" sz="1400" dirty="0"/>
+          </a:p>
+        </p:txBody>
+      </p:sp>
+      <p:sp>
+        <p:nvSpPr>
+          <p:cNvPr id="27" name="Shape 25"/>
+          <p:cNvSpPr/>
+          <p:nvPr/>
+        </p:nvSpPr>
+        <p:spPr>
+          <a:xfrm>
+            <a:off x="914400" y="2743200"/>
+            <a:ext cx="4754880" cy="1188720"/>
+          </a:xfrm>
+          <a:prstGeom prst="roundRect">
+            <a:avLst/>
+          </a:prstGeom>
+          <a:solidFill>
+            <a:srgbClr val="F6F8FB"/>
+          </a:solidFill>
+          <a:ln w="12700">
+            <a:solidFill>
+              <a:srgbClr val="D9E2EC"/>
+            </a:solidFill>
+            <a:prstDash val="solid"/>
+          </a:ln>
+        </p:spPr>
+        <p:txBody>
+          <a:bodyPr/>
+          <a:lstStyle/>
+          <a:p>
+            <a:endParaRPr lang="en-US"/>
+          </a:p>
+        </p:txBody>
+      </p:sp>
+      <p:sp>
+        <p:nvSpPr>
+          <p:cNvPr id="28" name="Shape 26"/>
+          <p:cNvSpPr/>
+          <p:nvPr/>
+        </p:nvSpPr>
+        <p:spPr>
+          <a:xfrm>
+            <a:off x="914400" y="2743200"/>
+            <a:ext cx="73152" cy="1188720"/>
+          </a:xfrm>
+          <a:prstGeom prst="rect">
+            <a:avLst/>
+          </a:prstGeom>
+          <a:solidFill>
+            <a:srgbClr val="1F7A8C"/>
+          </a:solidFill>
+          <a:ln w="12700">
+            <a:solidFill>
+              <a:srgbClr val="1F7A8C"/>
+            </a:solidFill>
+            <a:prstDash val="solid"/>
+          </a:ln>
+        </p:spPr>
+        <p:txBody>
+          <a:bodyPr/>
+          <a:lstStyle/>
+          <a:p>
+            <a:endParaRPr lang="en-US"/>
+          </a:p>
+        </p:txBody>
+      </p:sp>
+      <p:sp>
+        <p:nvSpPr>
+          <p:cNvPr id="29" name="Text 27"/>
+          <p:cNvSpPr/>
+          <p:nvPr/>
+        </p:nvSpPr>
+        <p:spPr>
+          <a:xfrm>
+            <a:off x="1115568" y="2889504"/>
+            <a:ext cx="4407408" cy="256032"/>
+          </a:xfrm>
+          <a:prstGeom prst="rect">
+            <a:avLst/>
+          </a:prstGeom>
+          <a:noFill/>
+          <a:ln/>
+        </p:spPr>
+        <p:txBody>
+          <a:bodyPr wrap="square" lIns="0" tIns="0" rIns="0" bIns="0" rtlCol="0" anchor="ctr">
+            <a:normAutofit/>
+          </a:bodyPr>
+          <a:lstStyle/>
+          <a:p>
+            <a:pPr marL="0" indent="0">
+              <a:buNone/>
+            </a:pPr>
+            <a:r>
+              <a:rPr lang="en-US" sz="1400" b="1" dirty="0">
+                <a:solidFill>
+                  <a:srgbClr val="17324D"/>
+                </a:solidFill>
+                <a:latin typeface="Aptos" pitchFamily="34" charset="0"/>
+                <a:ea typeface="Aptos" pitchFamily="34" charset="-122"/>
+                <a:cs typeface="Aptos" pitchFamily="34" charset="-120"/>
+              </a:rPr>
+              <a:t>What changes</a:t>
+            </a:r>
+            <a:endParaRPr lang="en-US" sz="1400" dirty="0"/>
+          </a:p>
+        </p:txBody>
+      </p:sp>
+      <p:sp>
+        <p:nvSpPr>
+          <p:cNvPr id="30" name="Text 28"/>
+          <p:cNvSpPr/>
+          <p:nvPr/>
+        </p:nvSpPr>
+        <p:spPr>
+          <a:xfrm>
+            <a:off x="1115568" y="3218688"/>
+            <a:ext cx="4407408" cy="585216"/>
+          </a:xfrm>
+          <a:prstGeom prst="rect">
+            <a:avLst/>
+          </a:prstGeom>
+          <a:noFill/>
+          <a:ln/>
+        </p:spPr>
+        <p:txBody>
+          <a:bodyPr wrap="square" lIns="0" tIns="0" rIns="0" bIns="0" rtlCol="0" anchor="t">
+            <a:normAutofit/>
+          </a:bodyPr>
+          <a:lstStyle/>
+          <a:p>
+            <a:pPr marL="0" indent="0">
+              <a:buNone/>
+            </a:pPr>
+            <a:r>
+              <a:rPr lang="en-US" sz="1220" dirty="0">
+                <a:solidFill>
+                  <a:srgbClr val="1F2937"/>
+                </a:solidFill>
+                <a:latin typeface="Aptos" pitchFamily="34" charset="0"/>
+                <a:ea typeface="Aptos" pitchFamily="34" charset="-122"/>
+                <a:cs typeface="Aptos" pitchFamily="34" charset="-120"/>
+              </a:rPr>
+              <a:t>On the right, G(z) runs at the lower sampling rate Fₛ/M.</a:t>
+            </a:r>
+            <a:endParaRPr lang="en-US" sz="1220" dirty="0"/>
+          </a:p>
+        </p:txBody>
+      </p:sp>
+      <p:sp>
+        <p:nvSpPr>
+          <p:cNvPr id="31" name="Shape 29"/>
+          <p:cNvSpPr/>
+          <p:nvPr/>
+        </p:nvSpPr>
+        <p:spPr>
+          <a:xfrm>
+            <a:off x="6355080" y="2743200"/>
+            <a:ext cx="4754880" cy="1188720"/>
+          </a:xfrm>
+          <a:prstGeom prst="roundRect">
+            <a:avLst/>
+          </a:prstGeom>
+          <a:solidFill>
+            <a:srgbClr val="F6F8FB"/>
+          </a:solidFill>
+          <a:ln w="12700">
+            <a:solidFill>
+              <a:srgbClr val="D9E2EC"/>
+            </a:solidFill>
+            <a:prstDash val="solid"/>
+          </a:ln>
+        </p:spPr>
+        <p:txBody>
+          <a:bodyPr/>
+          <a:lstStyle/>
+          <a:p>
+            <a:endParaRPr lang="en-US"/>
+          </a:p>
+        </p:txBody>
+      </p:sp>
+      <p:sp>
+        <p:nvSpPr>
+          <p:cNvPr id="32" name="Shape 30"/>
+          <p:cNvSpPr/>
+          <p:nvPr/>
+        </p:nvSpPr>
+        <p:spPr>
+          <a:xfrm>
+            <a:off x="6355080" y="2743200"/>
+            <a:ext cx="73152" cy="1188720"/>
+          </a:xfrm>
+          <a:prstGeom prst="rect">
+            <a:avLst/>
+          </a:prstGeom>
+          <a:solidFill>
+            <a:srgbClr val="B42318"/>
+          </a:solidFill>
+          <a:ln w="12700">
+            <a:solidFill>
+              <a:srgbClr val="B42318"/>
+            </a:solidFill>
+            <a:prstDash val="solid"/>
+          </a:ln>
+        </p:spPr>
+        <p:txBody>
+          <a:bodyPr/>
+          <a:lstStyle/>
+          <a:p>
+            <a:endParaRPr lang="en-US"/>
+          </a:p>
+        </p:txBody>
+      </p:sp>
+      <p:sp>
+        <p:nvSpPr>
+          <p:cNvPr id="33" name="Text 31"/>
+          <p:cNvSpPr/>
+          <p:nvPr/>
+        </p:nvSpPr>
+        <p:spPr>
+          <a:xfrm>
+            <a:off x="6556248" y="2889504"/>
+            <a:ext cx="4407408" cy="256032"/>
+          </a:xfrm>
+          <a:prstGeom prst="rect">
+            <a:avLst/>
+          </a:prstGeom>
+          <a:noFill/>
+          <a:ln/>
+        </p:spPr>
+        <p:txBody>
+          <a:bodyPr wrap="square" lIns="0" tIns="0" rIns="0" bIns="0" rtlCol="0" anchor="ctr">
+            <a:normAutofit/>
+          </a:bodyPr>
+          <a:lstStyle/>
+          <a:p>
+            <a:pPr marL="0" indent="0">
+              <a:buNone/>
+            </a:pPr>
+            <a:r>
+              <a:rPr lang="en-US" sz="1400" b="1" dirty="0">
+                <a:solidFill>
+                  <a:srgbClr val="17324D"/>
+                </a:solidFill>
+                <a:latin typeface="Aptos" pitchFamily="34" charset="0"/>
+                <a:ea typeface="Aptos" pitchFamily="34" charset="-122"/>
+                <a:cs typeface="Aptos" pitchFamily="34" charset="-120"/>
+              </a:rPr>
+              <a:t>What does NOT work</a:t>
+            </a:r>
+            <a:endParaRPr lang="en-US" sz="1400" dirty="0"/>
+          </a:p>
+        </p:txBody>
+      </p:sp>
+      <p:sp>
+        <p:nvSpPr>
+          <p:cNvPr id="34" name="Text 32"/>
+          <p:cNvSpPr/>
+          <p:nvPr/>
+        </p:nvSpPr>
+        <p:spPr>
+          <a:xfrm>
+            <a:off x="6556248" y="3218688"/>
+            <a:ext cx="4407408" cy="585216"/>
+          </a:xfrm>
+          <a:prstGeom prst="rect">
+            <a:avLst/>
+          </a:prstGeom>
+          <a:noFill/>
+          <a:ln/>
+        </p:spPr>
+        <p:txBody>
+          <a:bodyPr wrap="square" lIns="0" tIns="0" rIns="0" bIns="0" rtlCol="0" anchor="t">
+            <a:normAutofit/>
+          </a:bodyPr>
+          <a:lstStyle/>
+          <a:p>
+            <a:pPr marL="0" indent="0">
+              <a:buNone/>
+            </a:pPr>
+            <a:r>
+              <a:rPr lang="en-US" sz="1220" dirty="0">
+                <a:solidFill>
+                  <a:srgbClr val="1F2937"/>
+                </a:solidFill>
+                <a:latin typeface="Aptos" pitchFamily="34" charset="0"/>
+                <a:ea typeface="Aptos" pitchFamily="34" charset="-122"/>
+                <a:cs typeface="Aptos" pitchFamily="34" charset="-120"/>
+              </a:rPr>
+              <a:t>You cannot commute ↓M through an arbitrary G(z) and expect the same system.</a:t>
+            </a:r>
+            <a:endParaRPr lang="en-US" sz="1220" dirty="0"/>
+          </a:p>
+        </p:txBody>
+      </p:sp>
+      <p:sp>
+        <p:nvSpPr>
+          <p:cNvPr id="35" name="Shape 33"/>
+          <p:cNvSpPr/>
+          <p:nvPr/>
+        </p:nvSpPr>
+        <p:spPr>
+          <a:xfrm>
+            <a:off x="1965960" y="4343400"/>
+            <a:ext cx="8229600" cy="685800"/>
+          </a:xfrm>
+          <a:prstGeom prst="roundRect">
+            <a:avLst/>
+          </a:prstGeom>
+          <a:solidFill>
+            <a:srgbClr val="EEF7F9"/>
+          </a:solidFill>
+          <a:ln w="12700">
+            <a:solidFill>
+              <a:srgbClr val="B7DDE3"/>
+            </a:solidFill>
+            <a:prstDash val="solid"/>
+          </a:ln>
+        </p:spPr>
+        <p:txBody>
+          <a:bodyPr/>
+          <a:lstStyle/>
+          <a:p>
+            <a:endParaRPr lang="en-US"/>
+          </a:p>
+        </p:txBody>
+      </p:sp>
+      <p:sp>
+        <p:nvSpPr>
+          <p:cNvPr id="36" name="Text 34"/>
+          <p:cNvSpPr/>
+          <p:nvPr/>
+        </p:nvSpPr>
+        <p:spPr>
+          <a:xfrm>
+            <a:off x="2039112" y="4416552"/>
+            <a:ext cx="8083296" cy="539496"/>
+          </a:xfrm>
+          <a:prstGeom prst="rect">
+            <a:avLst/>
+          </a:prstGeom>
+          <a:noFill/>
+          <a:ln/>
+        </p:spPr>
+        <p:txBody>
+          <a:bodyPr wrap="square" lIns="0" tIns="0" rIns="0" bIns="0" rtlCol="0" anchor="ctr">
+            <a:normAutofit/>
+          </a:bodyPr>
+          <a:lstStyle/>
+          <a:p>
+            <a:pPr marL="0" indent="0" algn="ctr">
+              <a:buNone/>
+            </a:pPr>
+            <a:r>
+              <a:rPr lang="en-US" sz="2300" dirty="0">
+                <a:solidFill>
+                  <a:srgbClr val="17324D"/>
+                </a:solidFill>
+                <a:latin typeface="Cambria Math" pitchFamily="34" charset="0"/>
+                <a:ea typeface="Cambria Math" pitchFamily="34" charset="-122"/>
+                <a:cs typeface="Cambria Math" pitchFamily="34" charset="-120"/>
+              </a:rPr>
+              <a:t>G(zᴹ) → ↓M   ≡   ↓M → G(z)</a:t>
+            </a:r>
+            <a:endParaRPr lang="en-US" sz="2300" dirty="0"/>
+          </a:p>
+        </p:txBody>
+      </p:sp>
+      <p:sp>
+        <p:nvSpPr>
+          <p:cNvPr id="37" name="Shape 35"/>
+          <p:cNvSpPr/>
+          <p:nvPr/>
+        </p:nvSpPr>
+        <p:spPr>
+          <a:xfrm>
+            <a:off x="1965960" y="5257800"/>
+            <a:ext cx="8229600" cy="658368"/>
+          </a:xfrm>
+          <a:prstGeom prst="roundRect">
+            <a:avLst/>
+          </a:prstGeom>
+          <a:solidFill>
+            <a:srgbClr val="F6F8FB"/>
+          </a:solidFill>
+          <a:ln w="12700">
+            <a:solidFill>
+              <a:srgbClr val="D9E2EC"/>
+            </a:solidFill>
+            <a:prstDash val="solid"/>
+          </a:ln>
+        </p:spPr>
+        <p:txBody>
+          <a:bodyPr/>
+          <a:lstStyle/>
+          <a:p>
+            <a:endParaRPr lang="en-US"/>
+          </a:p>
+        </p:txBody>
+      </p:sp>
+      <p:sp>
+        <p:nvSpPr>
+          <p:cNvPr id="38" name="Shape 36"/>
+          <p:cNvSpPr/>
+          <p:nvPr/>
+        </p:nvSpPr>
+        <p:spPr>
+          <a:xfrm>
+            <a:off x="1965960" y="5257800"/>
+            <a:ext cx="73152" cy="658368"/>
+          </a:xfrm>
+          <a:prstGeom prst="rect">
+            <a:avLst/>
+          </a:prstGeom>
+          <a:solidFill>
+            <a:srgbClr val="2F855A"/>
+          </a:solidFill>
+          <a:ln w="12700">
+            <a:solidFill>
+              <a:srgbClr val="2F855A"/>
+            </a:solidFill>
+            <a:prstDash val="solid"/>
+          </a:ln>
+        </p:spPr>
+        <p:txBody>
+          <a:bodyPr/>
+          <a:lstStyle/>
+          <a:p>
+            <a:endParaRPr lang="en-US"/>
+          </a:p>
+        </p:txBody>
+      </p:sp>
+      <p:sp>
+        <p:nvSpPr>
+          <p:cNvPr id="39" name="Text 37"/>
+          <p:cNvSpPr/>
+          <p:nvPr/>
+        </p:nvSpPr>
+        <p:spPr>
+          <a:xfrm>
+            <a:off x="2167128" y="5404104"/>
+            <a:ext cx="7882128" cy="256032"/>
+          </a:xfrm>
+          <a:prstGeom prst="rect">
+            <a:avLst/>
+          </a:prstGeom>
+          <a:noFill/>
+          <a:ln/>
+        </p:spPr>
+        <p:txBody>
+          <a:bodyPr wrap="square" lIns="0" tIns="0" rIns="0" bIns="0" rtlCol="0" anchor="ctr">
+            <a:normAutofit/>
+          </a:bodyPr>
+          <a:lstStyle/>
+          <a:p>
+            <a:pPr marL="0" indent="0">
+              <a:buNone/>
+            </a:pPr>
+            <a:r>
+              <a:rPr lang="en-US" sz="1400" b="1" dirty="0">
+                <a:solidFill>
+                  <a:srgbClr val="17324D"/>
+                </a:solidFill>
+                <a:latin typeface="Aptos" pitchFamily="34" charset="0"/>
+                <a:ea typeface="Aptos" pitchFamily="34" charset="-122"/>
+                <a:cs typeface="Aptos" pitchFamily="34" charset="-120"/>
+              </a:rPr>
+              <a:t>Why polyphase matters</a:t>
+            </a:r>
+            <a:endParaRPr lang="en-US" sz="1400" dirty="0"/>
+          </a:p>
+        </p:txBody>
+      </p:sp>
+      <p:sp>
+        <p:nvSpPr>
+          <p:cNvPr id="40" name="Text 38"/>
+          <p:cNvSpPr/>
+          <p:nvPr/>
+        </p:nvSpPr>
+        <p:spPr>
+          <a:xfrm>
+            <a:off x="2167128" y="5733288"/>
+            <a:ext cx="7882128" cy="54864"/>
+          </a:xfrm>
+          <a:prstGeom prst="rect">
+            <a:avLst/>
+          </a:prstGeom>
+          <a:noFill/>
+          <a:ln/>
+        </p:spPr>
+        <p:txBody>
+          <a:bodyPr wrap="square" lIns="0" tIns="0" rIns="0" bIns="0" rtlCol="0" anchor="t">
+            <a:normAutofit fontScale="32500" lnSpcReduction="20000"/>
+          </a:bodyPr>
+          <a:lstStyle/>
+          <a:p>
+            <a:pPr marL="0" indent="0">
+              <a:buNone/>
+            </a:pPr>
+            <a:r>
+              <a:rPr lang="en-US" sz="1220" dirty="0">
+                <a:solidFill>
+                  <a:srgbClr val="1F2937"/>
+                </a:solidFill>
+                <a:latin typeface="Aptos" pitchFamily="34" charset="0"/>
+                <a:ea typeface="Aptos" pitchFamily="34" charset="-122"/>
+                <a:cs typeface="Aptos" pitchFamily="34" charset="-120"/>
+              </a:rPr>
+              <a:t>Every branch in H(z)=Σz⁻ᵏEₖ(zᴹ) contains exactly the form needed by the Noble Identity.</a:t>
+            </a:r>
+            <a:endParaRPr lang="en-US" sz="1220" dirty="0"/>
+          </a:p>
+        </p:txBody>
+      </p:sp>
+      <p:sp>
+        <p:nvSpPr>
+          <p:cNvPr id="41" name="Slide Number Placeholder 0"/>
+          <p:cNvSpPr>
+            <a:spLocks noGrp="1"/>
+          </p:cNvSpPr>
+          <p:nvPr>
+            <p:ph type="sldNum" sz="quarter" idx="4294967295"/>
+          </p:nvPr>
+        </p:nvSpPr>
+        <p:spPr>
+          <a:xfrm>
+            <a:off x="11750040" y="6519672"/>
+            <a:ext cx="201168" cy="164592"/>
+          </a:xfrm>
+          <a:prstGeom prst="rect">
+            <a:avLst/>
+          </a:prstGeom>
+          <a:extLst>
+            <a:ext uri="{C572A759-6A51-4108-AA02-DFA0A04FC94B}">
+              <ma14:wrappingTextBoxFlag xmlns:ma14="http://schemas.microsoft.com/office/mac/drawingml/2011/main" xmlns="" val="0"/>
+            </a:ext>
+          </a:extLst>
+        </p:spPr>
+        <p:txBody>
+          <a:bodyPr/>
+          <a:lstStyle>
+            <a:lvl1pPr>
+              <a:defRPr sz="800">
+                <a:solidFill>
+                  <a:srgbClr val="64748B"/>
+                </a:solidFill>
+                <a:latin typeface="Aptos"/>
+                <a:ea typeface="Aptos"/>
+                <a:cs typeface="Aptos"/>
+              </a:defRPr>
+            </a:lvl1pPr>
+          </a:lstStyle>
+          <a:p>
+            <a:pPr algn="r"/>
+            <a:fld id="{F7021451-1387-4CA6-816F-3879F97B5CBC}" type="slidenum">
+              <a:rPr lang="en-US" b="0"/>
+              <a:t>10</a:t>
+            </a:fld>
+            <a:endParaRPr lang="en-US"/>
+          </a:p>
+        </p:txBody>
+      </p:sp>
+    </p:spTree>
+  </p:cSld>
+  <p:clrMapOvr>
+    <a:masterClrMapping/>
+  </p:clrMapOvr>
+</p:sld>
+</file>
+
+<file path=ppt/slides/slide11.xml><?xml version="1.0" encoding="utf-8"?>
 <p:sld xmlns:a="http://schemas.openxmlformats.org/drawingml/2006/main" xmlns:r="http://schemas.openxmlformats.org/officeDocument/2006/relationships" xmlns:p="http://schemas.openxmlformats.org/presentationml/2006/main">
   <p:cSld name="Slide 10">
     <p:spTree>
@@ -3006,7 +4502,7 @@
           </a:bodyPr>
           <a:lstStyle/>
           <a:p>
-            <a:pPr indent="0" marL="0">
+            <a:pPr marL="0" indent="0">
               <a:buNone/>
             </a:pPr>
             <a:r>
@@ -3047,7 +4543,7 @@
           </a:bodyPr>
           <a:lstStyle/>
           <a:p>
-            <a:pPr indent="0" marL="0">
+            <a:pPr marL="0" indent="0">
               <a:buNone/>
             </a:pPr>
             <a:r>
@@ -3089,6 +4585,13 @@
             <a:prstDash val="solid"/>
           </a:ln>
         </p:spPr>
+        <p:txBody>
+          <a:bodyPr/>
+          <a:lstStyle/>
+          <a:p>
+            <a:endParaRPr lang="en-US"/>
+          </a:p>
+        </p:txBody>
       </p:sp>
       <p:sp>
         <p:nvSpPr>
@@ -3113,7 +4616,7 @@
           </a:bodyPr>
           <a:lstStyle/>
           <a:p>
-            <a:pPr algn="ctr" indent="0" marL="0">
+            <a:pPr marL="0" indent="0" algn="ctr">
               <a:buNone/>
             </a:pPr>
             <a:r>
@@ -3155,6 +4658,13 @@
             <a:prstDash val="solid"/>
           </a:ln>
         </p:spPr>
+        <p:txBody>
+          <a:bodyPr/>
+          <a:lstStyle/>
+          <a:p>
+            <a:endParaRPr lang="en-US"/>
+          </a:p>
+        </p:txBody>
       </p:sp>
       <p:sp>
         <p:nvSpPr>
@@ -3179,7 +4689,7 @@
           </a:bodyPr>
           <a:lstStyle/>
           <a:p>
-            <a:pPr algn="ctr" indent="0" marL="0">
+            <a:pPr marL="0" indent="0" algn="ctr">
               <a:buNone/>
             </a:pPr>
             <a:r>
@@ -3221,6 +4731,13 @@
             <a:tailEnd type="triangle"/>
           </a:ln>
         </p:spPr>
+        <p:txBody>
+          <a:bodyPr/>
+          <a:lstStyle/>
+          <a:p>
+            <a:endParaRPr lang="en-US"/>
+          </a:p>
+        </p:txBody>
       </p:sp>
       <p:sp>
         <p:nvSpPr>
@@ -3246,6 +4763,13 @@
             <a:prstDash val="solid"/>
           </a:ln>
         </p:spPr>
+        <p:txBody>
+          <a:bodyPr/>
+          <a:lstStyle/>
+          <a:p>
+            <a:endParaRPr lang="en-US"/>
+          </a:p>
+        </p:txBody>
       </p:sp>
       <p:sp>
         <p:nvSpPr>
@@ -3270,7 +4794,7 @@
           </a:bodyPr>
           <a:lstStyle/>
           <a:p>
-            <a:pPr algn="ctr" indent="0" marL="0">
+            <a:pPr marL="0" indent="0" algn="ctr">
               <a:buNone/>
             </a:pPr>
             <a:r>
@@ -3312,6 +4836,13 @@
             <a:tailEnd type="triangle"/>
           </a:ln>
         </p:spPr>
+        <p:txBody>
+          <a:bodyPr/>
+          <a:lstStyle/>
+          <a:p>
+            <a:endParaRPr lang="en-US"/>
+          </a:p>
+        </p:txBody>
       </p:sp>
       <p:sp>
         <p:nvSpPr>
@@ -3337,6 +4868,13 @@
             <a:prstDash val="solid"/>
           </a:ln>
         </p:spPr>
+        <p:txBody>
+          <a:bodyPr/>
+          <a:lstStyle/>
+          <a:p>
+            <a:endParaRPr lang="en-US"/>
+          </a:p>
+        </p:txBody>
       </p:sp>
       <p:sp>
         <p:nvSpPr>
@@ -3361,7 +4899,7 @@
           </a:bodyPr>
           <a:lstStyle/>
           <a:p>
-            <a:pPr algn="ctr" indent="0" marL="0">
+            <a:pPr marL="0" indent="0" algn="ctr">
               <a:buNone/>
             </a:pPr>
             <a:r>
@@ -3403,6 +4941,13 @@
             <a:tailEnd type="triangle"/>
           </a:ln>
         </p:spPr>
+        <p:txBody>
+          <a:bodyPr/>
+          <a:lstStyle/>
+          <a:p>
+            <a:endParaRPr lang="en-US"/>
+          </a:p>
+        </p:txBody>
       </p:sp>
       <p:sp>
         <p:nvSpPr>
@@ -3428,6 +4973,13 @@
             <a:prstDash val="solid"/>
           </a:ln>
         </p:spPr>
+        <p:txBody>
+          <a:bodyPr/>
+          <a:lstStyle/>
+          <a:p>
+            <a:endParaRPr lang="en-US"/>
+          </a:p>
+        </p:txBody>
       </p:sp>
       <p:sp>
         <p:nvSpPr>
@@ -3452,7 +5004,7 @@
           </a:bodyPr>
           <a:lstStyle/>
           <a:p>
-            <a:pPr algn="ctr" indent="0" marL="0">
+            <a:pPr marL="0" indent="0" algn="ctr">
               <a:buNone/>
             </a:pPr>
             <a:r>
@@ -3494,6 +5046,13 @@
             <a:tailEnd type="triangle"/>
           </a:ln>
         </p:spPr>
+        <p:txBody>
+          <a:bodyPr/>
+          <a:lstStyle/>
+          <a:p>
+            <a:endParaRPr lang="en-US"/>
+          </a:p>
+        </p:txBody>
       </p:sp>
       <p:sp>
         <p:nvSpPr>
@@ -3519,6 +5078,13 @@
             <a:prstDash val="solid"/>
           </a:ln>
         </p:spPr>
+        <p:txBody>
+          <a:bodyPr/>
+          <a:lstStyle/>
+          <a:p>
+            <a:endParaRPr lang="en-US"/>
+          </a:p>
+        </p:txBody>
       </p:sp>
       <p:sp>
         <p:nvSpPr>
@@ -3543,7 +5109,7 @@
           </a:bodyPr>
           <a:lstStyle/>
           <a:p>
-            <a:pPr algn="ctr" indent="0" marL="0">
+            <a:pPr marL="0" indent="0" algn="ctr">
               <a:buNone/>
             </a:pPr>
             <a:r>
@@ -3585,6 +5151,13 @@
             <a:tailEnd type="triangle"/>
           </a:ln>
         </p:spPr>
+        <p:txBody>
+          <a:bodyPr/>
+          <a:lstStyle/>
+          <a:p>
+            <a:endParaRPr lang="en-US"/>
+          </a:p>
+        </p:txBody>
       </p:sp>
       <p:sp>
         <p:nvSpPr>
@@ -3610,6 +5183,13 @@
             <a:prstDash val="solid"/>
           </a:ln>
         </p:spPr>
+        <p:txBody>
+          <a:bodyPr/>
+          <a:lstStyle/>
+          <a:p>
+            <a:endParaRPr lang="en-US"/>
+          </a:p>
+        </p:txBody>
       </p:sp>
       <p:sp>
         <p:nvSpPr>
@@ -3634,7 +5214,7 @@
           </a:bodyPr>
           <a:lstStyle/>
           <a:p>
-            <a:pPr algn="ctr" indent="0" marL="0">
+            <a:pPr marL="0" indent="0" algn="ctr">
               <a:buNone/>
             </a:pPr>
             <a:r>
@@ -3676,6 +5256,13 @@
             <a:tailEnd type="triangle"/>
           </a:ln>
         </p:spPr>
+        <p:txBody>
+          <a:bodyPr/>
+          <a:lstStyle/>
+          <a:p>
+            <a:endParaRPr lang="en-US"/>
+          </a:p>
+        </p:txBody>
       </p:sp>
       <p:sp>
         <p:nvSpPr>
@@ -3701,6 +5288,13 @@
             <a:prstDash val="solid"/>
           </a:ln>
         </p:spPr>
+        <p:txBody>
+          <a:bodyPr/>
+          <a:lstStyle/>
+          <a:p>
+            <a:endParaRPr lang="en-US"/>
+          </a:p>
+        </p:txBody>
       </p:sp>
       <p:sp>
         <p:nvSpPr>
@@ -3725,7 +5319,7 @@
           </a:bodyPr>
           <a:lstStyle/>
           <a:p>
-            <a:pPr algn="ctr" indent="0" marL="0">
+            <a:pPr marL="0" indent="0" algn="ctr">
               <a:buNone/>
             </a:pPr>
             <a:r>
@@ -3767,6 +5361,13 @@
             <a:tailEnd type="triangle"/>
           </a:ln>
         </p:spPr>
+        <p:txBody>
+          <a:bodyPr/>
+          <a:lstStyle/>
+          <a:p>
+            <a:endParaRPr lang="en-US"/>
+          </a:p>
+        </p:txBody>
       </p:sp>
       <p:sp>
         <p:nvSpPr>
@@ -3792,6 +5393,13 @@
             <a:prstDash val="solid"/>
           </a:ln>
         </p:spPr>
+        <p:txBody>
+          <a:bodyPr/>
+          <a:lstStyle/>
+          <a:p>
+            <a:endParaRPr lang="en-US"/>
+          </a:p>
+        </p:txBody>
       </p:sp>
       <p:sp>
         <p:nvSpPr>
@@ -3816,7 +5424,7 @@
           </a:bodyPr>
           <a:lstStyle/>
           <a:p>
-            <a:pPr algn="ctr" indent="0" marL="0">
+            <a:pPr marL="0" indent="0" algn="ctr">
               <a:buNone/>
             </a:pPr>
             <a:r>
@@ -3858,6 +5466,13 @@
             <a:tailEnd type="triangle"/>
           </a:ln>
         </p:spPr>
+        <p:txBody>
+          <a:bodyPr/>
+          <a:lstStyle/>
+          <a:p>
+            <a:endParaRPr lang="en-US"/>
+          </a:p>
+        </p:txBody>
       </p:sp>
       <p:sp>
         <p:nvSpPr>
@@ -3883,6 +5498,13 @@
             <a:prstDash val="solid"/>
           </a:ln>
         </p:spPr>
+        <p:txBody>
+          <a:bodyPr/>
+          <a:lstStyle/>
+          <a:p>
+            <a:endParaRPr lang="en-US"/>
+          </a:p>
+        </p:txBody>
       </p:sp>
       <p:sp>
         <p:nvSpPr>
@@ -3907,7 +5529,7 @@
           </a:bodyPr>
           <a:lstStyle/>
           <a:p>
-            <a:pPr algn="ctr" indent="0" marL="0">
+            <a:pPr marL="0" indent="0" algn="ctr">
               <a:buNone/>
             </a:pPr>
             <a:r>
@@ -3949,6 +5571,13 @@
             <a:tailEnd type="triangle"/>
           </a:ln>
         </p:spPr>
+        <p:txBody>
+          <a:bodyPr/>
+          <a:lstStyle/>
+          <a:p>
+            <a:endParaRPr lang="en-US"/>
+          </a:p>
+        </p:txBody>
       </p:sp>
       <p:sp>
         <p:nvSpPr>
@@ -3974,6 +5603,13 @@
             <a:prstDash val="solid"/>
           </a:ln>
         </p:spPr>
+        <p:txBody>
+          <a:bodyPr/>
+          <a:lstStyle/>
+          <a:p>
+            <a:endParaRPr lang="en-US"/>
+          </a:p>
+        </p:txBody>
       </p:sp>
       <p:sp>
         <p:nvSpPr>
@@ -3998,7 +5634,7 @@
           </a:bodyPr>
           <a:lstStyle/>
           <a:p>
-            <a:pPr algn="ctr" indent="0" marL="0">
+            <a:pPr marL="0" indent="0" algn="ctr">
               <a:buNone/>
             </a:pPr>
             <a:r>
@@ -4040,6 +5676,13 @@
             <a:tailEnd type="triangle"/>
           </a:ln>
         </p:spPr>
+        <p:txBody>
+          <a:bodyPr/>
+          <a:lstStyle/>
+          <a:p>
+            <a:endParaRPr lang="en-US"/>
+          </a:p>
+        </p:txBody>
       </p:sp>
       <p:sp>
         <p:nvSpPr>
@@ -4065,6 +5708,13 @@
             <a:prstDash val="solid"/>
           </a:ln>
         </p:spPr>
+        <p:txBody>
+          <a:bodyPr/>
+          <a:lstStyle/>
+          <a:p>
+            <a:endParaRPr lang="en-US"/>
+          </a:p>
+        </p:txBody>
       </p:sp>
       <p:sp>
         <p:nvSpPr>
@@ -4089,7 +5739,7 @@
           </a:bodyPr>
           <a:lstStyle/>
           <a:p>
-            <a:pPr algn="ctr" indent="0" marL="0">
+            <a:pPr marL="0" indent="0" algn="ctr">
               <a:buNone/>
             </a:pPr>
             <a:r>
@@ -4131,6 +5781,13 @@
             <a:tailEnd type="triangle"/>
           </a:ln>
         </p:spPr>
+        <p:txBody>
+          <a:bodyPr/>
+          <a:lstStyle/>
+          <a:p>
+            <a:endParaRPr lang="en-US"/>
+          </a:p>
+        </p:txBody>
       </p:sp>
       <p:sp>
         <p:nvSpPr>
@@ -4156,6 +5813,13 @@
             <a:prstDash val="solid"/>
           </a:ln>
         </p:spPr>
+        <p:txBody>
+          <a:bodyPr/>
+          <a:lstStyle/>
+          <a:p>
+            <a:endParaRPr lang="en-US"/>
+          </a:p>
+        </p:txBody>
       </p:sp>
       <p:sp>
         <p:nvSpPr>
@@ -4180,7 +5844,7 @@
           </a:bodyPr>
           <a:lstStyle/>
           <a:p>
-            <a:pPr algn="ctr" indent="0" marL="0">
+            <a:pPr marL="0" indent="0" algn="ctr">
               <a:buNone/>
             </a:pPr>
             <a:r>
@@ -4222,6 +5886,13 @@
             <a:tailEnd type="triangle"/>
           </a:ln>
         </p:spPr>
+        <p:txBody>
+          <a:bodyPr/>
+          <a:lstStyle/>
+          <a:p>
+            <a:endParaRPr lang="en-US"/>
+          </a:p>
+        </p:txBody>
       </p:sp>
       <p:sp>
         <p:nvSpPr>
@@ -4247,6 +5918,13 @@
             <a:prstDash val="solid"/>
           </a:ln>
         </p:spPr>
+        <p:txBody>
+          <a:bodyPr/>
+          <a:lstStyle/>
+          <a:p>
+            <a:endParaRPr lang="en-US"/>
+          </a:p>
+        </p:txBody>
       </p:sp>
       <p:sp>
         <p:nvSpPr>
@@ -4271,7 +5949,7 @@
           </a:bodyPr>
           <a:lstStyle/>
           <a:p>
-            <a:pPr algn="ctr" indent="0" marL="0">
+            <a:pPr marL="0" indent="0" algn="ctr">
               <a:buNone/>
             </a:pPr>
             <a:r>
@@ -4313,6 +5991,13 @@
             <a:tailEnd type="triangle"/>
           </a:ln>
         </p:spPr>
+        <p:txBody>
+          <a:bodyPr/>
+          <a:lstStyle/>
+          <a:p>
+            <a:endParaRPr lang="en-US"/>
+          </a:p>
+        </p:txBody>
       </p:sp>
       <p:sp>
         <p:nvSpPr>
@@ -4338,6 +6023,13 @@
             <a:prstDash val="solid"/>
           </a:ln>
         </p:spPr>
+        <p:txBody>
+          <a:bodyPr/>
+          <a:lstStyle/>
+          <a:p>
+            <a:endParaRPr lang="en-US"/>
+          </a:p>
+        </p:txBody>
       </p:sp>
       <p:sp>
         <p:nvSpPr>
@@ -4362,7 +6054,7 @@
           </a:bodyPr>
           <a:lstStyle/>
           <a:p>
-            <a:pPr algn="ctr" indent="0" marL="0">
+            <a:pPr marL="0" indent="0" algn="ctr">
               <a:buNone/>
             </a:pPr>
             <a:r>
@@ -4404,6 +6096,13 @@
             <a:prstDash val="solid"/>
           </a:ln>
         </p:spPr>
+        <p:txBody>
+          <a:bodyPr/>
+          <a:lstStyle/>
+          <a:p>
+            <a:endParaRPr lang="en-US"/>
+          </a:p>
+        </p:txBody>
       </p:sp>
       <p:sp>
         <p:nvSpPr>
@@ -4429,6 +6128,13 @@
             <a:prstDash val="solid"/>
           </a:ln>
         </p:spPr>
+        <p:txBody>
+          <a:bodyPr/>
+          <a:lstStyle/>
+          <a:p>
+            <a:endParaRPr lang="en-US"/>
+          </a:p>
+        </p:txBody>
       </p:sp>
       <p:sp>
         <p:nvSpPr>
@@ -4453,7 +6159,7 @@
           </a:bodyPr>
           <a:lstStyle/>
           <a:p>
-            <a:pPr indent="0" marL="0">
+            <a:pPr marL="0" indent="0">
               <a:buNone/>
             </a:pPr>
             <a:r>
@@ -4494,7 +6200,7 @@
           </a:bodyPr>
           <a:lstStyle/>
           <a:p>
-            <a:pPr indent="0" marL="0">
+            <a:pPr marL="0" indent="0">
               <a:buNone/>
             </a:pPr>
             <a:r>
@@ -4536,6 +6242,13 @@
             <a:prstDash val="solid"/>
           </a:ln>
         </p:spPr>
+        <p:txBody>
+          <a:bodyPr/>
+          <a:lstStyle/>
+          <a:p>
+            <a:endParaRPr lang="en-US"/>
+          </a:p>
+        </p:txBody>
       </p:sp>
       <p:sp>
         <p:nvSpPr>
@@ -4561,6 +6274,13 @@
             <a:prstDash val="solid"/>
           </a:ln>
         </p:spPr>
+        <p:txBody>
+          <a:bodyPr/>
+          <a:lstStyle/>
+          <a:p>
+            <a:endParaRPr lang="en-US"/>
+          </a:p>
+        </p:txBody>
       </p:sp>
       <p:sp>
         <p:nvSpPr>
@@ -4585,7 +6305,7 @@
           </a:bodyPr>
           <a:lstStyle/>
           <a:p>
-            <a:pPr indent="0" marL="0">
+            <a:pPr marL="0" indent="0">
               <a:buNone/>
             </a:pPr>
             <a:r>
@@ -4622,11 +6342,11 @@
         </p:spPr>
         <p:txBody>
           <a:bodyPr wrap="square" lIns="0" tIns="0" rIns="0" bIns="0" rtlCol="0" anchor="t">
-            <a:normAutofit/>
+            <a:normAutofit fontScale="92500" lnSpcReduction="20000"/>
           </a:bodyPr>
           <a:lstStyle/>
           <a:p>
-            <a:pPr indent="0" marL="0">
+            <a:pPr marL="0" indent="0">
               <a:buNone/>
             </a:pPr>
             <a:r>
@@ -4646,7 +6366,7 @@
       </p:sp>
       <p:sp>
         <p:nvSpPr>
-          <p:cNvPr id="25" name="Slide Number Placeholder 0"/>
+          <p:cNvPr id="55" name="Slide Number Placeholder 0"/>
           <p:cNvSpPr>
             <a:spLocks noGrp="1"/>
           </p:cNvSpPr>
@@ -4664,7 +6384,7 @@
           </a:prstGeom>
           <a:extLst>
             <a:ext uri="{C572A759-6A51-4108-AA02-DFA0A04FC94B}">
-              <ma14:wrappingTextBoxFlag xmlns:ma14="http://schemas.microsoft.com/office/mac/drawingml/2011/main" val="0"/>
+              <ma14:wrappingTextBoxFlag xmlns:ma14="http://schemas.microsoft.com/office/mac/drawingml/2011/main" xmlns="" val="0"/>
             </a:ext>
           </a:extLst>
         </p:spPr>
@@ -4685,8 +6405,8 @@
           <a:p>
             <a:pPr algn="r"/>
             <a:fld id="{F7021451-1387-4CA6-816F-3879F97B5CBC}" type="slidenum">
-              <a:rPr b="0" lang="en-US"/>
-              <a:t>10</a:t>
+              <a:rPr lang="en-US" b="0"/>
+              <a:t>11</a:t>
             </a:fld>
             <a:endParaRPr lang="en-US"/>
           </a:p>
@@ -4700,7 +6420,7 @@
 </p:sld>
 </file>
 
-<file path=ppt/slides/slide11.xml><?xml version="1.0" encoding="utf-8"?>
+<file path=ppt/slides/slide12.xml><?xml version="1.0" encoding="utf-8"?>
 <p:sld xmlns:a="http://schemas.openxmlformats.org/drawingml/2006/main" xmlns:r="http://schemas.openxmlformats.org/officeDocument/2006/relationships" xmlns:p="http://schemas.openxmlformats.org/presentationml/2006/main">
   <p:cSld name="Slide 11">
     <p:spTree>
@@ -4740,7 +6460,7 @@
           </a:bodyPr>
           <a:lstStyle/>
           <a:p>
-            <a:pPr indent="0" marL="0">
+            <a:pPr marL="0" indent="0">
               <a:buNone/>
             </a:pPr>
             <a:r>
@@ -4781,7 +6501,7 @@
           </a:bodyPr>
           <a:lstStyle/>
           <a:p>
-            <a:pPr indent="0" marL="0">
+            <a:pPr marL="0" indent="0">
               <a:buNone/>
             </a:pPr>
             <a:r>
@@ -4801,14 +6521,14 @@
       </p:sp>
       <p:pic>
         <p:nvPicPr>
-          <p:cNvPr id="4" name="Image 0" descr="/mnt/data/week7_polyphase/assets/decimator_equivalence.png">    </p:cNvPr>
+          <p:cNvPr id="4" name="Image 0" descr="/mnt/data/week7_polyphase/assets/decimator_equivalence.png"/>
           <p:cNvPicPr>
             <a:picLocks noChangeAspect="1"/>
           </p:cNvPicPr>
           <p:nvPr/>
         </p:nvPicPr>
         <p:blipFill>
-          <a:blip r:embed="rId1"/>
+          <a:blip r:embed="rId3"/>
           <a:stretch>
             <a:fillRect/>
           </a:stretch>
@@ -4825,14 +6545,14 @@
       </p:pic>
       <p:pic>
         <p:nvPicPr>
-          <p:cNvPr id="5" name="Image 1" descr="/mnt/data/week7_polyphase/assets/decimation_savings.png">    </p:cNvPr>
+          <p:cNvPr id="5" name="Image 1" descr="/mnt/data/week7_polyphase/assets/decimation_savings.png"/>
           <p:cNvPicPr>
             <a:picLocks noChangeAspect="1"/>
           </p:cNvPicPr>
           <p:nvPr/>
         </p:nvPicPr>
         <p:blipFill>
-          <a:blip r:embed="rId2"/>
+          <a:blip r:embed="rId4"/>
           <a:stretch>
             <a:fillRect/>
           </a:stretch>
@@ -4871,6 +6591,13 @@
             <a:prstDash val="solid"/>
           </a:ln>
         </p:spPr>
+        <p:txBody>
+          <a:bodyPr/>
+          <a:lstStyle/>
+          <a:p>
+            <a:endParaRPr lang="en-US"/>
+          </a:p>
+        </p:txBody>
       </p:sp>
       <p:sp>
         <p:nvSpPr>
@@ -4891,11 +6618,11 @@
         </p:spPr>
         <p:txBody>
           <a:bodyPr wrap="square" lIns="0" tIns="0" rIns="0" bIns="0" rtlCol="0" anchor="ctr">
-            <a:normAutofit/>
+            <a:normAutofit fontScale="92500"/>
           </a:bodyPr>
           <a:lstStyle/>
           <a:p>
-            <a:pPr algn="ctr" indent="0" marL="0">
+            <a:pPr marL="0" indent="0" algn="ctr">
               <a:buNone/>
             </a:pPr>
             <a:r>
@@ -4937,6 +6664,13 @@
             <a:prstDash val="solid"/>
           </a:ln>
         </p:spPr>
+        <p:txBody>
+          <a:bodyPr/>
+          <a:lstStyle/>
+          <a:p>
+            <a:endParaRPr lang="en-US"/>
+          </a:p>
+        </p:txBody>
       </p:sp>
       <p:sp>
         <p:nvSpPr>
@@ -4957,11 +6691,11 @@
         </p:spPr>
         <p:txBody>
           <a:bodyPr wrap="square" lIns="0" tIns="0" rIns="0" bIns="0" rtlCol="0" anchor="ctr">
-            <a:normAutofit/>
+            <a:normAutofit fontScale="85000" lnSpcReduction="20000"/>
           </a:bodyPr>
           <a:lstStyle/>
           <a:p>
-            <a:pPr algn="ctr" indent="0" marL="0">
+            <a:pPr marL="0" indent="0" algn="ctr">
               <a:buNone/>
             </a:pPr>
             <a:r>
@@ -5003,6 +6737,13 @@
             <a:prstDash val="solid"/>
           </a:ln>
         </p:spPr>
+        <p:txBody>
+          <a:bodyPr/>
+          <a:lstStyle/>
+          <a:p>
+            <a:endParaRPr lang="en-US"/>
+          </a:p>
+        </p:txBody>
       </p:sp>
       <p:sp>
         <p:nvSpPr>
@@ -5028,6 +6769,13 @@
             <a:prstDash val="solid"/>
           </a:ln>
         </p:spPr>
+        <p:txBody>
+          <a:bodyPr/>
+          <a:lstStyle/>
+          <a:p>
+            <a:endParaRPr lang="en-US"/>
+          </a:p>
+        </p:txBody>
       </p:sp>
       <p:sp>
         <p:nvSpPr>
@@ -5052,7 +6800,7 @@
           </a:bodyPr>
           <a:lstStyle/>
           <a:p>
-            <a:pPr indent="0" marL="0">
+            <a:pPr marL="0" indent="0">
               <a:buNone/>
             </a:pPr>
             <a:r>
@@ -5089,11 +6837,11 @@
         </p:spPr>
         <p:txBody>
           <a:bodyPr wrap="square" lIns="0" tIns="0" rIns="0" bIns="0" rtlCol="0" anchor="t">
-            <a:normAutofit/>
+            <a:normAutofit fontScale="32500" lnSpcReduction="20000"/>
           </a:bodyPr>
           <a:lstStyle/>
           <a:p>
-            <a:pPr indent="0" marL="0">
+            <a:pPr marL="0" indent="0">
               <a:buNone/>
             </a:pPr>
             <a:r>
@@ -5131,7 +6879,7 @@
           </a:prstGeom>
           <a:extLst>
             <a:ext uri="{C572A759-6A51-4108-AA02-DFA0A04FC94B}">
-              <ma14:wrappingTextBoxFlag xmlns:ma14="http://schemas.microsoft.com/office/mac/drawingml/2011/main" val="0"/>
+              <ma14:wrappingTextBoxFlag xmlns:ma14="http://schemas.microsoft.com/office/mac/drawingml/2011/main" xmlns="" val="0"/>
             </a:ext>
           </a:extLst>
         </p:spPr>
@@ -5152,8 +6900,8 @@
           <a:p>
             <a:pPr algn="r"/>
             <a:fld id="{F7021451-1387-4CA6-816F-3879F97B5CBC}" type="slidenum">
-              <a:rPr b="0" lang="en-US"/>
-              <a:t>11</a:t>
+              <a:rPr lang="en-US" b="0"/>
+              <a:t>12</a:t>
             </a:fld>
             <a:endParaRPr lang="en-US"/>
           </a:p>
@@ -5167,7 +6915,7 @@
 </p:sld>
 </file>
 
-<file path=ppt/slides/slide12.xml><?xml version="1.0" encoding="utf-8"?>
+<file path=ppt/slides/slide13.xml><?xml version="1.0" encoding="utf-8"?>
 <p:sld xmlns:a="http://schemas.openxmlformats.org/drawingml/2006/main" xmlns:r="http://schemas.openxmlformats.org/officeDocument/2006/relationships" xmlns:p="http://schemas.openxmlformats.org/presentationml/2006/main">
   <p:cSld name="Slide 12">
     <p:spTree>
@@ -5208,6 +6956,13 @@
             <a:prstDash val="solid"/>
           </a:ln>
         </p:spPr>
+        <p:txBody>
+          <a:bodyPr/>
+          <a:lstStyle/>
+          <a:p>
+            <a:endParaRPr lang="en-US"/>
+          </a:p>
+        </p:txBody>
       </p:sp>
       <p:sp>
         <p:nvSpPr>
@@ -5230,7 +6985,7 @@
           <a:bodyPr wrap="square" lIns="0" tIns="0" rIns="0" bIns="0" rtlCol="0" anchor="ctr"/>
           <a:lstStyle/>
           <a:p>
-            <a:pPr indent="0" marL="0">
+            <a:pPr marL="0" indent="0">
               <a:buNone/>
             </a:pPr>
             <a:r>
@@ -5267,11 +7022,11 @@
         </p:spPr>
         <p:txBody>
           <a:bodyPr wrap="square" lIns="0" tIns="0" rIns="0" bIns="0" rtlCol="0" anchor="ctr">
-            <a:normAutofit/>
+            <a:normAutofit fontScale="92500"/>
           </a:bodyPr>
           <a:lstStyle/>
           <a:p>
-            <a:pPr indent="0" marL="0">
+            <a:pPr marL="0" indent="0">
               <a:buNone/>
             </a:pPr>
             <a:r>
@@ -5286,86 +7041,6 @@
               <a:t>An N = 48 tap FIR decimator reduces the rate by M = 6. Roughly how many FIR multiplications per input sample are needed after polyphase reorganization?</a:t>
             </a:r>
             <a:endParaRPr lang="en-US" sz="2300" dirty="0"/>
-          </a:p>
-        </p:txBody>
-      </p:sp>
-      <p:sp>
-        <p:nvSpPr>
-          <p:cNvPr id="5" name="Text 3"/>
-          <p:cNvSpPr/>
-          <p:nvPr/>
-        </p:nvSpPr>
-        <p:spPr>
-          <a:xfrm>
-            <a:off x="1078992" y="3767328"/>
-            <a:ext cx="1188720" cy="228600"/>
-          </a:xfrm>
-          <a:prstGeom prst="rect">
-            <a:avLst/>
-          </a:prstGeom>
-          <a:noFill/>
-          <a:ln/>
-        </p:spPr>
-        <p:txBody>
-          <a:bodyPr wrap="square" lIns="0" tIns="0" rIns="0" bIns="0" rtlCol="0" anchor="ctr"/>
-          <a:lstStyle/>
-          <a:p>
-            <a:pPr indent="0" marL="0">
-              <a:buNone/>
-            </a:pPr>
-            <a:r>
-              <a:rPr lang="en-US" sz="1100" b="1" dirty="0">
-                <a:solidFill>
-                  <a:srgbClr val="2F855A"/>
-                </a:solidFill>
-                <a:latin typeface="Aptos" pitchFamily="34" charset="0"/>
-                <a:ea typeface="Aptos" pitchFamily="34" charset="-122"/>
-                <a:cs typeface="Aptos" pitchFamily="34" charset="-120"/>
-              </a:rPr>
-              <a:t>Good answer</a:t>
-            </a:r>
-            <a:endParaRPr lang="en-US" sz="1100" dirty="0"/>
-          </a:p>
-        </p:txBody>
-      </p:sp>
-      <p:sp>
-        <p:nvSpPr>
-          <p:cNvPr id="6" name="Text 4"/>
-          <p:cNvSpPr/>
-          <p:nvPr/>
-        </p:nvSpPr>
-        <p:spPr>
-          <a:xfrm>
-            <a:off x="1078992" y="4096512"/>
-            <a:ext cx="9784080" cy="1280160"/>
-          </a:xfrm>
-          <a:prstGeom prst="rect">
-            <a:avLst/>
-          </a:prstGeom>
-          <a:noFill/>
-          <a:ln/>
-        </p:spPr>
-        <p:txBody>
-          <a:bodyPr wrap="square" lIns="0" tIns="0" rIns="0" bIns="0" rtlCol="0" anchor="ctr">
-            <a:normAutofit/>
-          </a:bodyPr>
-          <a:lstStyle/>
-          <a:p>
-            <a:pPr indent="0" marL="0">
-              <a:buNone/>
-            </a:pPr>
-            <a:r>
-              <a:rPr lang="en-US" sz="1700" dirty="0">
-                <a:solidFill>
-                  <a:srgbClr val="1F2937"/>
-                </a:solidFill>
-                <a:latin typeface="Aptos" pitchFamily="34" charset="0"/>
-                <a:ea typeface="Aptos" pitchFamily="34" charset="-122"/>
-                <a:cs typeface="Aptos" pitchFamily="34" charset="-120"/>
-              </a:rPr>
-              <a:t>About N/M = 8 multiplications per input sample on average, versus about 48 for filtering every full-rate output first.</a:t>
-            </a:r>
-            <a:endParaRPr lang="en-US" sz="1700" dirty="0"/>
           </a:p>
         </p:txBody>
       </p:sp>
@@ -5389,7 +7064,7 @@
           </a:prstGeom>
           <a:extLst>
             <a:ext uri="{C572A759-6A51-4108-AA02-DFA0A04FC94B}">
-              <ma14:wrappingTextBoxFlag xmlns:ma14="http://schemas.microsoft.com/office/mac/drawingml/2011/main" val="0"/>
+              <ma14:wrappingTextBoxFlag xmlns:ma14="http://schemas.microsoft.com/office/mac/drawingml/2011/main" xmlns="" val="0"/>
             </a:ext>
           </a:extLst>
         </p:spPr>
@@ -5410,8 +7085,8 @@
           <a:p>
             <a:pPr algn="r"/>
             <a:fld id="{F7021451-1387-4CA6-816F-3879F97B5CBC}" type="slidenum">
-              <a:rPr b="0" lang="en-US"/>
-              <a:t>12</a:t>
+              <a:rPr lang="en-US" b="0"/>
+              <a:t>13</a:t>
             </a:fld>
             <a:endParaRPr lang="en-US"/>
           </a:p>
@@ -5425,7 +7100,319 @@
 </p:sld>
 </file>
 
-<file path=ppt/slides/slide13.xml><?xml version="1.0" encoding="utf-8"?>
+<file path=ppt/slides/slide14.xml><?xml version="1.0" encoding="utf-8"?>
+<p:sld xmlns:a="http://schemas.openxmlformats.org/drawingml/2006/main" xmlns:r="http://schemas.openxmlformats.org/officeDocument/2006/relationships" xmlns:p="http://schemas.openxmlformats.org/presentationml/2006/main">
+  <p:cSld>
+    <p:spTree>
+      <p:nvGrpSpPr>
+        <p:cNvPr id="1" name="">
+          <a:extLst>
+            <a:ext uri="{FF2B5EF4-FFF2-40B4-BE49-F238E27FC236}">
+              <a16:creationId xmlns:a16="http://schemas.microsoft.com/office/drawing/2014/main" id="{9C6EAF61-5436-0DC5-5B92-52A28965841D}"/>
+            </a:ext>
+          </a:extLst>
+        </p:cNvPr>
+        <p:cNvGrpSpPr/>
+        <p:nvPr/>
+      </p:nvGrpSpPr>
+      <p:grpSpPr>
+        <a:xfrm>
+          <a:off x="0" y="0"/>
+          <a:ext cx="0" cy="0"/>
+          <a:chOff x="0" y="0"/>
+          <a:chExt cx="0" cy="0"/>
+        </a:xfrm>
+      </p:grpSpPr>
+      <p:sp>
+        <p:nvSpPr>
+          <p:cNvPr id="2" name="Shape 0">
+            <a:extLst>
+              <a:ext uri="{FF2B5EF4-FFF2-40B4-BE49-F238E27FC236}">
+                <a16:creationId xmlns:a16="http://schemas.microsoft.com/office/drawing/2014/main" id="{E19D9414-B415-D6D7-D382-E3D1B66B78DF}"/>
+              </a:ext>
+            </a:extLst>
+          </p:cNvPr>
+          <p:cNvSpPr/>
+          <p:nvPr/>
+        </p:nvSpPr>
+        <p:spPr>
+          <a:xfrm>
+            <a:off x="822960" y="1417320"/>
+            <a:ext cx="10561320" cy="1874520"/>
+          </a:xfrm>
+          <a:prstGeom prst="roundRect">
+            <a:avLst/>
+          </a:prstGeom>
+          <a:solidFill>
+            <a:srgbClr val="FFF7ED"/>
+          </a:solidFill>
+          <a:ln w="15240">
+            <a:solidFill>
+              <a:srgbClr val="FED7AA"/>
+            </a:solidFill>
+            <a:prstDash val="solid"/>
+          </a:ln>
+        </p:spPr>
+        <p:txBody>
+          <a:bodyPr/>
+          <a:lstStyle/>
+          <a:p>
+            <a:endParaRPr lang="en-US"/>
+          </a:p>
+        </p:txBody>
+      </p:sp>
+      <p:sp>
+        <p:nvSpPr>
+          <p:cNvPr id="3" name="Text 1">
+            <a:extLst>
+              <a:ext uri="{FF2B5EF4-FFF2-40B4-BE49-F238E27FC236}">
+                <a16:creationId xmlns:a16="http://schemas.microsoft.com/office/drawing/2014/main" id="{7567B010-9BF3-2984-606A-149C1ECD063A}"/>
+              </a:ext>
+            </a:extLst>
+          </p:cNvPr>
+          <p:cNvSpPr/>
+          <p:nvPr/>
+        </p:nvSpPr>
+        <p:spPr>
+          <a:xfrm>
+            <a:off x="1078992" y="1664208"/>
+            <a:ext cx="2011680" cy="274320"/>
+          </a:xfrm>
+          <a:prstGeom prst="rect">
+            <a:avLst/>
+          </a:prstGeom>
+          <a:noFill/>
+          <a:ln/>
+        </p:spPr>
+        <p:txBody>
+          <a:bodyPr wrap="square" lIns="0" tIns="0" rIns="0" bIns="0" rtlCol="0" anchor="ctr"/>
+          <a:lstStyle/>
+          <a:p>
+            <a:pPr marL="0" indent="0">
+              <a:buNone/>
+            </a:pPr>
+            <a:r>
+              <a:rPr lang="en-US" sz="1200" b="1" dirty="0">
+                <a:solidFill>
+                  <a:srgbClr val="D97706"/>
+                </a:solidFill>
+                <a:latin typeface="Aptos" pitchFamily="34" charset="0"/>
+                <a:ea typeface="Aptos" pitchFamily="34" charset="-122"/>
+                <a:cs typeface="Aptos" pitchFamily="34" charset="-120"/>
+              </a:rPr>
+              <a:t>CONCEPT CHECK</a:t>
+            </a:r>
+            <a:endParaRPr lang="en-US" sz="1200" dirty="0"/>
+          </a:p>
+        </p:txBody>
+      </p:sp>
+      <p:sp>
+        <p:nvSpPr>
+          <p:cNvPr id="4" name="Text 2">
+            <a:extLst>
+              <a:ext uri="{FF2B5EF4-FFF2-40B4-BE49-F238E27FC236}">
+                <a16:creationId xmlns:a16="http://schemas.microsoft.com/office/drawing/2014/main" id="{558385AF-D1B1-A5CA-DFB3-715ACF51281C}"/>
+              </a:ext>
+            </a:extLst>
+          </p:cNvPr>
+          <p:cNvSpPr/>
+          <p:nvPr/>
+        </p:nvSpPr>
+        <p:spPr>
+          <a:xfrm>
+            <a:off x="1078992" y="2084832"/>
+            <a:ext cx="9966960" cy="868680"/>
+          </a:xfrm>
+          <a:prstGeom prst="rect">
+            <a:avLst/>
+          </a:prstGeom>
+          <a:noFill/>
+          <a:ln/>
+        </p:spPr>
+        <p:txBody>
+          <a:bodyPr wrap="square" lIns="0" tIns="0" rIns="0" bIns="0" rtlCol="0" anchor="ctr">
+            <a:normAutofit fontScale="92500"/>
+          </a:bodyPr>
+          <a:lstStyle/>
+          <a:p>
+            <a:pPr marL="0" indent="0">
+              <a:buNone/>
+            </a:pPr>
+            <a:r>
+              <a:rPr lang="en-US" sz="2300" b="1" dirty="0">
+                <a:solidFill>
+                  <a:srgbClr val="17324D"/>
+                </a:solidFill>
+                <a:latin typeface="Aptos" pitchFamily="34" charset="0"/>
+                <a:ea typeface="Aptos" pitchFamily="34" charset="-122"/>
+                <a:cs typeface="Aptos" pitchFamily="34" charset="-120"/>
+              </a:rPr>
+              <a:t>An N = 48 tap FIR decimator reduces the rate by M = 6. Roughly how many FIR multiplications per input sample are needed after polyphase reorganization?</a:t>
+            </a:r>
+            <a:endParaRPr lang="en-US" sz="2300" dirty="0"/>
+          </a:p>
+        </p:txBody>
+      </p:sp>
+      <p:sp>
+        <p:nvSpPr>
+          <p:cNvPr id="5" name="Text 3">
+            <a:extLst>
+              <a:ext uri="{FF2B5EF4-FFF2-40B4-BE49-F238E27FC236}">
+                <a16:creationId xmlns:a16="http://schemas.microsoft.com/office/drawing/2014/main" id="{6A19D57A-D0DE-16A9-A99B-DF66515EDDF1}"/>
+              </a:ext>
+            </a:extLst>
+          </p:cNvPr>
+          <p:cNvSpPr/>
+          <p:nvPr/>
+        </p:nvSpPr>
+        <p:spPr>
+          <a:xfrm>
+            <a:off x="1078992" y="3767328"/>
+            <a:ext cx="1188720" cy="228600"/>
+          </a:xfrm>
+          <a:prstGeom prst="rect">
+            <a:avLst/>
+          </a:prstGeom>
+          <a:noFill/>
+          <a:ln/>
+        </p:spPr>
+        <p:txBody>
+          <a:bodyPr wrap="square" lIns="0" tIns="0" rIns="0" bIns="0" rtlCol="0" anchor="ctr"/>
+          <a:lstStyle/>
+          <a:p>
+            <a:pPr marL="0" indent="0">
+              <a:buNone/>
+            </a:pPr>
+            <a:r>
+              <a:rPr lang="en-US" sz="1100" b="1" dirty="0">
+                <a:solidFill>
+                  <a:srgbClr val="2F855A"/>
+                </a:solidFill>
+                <a:latin typeface="Aptos" pitchFamily="34" charset="0"/>
+                <a:ea typeface="Aptos" pitchFamily="34" charset="-122"/>
+                <a:cs typeface="Aptos" pitchFamily="34" charset="-120"/>
+              </a:rPr>
+              <a:t>Good answer</a:t>
+            </a:r>
+            <a:endParaRPr lang="en-US" sz="1100" dirty="0"/>
+          </a:p>
+        </p:txBody>
+      </p:sp>
+      <p:sp>
+        <p:nvSpPr>
+          <p:cNvPr id="6" name="Text 4">
+            <a:extLst>
+              <a:ext uri="{FF2B5EF4-FFF2-40B4-BE49-F238E27FC236}">
+                <a16:creationId xmlns:a16="http://schemas.microsoft.com/office/drawing/2014/main" id="{8753E698-8D66-3CB5-F67D-61446340F1A3}"/>
+              </a:ext>
+            </a:extLst>
+          </p:cNvPr>
+          <p:cNvSpPr/>
+          <p:nvPr/>
+        </p:nvSpPr>
+        <p:spPr>
+          <a:xfrm>
+            <a:off x="1078992" y="4096512"/>
+            <a:ext cx="9784080" cy="1280160"/>
+          </a:xfrm>
+          <a:prstGeom prst="rect">
+            <a:avLst/>
+          </a:prstGeom>
+          <a:noFill/>
+          <a:ln/>
+        </p:spPr>
+        <p:txBody>
+          <a:bodyPr wrap="square" lIns="0" tIns="0" rIns="0" bIns="0" rtlCol="0" anchor="ctr">
+            <a:normAutofit/>
+          </a:bodyPr>
+          <a:lstStyle/>
+          <a:p>
+            <a:pPr marL="0" indent="0">
+              <a:buNone/>
+            </a:pPr>
+            <a:r>
+              <a:rPr lang="en-US" sz="1700" dirty="0">
+                <a:solidFill>
+                  <a:srgbClr val="1F2937"/>
+                </a:solidFill>
+                <a:latin typeface="Aptos" pitchFamily="34" charset="0"/>
+                <a:ea typeface="Aptos" pitchFamily="34" charset="-122"/>
+                <a:cs typeface="Aptos" pitchFamily="34" charset="-120"/>
+              </a:rPr>
+              <a:t>About N/M = 8 multiplications per input sample on average, versus about 48 for filtering every full-rate output first.</a:t>
+            </a:r>
+            <a:endParaRPr lang="en-US" sz="1700" dirty="0"/>
+          </a:p>
+        </p:txBody>
+      </p:sp>
+      <p:sp>
+        <p:nvSpPr>
+          <p:cNvPr id="25" name="Slide Number Placeholder 0">
+            <a:extLst>
+              <a:ext uri="{FF2B5EF4-FFF2-40B4-BE49-F238E27FC236}">
+                <a16:creationId xmlns:a16="http://schemas.microsoft.com/office/drawing/2014/main" id="{B8F22A6D-C29E-346F-2E70-DB032EE69F3F}"/>
+              </a:ext>
+            </a:extLst>
+          </p:cNvPr>
+          <p:cNvSpPr>
+            <a:spLocks noGrp="1"/>
+          </p:cNvSpPr>
+          <p:nvPr>
+            <p:ph type="sldNum" sz="quarter" idx="4294967295"/>
+          </p:nvPr>
+        </p:nvSpPr>
+        <p:spPr>
+          <a:xfrm>
+            <a:off x="11750040" y="6519672"/>
+            <a:ext cx="201168" cy="164592"/>
+          </a:xfrm>
+          <a:prstGeom prst="rect">
+            <a:avLst/>
+          </a:prstGeom>
+          <a:extLst>
+            <a:ext uri="{C572A759-6A51-4108-AA02-DFA0A04FC94B}">
+              <ma14:wrappingTextBoxFlag xmlns="" xmlns:ma14="http://schemas.microsoft.com/office/mac/drawingml/2011/main" val="0"/>
+            </a:ext>
+          </a:extLst>
+        </p:spPr>
+        <p:txBody>
+          <a:bodyPr/>
+          <a:lstStyle>
+            <a:lvl1pPr>
+              <a:defRPr sz="800">
+                <a:solidFill>
+                  <a:srgbClr val="64748B"/>
+                </a:solidFill>
+                <a:latin typeface="Aptos"/>
+                <a:ea typeface="Aptos"/>
+                <a:cs typeface="Aptos"/>
+              </a:defRPr>
+            </a:lvl1pPr>
+          </a:lstStyle>
+          <a:p>
+            <a:pPr algn="r"/>
+            <a:fld id="{F7021451-1387-4CA6-816F-3879F97B5CBC}" type="slidenum">
+              <a:rPr lang="en-US" b="0"/>
+              <a:t>14</a:t>
+            </a:fld>
+            <a:endParaRPr lang="en-US"/>
+          </a:p>
+        </p:txBody>
+      </p:sp>
+    </p:spTree>
+    <p:extLst>
+      <p:ext uri="{BB962C8B-B14F-4D97-AF65-F5344CB8AC3E}">
+        <p14:creationId xmlns:p14="http://schemas.microsoft.com/office/powerpoint/2010/main" val="1436483491"/>
+      </p:ext>
+    </p:extLst>
+  </p:cSld>
+  <p:clrMapOvr>
+    <a:masterClrMapping/>
+  </p:clrMapOvr>
+</p:sld>
+</file>
+
+<file path=ppt/slides/slide15.xml><?xml version="1.0" encoding="utf-8"?>
 <p:sld xmlns:a="http://schemas.openxmlformats.org/drawingml/2006/main" xmlns:r="http://schemas.openxmlformats.org/officeDocument/2006/relationships" xmlns:p="http://schemas.openxmlformats.org/presentationml/2006/main">
   <p:cSld name="Slide 13">
     <p:bg>
@@ -5433,6 +7420,7 @@
         <a:solidFill>
           <a:srgbClr val="17324D"/>
         </a:solidFill>
+        <a:effectLst/>
       </p:bgPr>
     </p:bg>
     <p:spTree>
@@ -5470,7 +7458,7 @@
           <a:bodyPr wrap="square" lIns="0" tIns="0" rIns="0" bIns="0" rtlCol="0" anchor="ctr"/>
           <a:lstStyle/>
           <a:p>
-            <a:pPr indent="0" marL="0">
+            <a:pPr marL="0" indent="0">
               <a:buNone/>
             </a:pPr>
             <a:r>
@@ -5511,7 +7499,7 @@
           </a:bodyPr>
           <a:lstStyle/>
           <a:p>
-            <a:pPr indent="0" marL="0">
+            <a:pPr marL="0" indent="0">
               <a:buNone/>
             </a:pPr>
             <a:r>
@@ -5550,7 +7538,7 @@
           <a:bodyPr wrap="square" lIns="0" tIns="0" rIns="0" bIns="0" rtlCol="0" anchor="ctr"/>
           <a:lstStyle/>
           <a:p>
-            <a:pPr indent="0" marL="0">
+            <a:pPr marL="0" indent="0">
               <a:buNone/>
             </a:pPr>
             <a:r>
@@ -5588,7 +7576,7 @@
           </a:prstGeom>
           <a:extLst>
             <a:ext uri="{C572A759-6A51-4108-AA02-DFA0A04FC94B}">
-              <ma14:wrappingTextBoxFlag xmlns:ma14="http://schemas.microsoft.com/office/mac/drawingml/2011/main" val="0"/>
+              <ma14:wrappingTextBoxFlag xmlns:ma14="http://schemas.microsoft.com/office/mac/drawingml/2011/main" xmlns="" val="0"/>
             </a:ext>
           </a:extLst>
         </p:spPr>
@@ -5609,8 +7597,8 @@
           <a:p>
             <a:pPr algn="r"/>
             <a:fld id="{F7021451-1387-4CA6-816F-3879F97B5CBC}" type="slidenum">
-              <a:rPr b="0" lang="en-US"/>
-              <a:t>13</a:t>
+              <a:rPr lang="en-US" b="0"/>
+              <a:t>15</a:t>
             </a:fld>
             <a:endParaRPr lang="en-US"/>
           </a:p>
@@ -5624,7 +7612,7 @@
 </p:sld>
 </file>
 
-<file path=ppt/slides/slide14.xml><?xml version="1.0" encoding="utf-8"?>
+<file path=ppt/slides/slide16.xml><?xml version="1.0" encoding="utf-8"?>
 <p:sld xmlns:a="http://schemas.openxmlformats.org/drawingml/2006/main" xmlns:r="http://schemas.openxmlformats.org/officeDocument/2006/relationships" xmlns:p="http://schemas.openxmlformats.org/presentationml/2006/main">
   <p:cSld name="Slide 14">
     <p:spTree>
@@ -5664,7 +7652,7 @@
           </a:bodyPr>
           <a:lstStyle/>
           <a:p>
-            <a:pPr indent="0" marL="0">
+            <a:pPr marL="0" indent="0">
               <a:buNone/>
             </a:pPr>
             <a:r>
@@ -5705,7 +7693,7 @@
           </a:bodyPr>
           <a:lstStyle/>
           <a:p>
-            <a:pPr indent="0" marL="0">
+            <a:pPr marL="0" indent="0">
               <a:buNone/>
             </a:pPr>
             <a:r>
@@ -5747,6 +7735,13 @@
             <a:prstDash val="solid"/>
           </a:ln>
         </p:spPr>
+        <p:txBody>
+          <a:bodyPr/>
+          <a:lstStyle/>
+          <a:p>
+            <a:endParaRPr lang="en-US"/>
+          </a:p>
+        </p:txBody>
       </p:sp>
       <p:sp>
         <p:nvSpPr>
@@ -5771,7 +7766,7 @@
           </a:bodyPr>
           <a:lstStyle/>
           <a:p>
-            <a:pPr algn="ctr" indent="0" marL="0">
+            <a:pPr marL="0" indent="0" algn="ctr">
               <a:buNone/>
             </a:pPr>
             <a:r>
@@ -5813,6 +7808,13 @@
             <a:prstDash val="solid"/>
           </a:ln>
         </p:spPr>
+        <p:txBody>
+          <a:bodyPr/>
+          <a:lstStyle/>
+          <a:p>
+            <a:endParaRPr lang="en-US"/>
+          </a:p>
+        </p:txBody>
       </p:sp>
       <p:sp>
         <p:nvSpPr>
@@ -5838,6 +7840,13 @@
             <a:prstDash val="solid"/>
           </a:ln>
         </p:spPr>
+        <p:txBody>
+          <a:bodyPr/>
+          <a:lstStyle/>
+          <a:p>
+            <a:endParaRPr lang="en-US"/>
+          </a:p>
+        </p:txBody>
       </p:sp>
       <p:sp>
         <p:nvSpPr>
@@ -5862,7 +7871,7 @@
           </a:bodyPr>
           <a:lstStyle/>
           <a:p>
-            <a:pPr indent="0" marL="0">
+            <a:pPr marL="0" indent="0">
               <a:buNone/>
             </a:pPr>
             <a:r>
@@ -5903,7 +7912,7 @@
           </a:bodyPr>
           <a:lstStyle/>
           <a:p>
-            <a:pPr indent="0" marL="0">
+            <a:pPr marL="0" indent="0">
               <a:buNone/>
             </a:pPr>
             <a:r>
@@ -5945,6 +7954,13 @@
             <a:prstDash val="solid"/>
           </a:ln>
         </p:spPr>
+        <p:txBody>
+          <a:bodyPr/>
+          <a:lstStyle/>
+          <a:p>
+            <a:endParaRPr lang="en-US"/>
+          </a:p>
+        </p:txBody>
       </p:sp>
       <p:sp>
         <p:nvSpPr>
@@ -5970,6 +7986,13 @@
             <a:prstDash val="solid"/>
           </a:ln>
         </p:spPr>
+        <p:txBody>
+          <a:bodyPr/>
+          <a:lstStyle/>
+          <a:p>
+            <a:endParaRPr lang="en-US"/>
+          </a:p>
+        </p:txBody>
       </p:sp>
       <p:sp>
         <p:nvSpPr>
@@ -5994,7 +8017,7 @@
           </a:bodyPr>
           <a:lstStyle/>
           <a:p>
-            <a:pPr indent="0" marL="0">
+            <a:pPr marL="0" indent="0">
               <a:buNone/>
             </a:pPr>
             <a:r>
@@ -6035,7 +8058,7 @@
           </a:bodyPr>
           <a:lstStyle/>
           <a:p>
-            <a:pPr indent="0" marL="0">
+            <a:pPr marL="0" indent="0">
               <a:buNone/>
             </a:pPr>
             <a:r>
@@ -6077,6 +8100,13 @@
             <a:prstDash val="solid"/>
           </a:ln>
         </p:spPr>
+        <p:txBody>
+          <a:bodyPr/>
+          <a:lstStyle/>
+          <a:p>
+            <a:endParaRPr lang="en-US"/>
+          </a:p>
+        </p:txBody>
       </p:sp>
       <p:sp>
         <p:nvSpPr>
@@ -6102,6 +8132,13 @@
             <a:prstDash val="solid"/>
           </a:ln>
         </p:spPr>
+        <p:txBody>
+          <a:bodyPr/>
+          <a:lstStyle/>
+          <a:p>
+            <a:endParaRPr lang="en-US"/>
+          </a:p>
+        </p:txBody>
       </p:sp>
       <p:sp>
         <p:nvSpPr>
@@ -6126,7 +8163,7 @@
           </a:bodyPr>
           <a:lstStyle/>
           <a:p>
-            <a:pPr indent="0" marL="0">
+            <a:pPr marL="0" indent="0">
               <a:buNone/>
             </a:pPr>
             <a:r>
@@ -6167,7 +8204,7 @@
           </a:bodyPr>
           <a:lstStyle/>
           <a:p>
-            <a:pPr indent="0" marL="0">
+            <a:pPr marL="0" indent="0">
               <a:buNone/>
             </a:pPr>
             <a:r>
@@ -6283,7 +8320,7 @@
           </a:prstGeom>
           <a:extLst>
             <a:ext uri="{C572A759-6A51-4108-AA02-DFA0A04FC94B}">
-              <ma14:wrappingTextBoxFlag xmlns:ma14="http://schemas.microsoft.com/office/mac/drawingml/2011/main" val="0"/>
+              <ma14:wrappingTextBoxFlag xmlns:ma14="http://schemas.microsoft.com/office/mac/drawingml/2011/main" xmlns="" val="0"/>
             </a:ext>
           </a:extLst>
         </p:spPr>
@@ -6304,8 +8341,8 @@
           <a:p>
             <a:pPr algn="r"/>
             <a:fld id="{F7021451-1387-4CA6-816F-3879F97B5CBC}" type="slidenum">
-              <a:rPr b="0" lang="en-US"/>
-              <a:t>14</a:t>
+              <a:rPr lang="en-US" b="0"/>
+              <a:t>16</a:t>
             </a:fld>
             <a:endParaRPr lang="en-US"/>
           </a:p>
@@ -6319,7 +8356,7 @@
 </p:sld>
 </file>
 
-<file path=ppt/slides/slide15.xml><?xml version="1.0" encoding="utf-8"?>
+<file path=ppt/slides/slide17.xml><?xml version="1.0" encoding="utf-8"?>
 <p:sld xmlns:a="http://schemas.openxmlformats.org/drawingml/2006/main" xmlns:r="http://schemas.openxmlformats.org/officeDocument/2006/relationships" xmlns:p="http://schemas.openxmlformats.org/presentationml/2006/main">
   <p:cSld name="Slide 15">
     <p:spTree>
@@ -6359,7 +8396,7 @@
           </a:bodyPr>
           <a:lstStyle/>
           <a:p>
-            <a:pPr indent="0" marL="0">
+            <a:pPr marL="0" indent="0">
               <a:buNone/>
             </a:pPr>
             <a:r>
@@ -6400,7 +8437,7 @@
           </a:bodyPr>
           <a:lstStyle/>
           <a:p>
-            <a:pPr indent="0" marL="0">
+            <a:pPr marL="0" indent="0">
               <a:buNone/>
             </a:pPr>
             <a:r>
@@ -6442,6 +8479,13 @@
             <a:prstDash val="solid"/>
           </a:ln>
         </p:spPr>
+        <p:txBody>
+          <a:bodyPr/>
+          <a:lstStyle/>
+          <a:p>
+            <a:endParaRPr lang="en-US"/>
+          </a:p>
+        </p:txBody>
       </p:sp>
       <p:sp>
         <p:nvSpPr>
@@ -6467,6 +8511,13 @@
             <a:prstDash val="solid"/>
           </a:ln>
         </p:spPr>
+        <p:txBody>
+          <a:bodyPr/>
+          <a:lstStyle/>
+          <a:p>
+            <a:endParaRPr lang="en-US"/>
+          </a:p>
+        </p:txBody>
       </p:sp>
       <p:sp>
         <p:nvSpPr>
@@ -6491,7 +8542,7 @@
           </a:bodyPr>
           <a:lstStyle/>
           <a:p>
-            <a:pPr indent="0" marL="0">
+            <a:pPr marL="0" indent="0">
               <a:buNone/>
             </a:pPr>
             <a:r>
@@ -6532,7 +8583,7 @@
           </a:bodyPr>
           <a:lstStyle/>
           <a:p>
-            <a:pPr indent="0" marL="0">
+            <a:pPr marL="0" indent="0">
               <a:buNone/>
             </a:pPr>
             <a:r>
@@ -6549,13 +8600,13 @@
             <a:endParaRPr lang="en-US" sz="1220" dirty="0"/>
           </a:p>
           <a:p>
-            <a:pPr indent="0" marL="0">
+            <a:pPr marL="0" indent="0">
               <a:buNone/>
             </a:pPr>
             <a:endParaRPr lang="en-US" sz="1220" dirty="0"/>
           </a:p>
           <a:p>
-            <a:pPr indent="0" marL="0">
+            <a:pPr marL="0" indent="0">
               <a:buNone/>
             </a:pPr>
             <a:r>
@@ -6572,13 +8623,13 @@
             <a:endParaRPr lang="en-US" sz="1220" dirty="0"/>
           </a:p>
           <a:p>
-            <a:pPr indent="0" marL="0">
+            <a:pPr marL="0" indent="0">
               <a:buNone/>
             </a:pPr>
             <a:endParaRPr lang="en-US" sz="1220" dirty="0"/>
           </a:p>
           <a:p>
-            <a:pPr indent="0" marL="0">
+            <a:pPr marL="0" indent="0">
               <a:buNone/>
             </a:pPr>
             <a:r>
@@ -6620,6 +8671,13 @@
             <a:prstDash val="solid"/>
           </a:ln>
         </p:spPr>
+        <p:txBody>
+          <a:bodyPr/>
+          <a:lstStyle/>
+          <a:p>
+            <a:endParaRPr lang="en-US"/>
+          </a:p>
+        </p:txBody>
       </p:sp>
       <p:sp>
         <p:nvSpPr>
@@ -6645,6 +8703,13 @@
             <a:prstDash val="solid"/>
           </a:ln>
         </p:spPr>
+        <p:txBody>
+          <a:bodyPr/>
+          <a:lstStyle/>
+          <a:p>
+            <a:endParaRPr lang="en-US"/>
+          </a:p>
+        </p:txBody>
       </p:sp>
       <p:sp>
         <p:nvSpPr>
@@ -6669,7 +8734,7 @@
           </a:bodyPr>
           <a:lstStyle/>
           <a:p>
-            <a:pPr indent="0" marL="0">
+            <a:pPr marL="0" indent="0">
               <a:buNone/>
             </a:pPr>
             <a:r>
@@ -6710,7 +8775,7 @@
           </a:bodyPr>
           <a:lstStyle/>
           <a:p>
-            <a:pPr indent="0" marL="0">
+            <a:pPr marL="0" indent="0">
               <a:buNone/>
             </a:pPr>
             <a:r>
@@ -6727,13 +8792,13 @@
             <a:endParaRPr lang="en-US" sz="1220" dirty="0"/>
           </a:p>
           <a:p>
-            <a:pPr indent="0" marL="0">
+            <a:pPr marL="0" indent="0">
               <a:buNone/>
             </a:pPr>
             <a:endParaRPr lang="en-US" sz="1220" dirty="0"/>
           </a:p>
           <a:p>
-            <a:pPr indent="0" marL="0">
+            <a:pPr marL="0" indent="0">
               <a:buNone/>
             </a:pPr>
             <a:r>
@@ -6750,13 +8815,13 @@
             <a:endParaRPr lang="en-US" sz="1220" dirty="0"/>
           </a:p>
           <a:p>
-            <a:pPr indent="0" marL="0">
+            <a:pPr marL="0" indent="0">
               <a:buNone/>
             </a:pPr>
             <a:endParaRPr lang="en-US" sz="1220" dirty="0"/>
           </a:p>
           <a:p>
-            <a:pPr indent="0" marL="0">
+            <a:pPr marL="0" indent="0">
               <a:buNone/>
             </a:pPr>
             <a:r>
@@ -6798,6 +8863,13 @@
             <a:prstDash val="solid"/>
           </a:ln>
         </p:spPr>
+        <p:txBody>
+          <a:bodyPr/>
+          <a:lstStyle/>
+          <a:p>
+            <a:endParaRPr lang="en-US"/>
+          </a:p>
+        </p:txBody>
       </p:sp>
       <p:sp>
         <p:nvSpPr>
@@ -6822,7 +8894,7 @@
           </a:bodyPr>
           <a:lstStyle/>
           <a:p>
-            <a:pPr algn="ctr" indent="0" marL="0">
+            <a:pPr marL="0" indent="0" algn="ctr">
               <a:buNone/>
             </a:pPr>
             <a:r>
@@ -6860,7 +8932,7 @@
           </a:prstGeom>
           <a:extLst>
             <a:ext uri="{C572A759-6A51-4108-AA02-DFA0A04FC94B}">
-              <ma14:wrappingTextBoxFlag xmlns:ma14="http://schemas.microsoft.com/office/mac/drawingml/2011/main" val="0"/>
+              <ma14:wrappingTextBoxFlag xmlns:ma14="http://schemas.microsoft.com/office/mac/drawingml/2011/main" xmlns="" val="0"/>
             </a:ext>
           </a:extLst>
         </p:spPr>
@@ -6881,8 +8953,8 @@
           <a:p>
             <a:pPr algn="r"/>
             <a:fld id="{F7021451-1387-4CA6-816F-3879F97B5CBC}" type="slidenum">
-              <a:rPr b="0" lang="en-US"/>
-              <a:t>15</a:t>
+              <a:rPr lang="en-US" b="0"/>
+              <a:t>17</a:t>
             </a:fld>
             <a:endParaRPr lang="en-US"/>
           </a:p>
@@ -6896,7 +8968,7 @@
 </p:sld>
 </file>
 
-<file path=ppt/slides/slide16.xml><?xml version="1.0" encoding="utf-8"?>
+<file path=ppt/slides/slide18.xml><?xml version="1.0" encoding="utf-8"?>
 <p:sld xmlns:a="http://schemas.openxmlformats.org/drawingml/2006/main" xmlns:r="http://schemas.openxmlformats.org/officeDocument/2006/relationships" xmlns:p="http://schemas.openxmlformats.org/presentationml/2006/main">
   <p:cSld name="Slide 16">
     <p:spTree>
@@ -6936,7 +9008,7 @@
           </a:bodyPr>
           <a:lstStyle/>
           <a:p>
-            <a:pPr indent="0" marL="0">
+            <a:pPr marL="0" indent="0">
               <a:buNone/>
             </a:pPr>
             <a:r>
@@ -6977,7 +9049,7 @@
           </a:bodyPr>
           <a:lstStyle/>
           <a:p>
-            <a:pPr indent="0" marL="0">
+            <a:pPr marL="0" indent="0">
               <a:buNone/>
             </a:pPr>
             <a:r>
@@ -7115,6 +9187,13 @@
             <a:prstDash val="solid"/>
           </a:ln>
         </p:spPr>
+        <p:txBody>
+          <a:bodyPr/>
+          <a:lstStyle/>
+          <a:p>
+            <a:endParaRPr lang="en-US"/>
+          </a:p>
+        </p:txBody>
       </p:sp>
       <p:sp>
         <p:nvSpPr>
@@ -7140,6 +9219,13 @@
             <a:prstDash val="solid"/>
           </a:ln>
         </p:spPr>
+        <p:txBody>
+          <a:bodyPr/>
+          <a:lstStyle/>
+          <a:p>
+            <a:endParaRPr lang="en-US"/>
+          </a:p>
+        </p:txBody>
       </p:sp>
       <p:sp>
         <p:nvSpPr>
@@ -7164,7 +9250,7 @@
           </a:bodyPr>
           <a:lstStyle/>
           <a:p>
-            <a:pPr indent="0" marL="0">
+            <a:pPr marL="0" indent="0">
               <a:buNone/>
             </a:pPr>
             <a:r>
@@ -7205,7 +9291,7 @@
           </a:bodyPr>
           <a:lstStyle/>
           <a:p>
-            <a:pPr indent="0" marL="0">
+            <a:pPr marL="0" indent="0">
               <a:buNone/>
             </a:pPr>
             <a:r>
@@ -7247,6 +9333,13 @@
             <a:prstDash val="solid"/>
           </a:ln>
         </p:spPr>
+        <p:txBody>
+          <a:bodyPr/>
+          <a:lstStyle/>
+          <a:p>
+            <a:endParaRPr lang="en-US"/>
+          </a:p>
+        </p:txBody>
       </p:sp>
       <p:sp>
         <p:nvSpPr>
@@ -7272,6 +9365,13 @@
             <a:prstDash val="solid"/>
           </a:ln>
         </p:spPr>
+        <p:txBody>
+          <a:bodyPr/>
+          <a:lstStyle/>
+          <a:p>
+            <a:endParaRPr lang="en-US"/>
+          </a:p>
+        </p:txBody>
       </p:sp>
       <p:sp>
         <p:nvSpPr>
@@ -7296,7 +9396,7 @@
           </a:bodyPr>
           <a:lstStyle/>
           <a:p>
-            <a:pPr indent="0" marL="0">
+            <a:pPr marL="0" indent="0">
               <a:buNone/>
             </a:pPr>
             <a:r>
@@ -7337,7 +9437,7 @@
           </a:bodyPr>
           <a:lstStyle/>
           <a:p>
-            <a:pPr indent="0" marL="0">
+            <a:pPr marL="0" indent="0">
               <a:buNone/>
             </a:pPr>
             <a:r>
@@ -7379,6 +9479,13 @@
             <a:prstDash val="solid"/>
           </a:ln>
         </p:spPr>
+        <p:txBody>
+          <a:bodyPr/>
+          <a:lstStyle/>
+          <a:p>
+            <a:endParaRPr lang="en-US"/>
+          </a:p>
+        </p:txBody>
       </p:sp>
       <p:sp>
         <p:nvSpPr>
@@ -7404,6 +9511,13 @@
             <a:prstDash val="solid"/>
           </a:ln>
         </p:spPr>
+        <p:txBody>
+          <a:bodyPr/>
+          <a:lstStyle/>
+          <a:p>
+            <a:endParaRPr lang="en-US"/>
+          </a:p>
+        </p:txBody>
       </p:sp>
       <p:sp>
         <p:nvSpPr>
@@ -7428,7 +9542,7 @@
           </a:bodyPr>
           <a:lstStyle/>
           <a:p>
-            <a:pPr indent="0" marL="0">
+            <a:pPr marL="0" indent="0">
               <a:buNone/>
             </a:pPr>
             <a:r>
@@ -7469,7 +9583,7 @@
           </a:bodyPr>
           <a:lstStyle/>
           <a:p>
-            <a:pPr indent="0" marL="0">
+            <a:pPr marL="0" indent="0">
               <a:buNone/>
             </a:pPr>
             <a:r>
@@ -7507,7 +9621,7 @@
           </a:prstGeom>
           <a:extLst>
             <a:ext uri="{C572A759-6A51-4108-AA02-DFA0A04FC94B}">
-              <ma14:wrappingTextBoxFlag xmlns:ma14="http://schemas.microsoft.com/office/mac/drawingml/2011/main" val="0"/>
+              <ma14:wrappingTextBoxFlag xmlns:ma14="http://schemas.microsoft.com/office/mac/drawingml/2011/main" xmlns="" val="0"/>
             </a:ext>
           </a:extLst>
         </p:spPr>
@@ -7528,8 +9642,8 @@
           <a:p>
             <a:pPr algn="r"/>
             <a:fld id="{F7021451-1387-4CA6-816F-3879F97B5CBC}" type="slidenum">
-              <a:rPr b="0" lang="en-US"/>
-              <a:t>16</a:t>
+              <a:rPr lang="en-US" b="0"/>
+              <a:t>18</a:t>
             </a:fld>
             <a:endParaRPr lang="en-US"/>
           </a:p>
@@ -7543,7 +9657,7 @@
 </p:sld>
 </file>
 
-<file path=ppt/slides/slide17.xml><?xml version="1.0" encoding="utf-8"?>
+<file path=ppt/slides/slide19.xml><?xml version="1.0" encoding="utf-8"?>
 <p:sld xmlns:a="http://schemas.openxmlformats.org/drawingml/2006/main" xmlns:r="http://schemas.openxmlformats.org/officeDocument/2006/relationships" xmlns:p="http://schemas.openxmlformats.org/presentationml/2006/main">
   <p:cSld name="Slide 17">
     <p:spTree>
@@ -7583,7 +9697,7 @@
           </a:bodyPr>
           <a:lstStyle/>
           <a:p>
-            <a:pPr indent="0" marL="0">
+            <a:pPr marL="0" indent="0">
               <a:buNone/>
             </a:pPr>
             <a:r>
@@ -7624,7 +9738,7 @@
           </a:bodyPr>
           <a:lstStyle/>
           <a:p>
-            <a:pPr indent="0" marL="0">
+            <a:pPr marL="0" indent="0">
               <a:buNone/>
             </a:pPr>
             <a:r>
@@ -7780,6 +9894,13 @@
             <a:prstDash val="solid"/>
           </a:ln>
         </p:spPr>
+        <p:txBody>
+          <a:bodyPr/>
+          <a:lstStyle/>
+          <a:p>
+            <a:endParaRPr lang="en-US"/>
+          </a:p>
+        </p:txBody>
       </p:sp>
       <p:sp>
         <p:nvSpPr>
@@ -7805,6 +9926,13 @@
             <a:prstDash val="solid"/>
           </a:ln>
         </p:spPr>
+        <p:txBody>
+          <a:bodyPr/>
+          <a:lstStyle/>
+          <a:p>
+            <a:endParaRPr lang="en-US"/>
+          </a:p>
+        </p:txBody>
       </p:sp>
       <p:sp>
         <p:nvSpPr>
@@ -7829,7 +9957,7 @@
           </a:bodyPr>
           <a:lstStyle/>
           <a:p>
-            <a:pPr indent="0" marL="0">
+            <a:pPr marL="0" indent="0">
               <a:buNone/>
             </a:pPr>
             <a:r>
@@ -7870,7 +9998,7 @@
           </a:bodyPr>
           <a:lstStyle/>
           <a:p>
-            <a:pPr indent="0" marL="0">
+            <a:pPr marL="0" indent="0">
               <a:buNone/>
             </a:pPr>
             <a:r>
@@ -7912,6 +10040,13 @@
             <a:prstDash val="solid"/>
           </a:ln>
         </p:spPr>
+        <p:txBody>
+          <a:bodyPr/>
+          <a:lstStyle/>
+          <a:p>
+            <a:endParaRPr lang="en-US"/>
+          </a:p>
+        </p:txBody>
       </p:sp>
       <p:sp>
         <p:nvSpPr>
@@ -7937,6 +10072,13 @@
             <a:prstDash val="solid"/>
           </a:ln>
         </p:spPr>
+        <p:txBody>
+          <a:bodyPr/>
+          <a:lstStyle/>
+          <a:p>
+            <a:endParaRPr lang="en-US"/>
+          </a:p>
+        </p:txBody>
       </p:sp>
       <p:sp>
         <p:nvSpPr>
@@ -7961,7 +10103,7 @@
           </a:bodyPr>
           <a:lstStyle/>
           <a:p>
-            <a:pPr indent="0" marL="0">
+            <a:pPr marL="0" indent="0">
               <a:buNone/>
             </a:pPr>
             <a:r>
@@ -8002,7 +10144,7 @@
           </a:bodyPr>
           <a:lstStyle/>
           <a:p>
-            <a:pPr indent="0" marL="0">
+            <a:pPr marL="0" indent="0">
               <a:buNone/>
             </a:pPr>
             <a:r>
@@ -8040,7 +10182,7 @@
           </a:prstGeom>
           <a:extLst>
             <a:ext uri="{C572A759-6A51-4108-AA02-DFA0A04FC94B}">
-              <ma14:wrappingTextBoxFlag xmlns:ma14="http://schemas.microsoft.com/office/mac/drawingml/2011/main" val="0"/>
+              <ma14:wrappingTextBoxFlag xmlns:ma14="http://schemas.microsoft.com/office/mac/drawingml/2011/main" xmlns="" val="0"/>
             </a:ext>
           </a:extLst>
         </p:spPr>
@@ -8061,259 +10203,8 @@
           <a:p>
             <a:pPr algn="r"/>
             <a:fld id="{F7021451-1387-4CA6-816F-3879F97B5CBC}" type="slidenum">
-              <a:rPr b="0" lang="en-US"/>
-              <a:t>17</a:t>
-            </a:fld>
-            <a:endParaRPr lang="en-US"/>
-          </a:p>
-        </p:txBody>
-      </p:sp>
-    </p:spTree>
-  </p:cSld>
-  <p:clrMapOvr>
-    <a:masterClrMapping/>
-  </p:clrMapOvr>
-</p:sld>
-</file>
-
-<file path=ppt/slides/slide18.xml><?xml version="1.0" encoding="utf-8"?>
-<p:sld xmlns:a="http://schemas.openxmlformats.org/drawingml/2006/main" xmlns:r="http://schemas.openxmlformats.org/officeDocument/2006/relationships" xmlns:p="http://schemas.openxmlformats.org/presentationml/2006/main">
-  <p:cSld name="Slide 18">
-    <p:spTree>
-      <p:nvGrpSpPr>
-        <p:cNvPr id="1" name=""/>
-        <p:cNvGrpSpPr/>
-        <p:nvPr/>
-      </p:nvGrpSpPr>
-      <p:grpSpPr>
-        <a:xfrm>
-          <a:off x="0" y="0"/>
-          <a:ext cx="0" cy="0"/>
-          <a:chOff x="0" y="0"/>
-          <a:chExt cx="0" cy="0"/>
-        </a:xfrm>
-      </p:grpSpPr>
-      <p:sp>
-        <p:nvSpPr>
-          <p:cNvPr id="2" name="Text 0"/>
-          <p:cNvSpPr/>
-          <p:nvPr/>
-        </p:nvSpPr>
-        <p:spPr>
-          <a:xfrm>
-            <a:off x="566928" y="310896"/>
-            <a:ext cx="11018520" cy="438912"/>
-          </a:xfrm>
-          <a:prstGeom prst="rect">
-            <a:avLst/>
-          </a:prstGeom>
-          <a:noFill/>
-          <a:ln/>
-        </p:spPr>
-        <p:txBody>
-          <a:bodyPr wrap="square" lIns="0" tIns="0" rIns="0" bIns="0" rtlCol="0" anchor="ctr">
-            <a:normAutofit/>
-          </a:bodyPr>
-          <a:lstStyle/>
-          <a:p>
-            <a:pPr indent="0" marL="0">
-              <a:buNone/>
-            </a:pPr>
-            <a:r>
-              <a:rPr lang="en-US" sz="2500" b="1" dirty="0">
-                <a:solidFill>
-                  <a:srgbClr val="17324D"/>
-                </a:solidFill>
-                <a:latin typeface="Aptos" pitchFamily="34" charset="0"/>
-                <a:ea typeface="Aptos" pitchFamily="34" charset="-122"/>
-                <a:cs typeface="Aptos" pitchFamily="34" charset="-120"/>
-              </a:rPr>
-              <a:t>References and instructor resources</a:t>
-            </a:r>
-            <a:endParaRPr lang="en-US" sz="2500" dirty="0"/>
-          </a:p>
-        </p:txBody>
-      </p:sp>
-      <p:sp>
-        <p:nvSpPr>
-          <p:cNvPr id="3" name="Text 1"/>
-          <p:cNvSpPr/>
-          <p:nvPr/>
-        </p:nvSpPr>
-        <p:spPr>
-          <a:xfrm>
-            <a:off x="585216" y="795528"/>
-            <a:ext cx="10744200" cy="292608"/>
-          </a:xfrm>
-          <a:prstGeom prst="rect">
-            <a:avLst/>
-          </a:prstGeom>
-          <a:noFill/>
-          <a:ln/>
-        </p:spPr>
-        <p:txBody>
-          <a:bodyPr wrap="square" lIns="0" tIns="0" rIns="0" bIns="0" rtlCol="0" anchor="ctr">
-            <a:normAutofit/>
-          </a:bodyPr>
-          <a:lstStyle/>
-          <a:p>
-            <a:pPr indent="0" marL="0">
-              <a:buNone/>
-            </a:pPr>
-            <a:r>
-              <a:rPr lang="en-US" sz="1150" dirty="0">
-                <a:solidFill>
-                  <a:srgbClr val="64748B"/>
-                </a:solidFill>
-                <a:latin typeface="Aptos" pitchFamily="34" charset="0"/>
-                <a:ea typeface="Aptos" pitchFamily="34" charset="-122"/>
-                <a:cs typeface="Aptos" pitchFamily="34" charset="-120"/>
-              </a:rPr>
-              <a:t>Week 7 • Lecture 13</a:t>
-            </a:r>
-            <a:endParaRPr lang="en-US" sz="1150" dirty="0"/>
-          </a:p>
-        </p:txBody>
-      </p:sp>
-      <p:sp>
-        <p:nvSpPr>
-          <p:cNvPr id="4" name="Text 2"/>
-          <p:cNvSpPr/>
-          <p:nvPr/>
-        </p:nvSpPr>
-        <p:spPr>
-          <a:xfrm>
-            <a:off x="914400" y="1417320"/>
-            <a:ext cx="9875520" cy="3017520"/>
-          </a:xfrm>
-          <a:prstGeom prst="rect">
-            <a:avLst/>
-          </a:prstGeom>
-          <a:noFill/>
-          <a:ln/>
-        </p:spPr>
-        <p:txBody>
-          <a:bodyPr wrap="square" lIns="635" tIns="635" rIns="635" bIns="635" rtlCol="0" anchor="ctr">
-            <a:normAutofit/>
-          </a:bodyPr>
-          <a:lstStyle/>
-          <a:p>
-            <a:pPr marL="228600" indent="-228600">
-              <a:buSzPct val="100000"/>
-              <a:buChar char="•"/>
-            </a:pPr>
-            <a:r>
-              <a:rPr lang="en-US" sz="1600" dirty="0">
-                <a:solidFill>
-                  <a:srgbClr val="1F2937"/>
-                </a:solidFill>
-                <a:latin typeface="Aptos" pitchFamily="34" charset="0"/>
-                <a:ea typeface="Aptos" pitchFamily="34" charset="-122"/>
-                <a:cs typeface="Aptos" pitchFamily="34" charset="-120"/>
-              </a:rPr>
-              <a:t>Oppenheim &amp; Schafer, Discrete-Time Signal Processing, §4.7: polyphase structures and multirate implementations.</a:t>
-            </a:r>
-            <a:endParaRPr lang="en-US" sz="1600" dirty="0"/>
-          </a:p>
-          <a:p>
-            <a:pPr marL="228600" indent="-228600">
-              <a:buSzPct val="100000"/>
-              <a:buChar char="•"/>
-            </a:pPr>
-            <a:r>
-              <a:rPr lang="en-US" sz="1600" dirty="0">
-                <a:solidFill>
-                  <a:srgbClr val="1F2937"/>
-                </a:solidFill>
-                <a:latin typeface="Aptos" pitchFamily="34" charset="0"/>
-                <a:ea typeface="Aptos" pitchFamily="34" charset="-122"/>
-                <a:cs typeface="Aptos" pitchFamily="34" charset="-120"/>
-              </a:rPr>
-              <a:t>Raschka et al., Machine Learning with PyTorch and Scikit-Learn: convolutional neural-network architectures.</a:t>
-            </a:r>
-            <a:endParaRPr lang="en-US" sz="1600" dirty="0"/>
-          </a:p>
-          <a:p>
-            <a:pPr marL="228600" indent="-228600">
-              <a:buSzPct val="100000"/>
-              <a:buChar char="•"/>
-            </a:pPr>
-            <a:r>
-              <a:rPr lang="en-US" sz="1600" dirty="0">
-                <a:solidFill>
-                  <a:srgbClr val="1F2937"/>
-                </a:solidFill>
-                <a:latin typeface="Aptos" pitchFamily="34" charset="0"/>
-                <a:ea typeface="Aptos" pitchFamily="34" charset="-122"/>
-                <a:cs typeface="Aptos" pitchFamily="34" charset="-120"/>
-              </a:rPr>
-              <a:t>Accompanying notebook: Week7_Polyphase_DSP_ML_Demos.ipynb.</a:t>
-            </a:r>
-            <a:endParaRPr lang="en-US" sz="1600" dirty="0"/>
-          </a:p>
-          <a:p>
-            <a:pPr marL="228600" indent="-228600">
-              <a:buSzPct val="100000"/>
-              <a:buChar char="•"/>
-            </a:pPr>
-            <a:r>
-              <a:rPr lang="en-US" sz="1600" dirty="0">
-                <a:solidFill>
-                  <a:srgbClr val="1F2937"/>
-                </a:solidFill>
-                <a:latin typeface="Aptos" pitchFamily="34" charset="0"/>
-                <a:ea typeface="Aptos" pitchFamily="34" charset="-122"/>
-                <a:cs typeface="Aptos" pitchFamily="34" charset="-120"/>
-              </a:rPr>
-              <a:t>Homework and weekly quiz: Week7_Polyphase_Homework_Quiz_Solutions.docx.</a:t>
-            </a:r>
-            <a:endParaRPr lang="en-US" sz="1600" dirty="0"/>
-          </a:p>
-        </p:txBody>
-      </p:sp>
-      <p:sp>
-        <p:nvSpPr>
-          <p:cNvPr id="25" name="Slide Number Placeholder 0"/>
-          <p:cNvSpPr>
-            <a:spLocks noGrp="1"/>
-          </p:cNvSpPr>
-          <p:nvPr>
-            <p:ph type="sldNum" sz="quarter" idx="4294967295"/>
-          </p:nvPr>
-        </p:nvSpPr>
-        <p:spPr>
-          <a:xfrm>
-            <a:off x="11750040" y="6519672"/>
-            <a:ext cx="201168" cy="164592"/>
-          </a:xfrm>
-          <a:prstGeom prst="rect">
-            <a:avLst/>
-          </a:prstGeom>
-          <a:extLst>
-            <a:ext uri="{C572A759-6A51-4108-AA02-DFA0A04FC94B}">
-              <ma14:wrappingTextBoxFlag xmlns:ma14="http://schemas.microsoft.com/office/mac/drawingml/2011/main" val="0"/>
-            </a:ext>
-          </a:extLst>
-        </p:spPr>
-        <p:txBody>
-          <a:bodyPr/>
-          <a:lstStyle>
-            <a:lvl1pPr>
-              <a:defRPr sz="800">
-                <a:solidFill>
-                  <a:srgbClr val="64748B"/>
-                </a:solidFill>
-                <a:latin typeface="Aptos"/>
-                <a:ea typeface="Aptos"/>
-                <a:cs typeface="Aptos"/>
-              </a:defRPr>
-            </a:lvl1pPr>
-          </a:lstStyle>
-          <a:p>
-            <a:pPr algn="r"/>
-            <a:fld id="{F7021451-1387-4CA6-816F-3879F97B5CBC}" type="slidenum">
-              <a:rPr b="0" lang="en-US"/>
-              <a:t>18</a:t>
+              <a:rPr lang="en-US" b="0"/>
+              <a:t>19</a:t>
             </a:fld>
             <a:endParaRPr lang="en-US"/>
           </a:p>
@@ -8367,7 +10258,7 @@
           </a:bodyPr>
           <a:lstStyle/>
           <a:p>
-            <a:pPr indent="0" marL="0">
+            <a:pPr marL="0" indent="0">
               <a:buNone/>
             </a:pPr>
             <a:r>
@@ -8408,7 +10299,7 @@
           </a:bodyPr>
           <a:lstStyle/>
           <a:p>
-            <a:pPr indent="0" marL="0">
+            <a:pPr marL="0" indent="0">
               <a:buNone/>
             </a:pPr>
             <a:r>
@@ -8546,6 +10437,13 @@
             <a:prstDash val="solid"/>
           </a:ln>
         </p:spPr>
+        <p:txBody>
+          <a:bodyPr/>
+          <a:lstStyle/>
+          <a:p>
+            <a:endParaRPr lang="en-US"/>
+          </a:p>
+        </p:txBody>
       </p:sp>
       <p:sp>
         <p:nvSpPr>
@@ -8571,6 +10469,13 @@
             <a:prstDash val="solid"/>
           </a:ln>
         </p:spPr>
+        <p:txBody>
+          <a:bodyPr/>
+          <a:lstStyle/>
+          <a:p>
+            <a:endParaRPr lang="en-US"/>
+          </a:p>
+        </p:txBody>
       </p:sp>
       <p:sp>
         <p:nvSpPr>
@@ -8595,7 +10500,7 @@
           </a:bodyPr>
           <a:lstStyle/>
           <a:p>
-            <a:pPr indent="0" marL="0">
+            <a:pPr marL="0" indent="0">
               <a:buNone/>
             </a:pPr>
             <a:r>
@@ -8636,7 +10541,7 @@
           </a:bodyPr>
           <a:lstStyle/>
           <a:p>
-            <a:pPr indent="0" marL="0">
+            <a:pPr marL="0" indent="0">
               <a:buNone/>
             </a:pPr>
             <a:r>
@@ -8678,6 +10583,13 @@
             <a:prstDash val="solid"/>
           </a:ln>
         </p:spPr>
+        <p:txBody>
+          <a:bodyPr/>
+          <a:lstStyle/>
+          <a:p>
+            <a:endParaRPr lang="en-US"/>
+          </a:p>
+        </p:txBody>
       </p:sp>
       <p:sp>
         <p:nvSpPr>
@@ -8703,6 +10615,13 @@
             <a:prstDash val="solid"/>
           </a:ln>
         </p:spPr>
+        <p:txBody>
+          <a:bodyPr/>
+          <a:lstStyle/>
+          <a:p>
+            <a:endParaRPr lang="en-US"/>
+          </a:p>
+        </p:txBody>
       </p:sp>
       <p:sp>
         <p:nvSpPr>
@@ -8727,7 +10646,7 @@
           </a:bodyPr>
           <a:lstStyle/>
           <a:p>
-            <a:pPr indent="0" marL="0">
+            <a:pPr marL="0" indent="0">
               <a:buNone/>
             </a:pPr>
             <a:r>
@@ -8768,7 +10687,7 @@
           </a:bodyPr>
           <a:lstStyle/>
           <a:p>
-            <a:pPr indent="0" marL="0">
+            <a:pPr marL="0" indent="0">
               <a:buNone/>
             </a:pPr>
             <a:r>
@@ -8810,6 +10729,13 @@
             <a:prstDash val="solid"/>
           </a:ln>
         </p:spPr>
+        <p:txBody>
+          <a:bodyPr/>
+          <a:lstStyle/>
+          <a:p>
+            <a:endParaRPr lang="en-US"/>
+          </a:p>
+        </p:txBody>
       </p:sp>
       <p:sp>
         <p:nvSpPr>
@@ -8835,6 +10761,13 @@
             <a:prstDash val="solid"/>
           </a:ln>
         </p:spPr>
+        <p:txBody>
+          <a:bodyPr/>
+          <a:lstStyle/>
+          <a:p>
+            <a:endParaRPr lang="en-US"/>
+          </a:p>
+        </p:txBody>
       </p:sp>
       <p:sp>
         <p:nvSpPr>
@@ -8859,7 +10792,7 @@
           </a:bodyPr>
           <a:lstStyle/>
           <a:p>
-            <a:pPr indent="0" marL="0">
+            <a:pPr marL="0" indent="0">
               <a:buNone/>
             </a:pPr>
             <a:r>
@@ -8900,7 +10833,7 @@
           </a:bodyPr>
           <a:lstStyle/>
           <a:p>
-            <a:pPr indent="0" marL="0">
+            <a:pPr marL="0" indent="0">
               <a:buNone/>
             </a:pPr>
             <a:r>
@@ -8938,7 +10871,7 @@
           </a:prstGeom>
           <a:extLst>
             <a:ext uri="{C572A759-6A51-4108-AA02-DFA0A04FC94B}">
-              <ma14:wrappingTextBoxFlag xmlns:ma14="http://schemas.microsoft.com/office/mac/drawingml/2011/main" val="0"/>
+              <ma14:wrappingTextBoxFlag xmlns:ma14="http://schemas.microsoft.com/office/mac/drawingml/2011/main" xmlns="" val="0"/>
             </a:ext>
           </a:extLst>
         </p:spPr>
@@ -8959,8 +10892,259 @@
           <a:p>
             <a:pPr algn="r"/>
             <a:fld id="{F7021451-1387-4CA6-816F-3879F97B5CBC}" type="slidenum">
-              <a:rPr b="0" lang="en-US"/>
+              <a:rPr lang="en-US" b="0"/>
               <a:t>2</a:t>
+            </a:fld>
+            <a:endParaRPr lang="en-US"/>
+          </a:p>
+        </p:txBody>
+      </p:sp>
+    </p:spTree>
+  </p:cSld>
+  <p:clrMapOvr>
+    <a:masterClrMapping/>
+  </p:clrMapOvr>
+</p:sld>
+</file>
+
+<file path=ppt/slides/slide20.xml><?xml version="1.0" encoding="utf-8"?>
+<p:sld xmlns:a="http://schemas.openxmlformats.org/drawingml/2006/main" xmlns:r="http://schemas.openxmlformats.org/officeDocument/2006/relationships" xmlns:p="http://schemas.openxmlformats.org/presentationml/2006/main">
+  <p:cSld name="Slide 18">
+    <p:spTree>
+      <p:nvGrpSpPr>
+        <p:cNvPr id="1" name=""/>
+        <p:cNvGrpSpPr/>
+        <p:nvPr/>
+      </p:nvGrpSpPr>
+      <p:grpSpPr>
+        <a:xfrm>
+          <a:off x="0" y="0"/>
+          <a:ext cx="0" cy="0"/>
+          <a:chOff x="0" y="0"/>
+          <a:chExt cx="0" cy="0"/>
+        </a:xfrm>
+      </p:grpSpPr>
+      <p:sp>
+        <p:nvSpPr>
+          <p:cNvPr id="2" name="Text 0"/>
+          <p:cNvSpPr/>
+          <p:nvPr/>
+        </p:nvSpPr>
+        <p:spPr>
+          <a:xfrm>
+            <a:off x="566928" y="310896"/>
+            <a:ext cx="11018520" cy="438912"/>
+          </a:xfrm>
+          <a:prstGeom prst="rect">
+            <a:avLst/>
+          </a:prstGeom>
+          <a:noFill/>
+          <a:ln/>
+        </p:spPr>
+        <p:txBody>
+          <a:bodyPr wrap="square" lIns="0" tIns="0" rIns="0" bIns="0" rtlCol="0" anchor="ctr">
+            <a:normAutofit/>
+          </a:bodyPr>
+          <a:lstStyle/>
+          <a:p>
+            <a:pPr marL="0" indent="0">
+              <a:buNone/>
+            </a:pPr>
+            <a:r>
+              <a:rPr lang="en-US" sz="2500" b="1" dirty="0">
+                <a:solidFill>
+                  <a:srgbClr val="17324D"/>
+                </a:solidFill>
+                <a:latin typeface="Aptos" pitchFamily="34" charset="0"/>
+                <a:ea typeface="Aptos" pitchFamily="34" charset="-122"/>
+                <a:cs typeface="Aptos" pitchFamily="34" charset="-120"/>
+              </a:rPr>
+              <a:t>References and instructor resources</a:t>
+            </a:r>
+            <a:endParaRPr lang="en-US" sz="2500" dirty="0"/>
+          </a:p>
+        </p:txBody>
+      </p:sp>
+      <p:sp>
+        <p:nvSpPr>
+          <p:cNvPr id="3" name="Text 1"/>
+          <p:cNvSpPr/>
+          <p:nvPr/>
+        </p:nvSpPr>
+        <p:spPr>
+          <a:xfrm>
+            <a:off x="585216" y="795528"/>
+            <a:ext cx="10744200" cy="292608"/>
+          </a:xfrm>
+          <a:prstGeom prst="rect">
+            <a:avLst/>
+          </a:prstGeom>
+          <a:noFill/>
+          <a:ln/>
+        </p:spPr>
+        <p:txBody>
+          <a:bodyPr wrap="square" lIns="0" tIns="0" rIns="0" bIns="0" rtlCol="0" anchor="ctr">
+            <a:normAutofit/>
+          </a:bodyPr>
+          <a:lstStyle/>
+          <a:p>
+            <a:pPr marL="0" indent="0">
+              <a:buNone/>
+            </a:pPr>
+            <a:r>
+              <a:rPr lang="en-US" sz="1150" dirty="0">
+                <a:solidFill>
+                  <a:srgbClr val="64748B"/>
+                </a:solidFill>
+                <a:latin typeface="Aptos" pitchFamily="34" charset="0"/>
+                <a:ea typeface="Aptos" pitchFamily="34" charset="-122"/>
+                <a:cs typeface="Aptos" pitchFamily="34" charset="-120"/>
+              </a:rPr>
+              <a:t>Week 7 • Lecture 13</a:t>
+            </a:r>
+            <a:endParaRPr lang="en-US" sz="1150" dirty="0"/>
+          </a:p>
+        </p:txBody>
+      </p:sp>
+      <p:sp>
+        <p:nvSpPr>
+          <p:cNvPr id="4" name="Text 2"/>
+          <p:cNvSpPr/>
+          <p:nvPr/>
+        </p:nvSpPr>
+        <p:spPr>
+          <a:xfrm>
+            <a:off x="914400" y="1417320"/>
+            <a:ext cx="9875520" cy="3017520"/>
+          </a:xfrm>
+          <a:prstGeom prst="rect">
+            <a:avLst/>
+          </a:prstGeom>
+          <a:noFill/>
+          <a:ln/>
+        </p:spPr>
+        <p:txBody>
+          <a:bodyPr wrap="square" lIns="635" tIns="635" rIns="635" bIns="635" rtlCol="0" anchor="ctr">
+            <a:normAutofit/>
+          </a:bodyPr>
+          <a:lstStyle/>
+          <a:p>
+            <a:pPr marL="228600" indent="-228600">
+              <a:buSzPct val="100000"/>
+              <a:buChar char="•"/>
+            </a:pPr>
+            <a:r>
+              <a:rPr lang="en-US" sz="1600" dirty="0">
+                <a:solidFill>
+                  <a:srgbClr val="1F2937"/>
+                </a:solidFill>
+                <a:latin typeface="Aptos" pitchFamily="34" charset="0"/>
+                <a:ea typeface="Aptos" pitchFamily="34" charset="-122"/>
+                <a:cs typeface="Aptos" pitchFamily="34" charset="-120"/>
+              </a:rPr>
+              <a:t>Oppenheim &amp; Schafer, Discrete-Time Signal Processing, §4.7: polyphase structures and multirate implementations.</a:t>
+            </a:r>
+            <a:endParaRPr lang="en-US" sz="1600" dirty="0"/>
+          </a:p>
+          <a:p>
+            <a:pPr marL="228600" indent="-228600">
+              <a:buSzPct val="100000"/>
+              <a:buChar char="•"/>
+            </a:pPr>
+            <a:r>
+              <a:rPr lang="en-US" sz="1600" dirty="0">
+                <a:solidFill>
+                  <a:srgbClr val="1F2937"/>
+                </a:solidFill>
+                <a:latin typeface="Aptos" pitchFamily="34" charset="0"/>
+                <a:ea typeface="Aptos" pitchFamily="34" charset="-122"/>
+                <a:cs typeface="Aptos" pitchFamily="34" charset="-120"/>
+              </a:rPr>
+              <a:t>Raschka et al., Machine Learning with PyTorch and Scikit-Learn: convolutional neural-network architectures.</a:t>
+            </a:r>
+            <a:endParaRPr lang="en-US" sz="1600" dirty="0"/>
+          </a:p>
+          <a:p>
+            <a:pPr marL="228600" indent="-228600">
+              <a:buSzPct val="100000"/>
+              <a:buChar char="•"/>
+            </a:pPr>
+            <a:r>
+              <a:rPr lang="en-US" sz="1600" dirty="0">
+                <a:solidFill>
+                  <a:srgbClr val="1F2937"/>
+                </a:solidFill>
+                <a:latin typeface="Aptos" pitchFamily="34" charset="0"/>
+                <a:ea typeface="Aptos" pitchFamily="34" charset="-122"/>
+                <a:cs typeface="Aptos" pitchFamily="34" charset="-120"/>
+              </a:rPr>
+              <a:t>Accompanying notebook: Week7_Polyphase_DSP_ML_Demos.ipynb.</a:t>
+            </a:r>
+            <a:endParaRPr lang="en-US" sz="1600" dirty="0"/>
+          </a:p>
+          <a:p>
+            <a:pPr marL="228600" indent="-228600">
+              <a:buSzPct val="100000"/>
+              <a:buChar char="•"/>
+            </a:pPr>
+            <a:r>
+              <a:rPr lang="en-US" sz="1600" dirty="0">
+                <a:solidFill>
+                  <a:srgbClr val="1F2937"/>
+                </a:solidFill>
+                <a:latin typeface="Aptos" pitchFamily="34" charset="0"/>
+                <a:ea typeface="Aptos" pitchFamily="34" charset="-122"/>
+                <a:cs typeface="Aptos" pitchFamily="34" charset="-120"/>
+              </a:rPr>
+              <a:t>Homework and weekly quiz: Week7_Polyphase_Homework_Quiz_Solutions.docx.</a:t>
+            </a:r>
+            <a:endParaRPr lang="en-US" sz="1600" dirty="0"/>
+          </a:p>
+        </p:txBody>
+      </p:sp>
+      <p:sp>
+        <p:nvSpPr>
+          <p:cNvPr id="25" name="Slide Number Placeholder 0"/>
+          <p:cNvSpPr>
+            <a:spLocks noGrp="1"/>
+          </p:cNvSpPr>
+          <p:nvPr>
+            <p:ph type="sldNum" sz="quarter" idx="4294967295"/>
+          </p:nvPr>
+        </p:nvSpPr>
+        <p:spPr>
+          <a:xfrm>
+            <a:off x="11750040" y="6519672"/>
+            <a:ext cx="201168" cy="164592"/>
+          </a:xfrm>
+          <a:prstGeom prst="rect">
+            <a:avLst/>
+          </a:prstGeom>
+          <a:extLst>
+            <a:ext uri="{C572A759-6A51-4108-AA02-DFA0A04FC94B}">
+              <ma14:wrappingTextBoxFlag xmlns:ma14="http://schemas.microsoft.com/office/mac/drawingml/2011/main" xmlns="" val="0"/>
+            </a:ext>
+          </a:extLst>
+        </p:spPr>
+        <p:txBody>
+          <a:bodyPr/>
+          <a:lstStyle>
+            <a:lvl1pPr>
+              <a:defRPr sz="800">
+                <a:solidFill>
+                  <a:srgbClr val="64748B"/>
+                </a:solidFill>
+                <a:latin typeface="Aptos"/>
+                <a:ea typeface="Aptos"/>
+                <a:cs typeface="Aptos"/>
+              </a:defRPr>
+            </a:lvl1pPr>
+          </a:lstStyle>
+          <a:p>
+            <a:pPr algn="r"/>
+            <a:fld id="{F7021451-1387-4CA6-816F-3879F97B5CBC}" type="slidenum">
+              <a:rPr lang="en-US" b="0"/>
+              <a:t>20</a:t>
             </a:fld>
             <a:endParaRPr lang="en-US"/>
           </a:p>
@@ -8982,6 +11166,7 @@
         <a:solidFill>
           <a:srgbClr val="17324D"/>
         </a:solidFill>
+        <a:effectLst/>
       </p:bgPr>
     </p:bg>
     <p:spTree>
@@ -9019,7 +11204,7 @@
           <a:bodyPr wrap="square" lIns="0" tIns="0" rIns="0" bIns="0" rtlCol="0" anchor="ctr"/>
           <a:lstStyle/>
           <a:p>
-            <a:pPr indent="0" marL="0">
+            <a:pPr marL="0" indent="0">
               <a:buNone/>
             </a:pPr>
             <a:r>
@@ -9060,7 +11245,7 @@
           </a:bodyPr>
           <a:lstStyle/>
           <a:p>
-            <a:pPr indent="0" marL="0">
+            <a:pPr marL="0" indent="0">
               <a:buNone/>
             </a:pPr>
             <a:r>
@@ -9099,7 +11284,7 @@
           <a:bodyPr wrap="square" lIns="0" tIns="0" rIns="0" bIns="0" rtlCol="0" anchor="ctr"/>
           <a:lstStyle/>
           <a:p>
-            <a:pPr indent="0" marL="0">
+            <a:pPr marL="0" indent="0">
               <a:buNone/>
             </a:pPr>
             <a:r>
@@ -9137,7 +11322,7 @@
           </a:prstGeom>
           <a:extLst>
             <a:ext uri="{C572A759-6A51-4108-AA02-DFA0A04FC94B}">
-              <ma14:wrappingTextBoxFlag xmlns:ma14="http://schemas.microsoft.com/office/mac/drawingml/2011/main" val="0"/>
+              <ma14:wrappingTextBoxFlag xmlns:ma14="http://schemas.microsoft.com/office/mac/drawingml/2011/main" xmlns="" val="0"/>
             </a:ext>
           </a:extLst>
         </p:spPr>
@@ -9158,7 +11343,7 @@
           <a:p>
             <a:pPr algn="r"/>
             <a:fld id="{F7021451-1387-4CA6-816F-3879F97B5CBC}" type="slidenum">
-              <a:rPr b="0" lang="en-US"/>
+              <a:rPr lang="en-US" b="0"/>
               <a:t>3</a:t>
             </a:fld>
             <a:endParaRPr lang="en-US"/>
@@ -9213,7 +11398,7 @@
           </a:bodyPr>
           <a:lstStyle/>
           <a:p>
-            <a:pPr indent="0" marL="0">
+            <a:pPr marL="0" indent="0">
               <a:buNone/>
             </a:pPr>
             <a:r>
@@ -9254,7 +11439,7 @@
           </a:bodyPr>
           <a:lstStyle/>
           <a:p>
-            <a:pPr indent="0" marL="0">
+            <a:pPr marL="0" indent="0">
               <a:buNone/>
             </a:pPr>
             <a:r>
@@ -9296,6 +11481,13 @@
             <a:prstDash val="solid"/>
           </a:ln>
         </p:spPr>
+        <p:txBody>
+          <a:bodyPr/>
+          <a:lstStyle/>
+          <a:p>
+            <a:endParaRPr lang="en-US"/>
+          </a:p>
+        </p:txBody>
       </p:sp>
       <p:sp>
         <p:nvSpPr>
@@ -9320,7 +11512,7 @@
           </a:bodyPr>
           <a:lstStyle/>
           <a:p>
-            <a:pPr algn="ctr" indent="0" marL="0">
+            <a:pPr marL="0" indent="0" algn="ctr">
               <a:buNone/>
             </a:pPr>
             <a:r>
@@ -9362,6 +11554,13 @@
             <a:prstDash val="solid"/>
           </a:ln>
         </p:spPr>
+        <p:txBody>
+          <a:bodyPr/>
+          <a:lstStyle/>
+          <a:p>
+            <a:endParaRPr lang="en-US"/>
+          </a:p>
+        </p:txBody>
       </p:sp>
       <p:sp>
         <p:nvSpPr>
@@ -9386,7 +11585,7 @@
           </a:bodyPr>
           <a:lstStyle/>
           <a:p>
-            <a:pPr algn="ctr" indent="0" marL="0">
+            <a:pPr marL="0" indent="0" algn="ctr">
               <a:buNone/>
             </a:pPr>
             <a:r>
@@ -9406,14 +11605,14 @@
       </p:sp>
       <p:pic>
         <p:nvPicPr>
-          <p:cNvPr id="8" name="Image 0" descr="/mnt/data/week7_polyphase/assets/polyphase_decomposition.png">    </p:cNvPr>
+          <p:cNvPr id="8" name="Image 0" descr="/mnt/data/week7_polyphase/assets/polyphase_decomposition.png"/>
           <p:cNvPicPr>
             <a:picLocks noChangeAspect="1"/>
           </p:cNvPicPr>
           <p:nvPr/>
         </p:nvPicPr>
         <p:blipFill>
-          <a:blip r:embed="rId1"/>
+          <a:blip r:embed="rId3"/>
           <a:stretch>
             <a:fillRect/>
           </a:stretch>
@@ -9452,6 +11651,13 @@
             <a:prstDash val="solid"/>
           </a:ln>
         </p:spPr>
+        <p:txBody>
+          <a:bodyPr/>
+          <a:lstStyle/>
+          <a:p>
+            <a:endParaRPr lang="en-US"/>
+          </a:p>
+        </p:txBody>
       </p:sp>
       <p:sp>
         <p:nvSpPr>
@@ -9477,6 +11683,13 @@
             <a:prstDash val="solid"/>
           </a:ln>
         </p:spPr>
+        <p:txBody>
+          <a:bodyPr/>
+          <a:lstStyle/>
+          <a:p>
+            <a:endParaRPr lang="en-US"/>
+          </a:p>
+        </p:txBody>
       </p:sp>
       <p:sp>
         <p:nvSpPr>
@@ -9501,7 +11714,7 @@
           </a:bodyPr>
           <a:lstStyle/>
           <a:p>
-            <a:pPr indent="0" marL="0">
+            <a:pPr marL="0" indent="0">
               <a:buNone/>
             </a:pPr>
             <a:r>
@@ -9542,7 +11755,7 @@
           </a:bodyPr>
           <a:lstStyle/>
           <a:p>
-            <a:pPr indent="0" marL="0">
+            <a:pPr marL="0" indent="0">
               <a:buNone/>
             </a:pPr>
             <a:r>
@@ -9584,6 +11797,13 @@
             <a:prstDash val="solid"/>
           </a:ln>
         </p:spPr>
+        <p:txBody>
+          <a:bodyPr/>
+          <a:lstStyle/>
+          <a:p>
+            <a:endParaRPr lang="en-US"/>
+          </a:p>
+        </p:txBody>
       </p:sp>
       <p:sp>
         <p:nvSpPr>
@@ -9609,6 +11829,13 @@
             <a:prstDash val="solid"/>
           </a:ln>
         </p:spPr>
+        <p:txBody>
+          <a:bodyPr/>
+          <a:lstStyle/>
+          <a:p>
+            <a:endParaRPr lang="en-US"/>
+          </a:p>
+        </p:txBody>
       </p:sp>
       <p:sp>
         <p:nvSpPr>
@@ -9633,7 +11860,7 @@
           </a:bodyPr>
           <a:lstStyle/>
           <a:p>
-            <a:pPr indent="0" marL="0">
+            <a:pPr marL="0" indent="0">
               <a:buNone/>
             </a:pPr>
             <a:r>
@@ -9674,7 +11901,7 @@
           </a:bodyPr>
           <a:lstStyle/>
           <a:p>
-            <a:pPr indent="0" marL="0">
+            <a:pPr marL="0" indent="0">
               <a:buNone/>
             </a:pPr>
             <a:r>
@@ -9712,7 +11939,7 @@
           </a:prstGeom>
           <a:extLst>
             <a:ext uri="{C572A759-6A51-4108-AA02-DFA0A04FC94B}">
-              <ma14:wrappingTextBoxFlag xmlns:ma14="http://schemas.microsoft.com/office/mac/drawingml/2011/main" val="0"/>
+              <ma14:wrappingTextBoxFlag xmlns:ma14="http://schemas.microsoft.com/office/mac/drawingml/2011/main" xmlns="" val="0"/>
             </a:ext>
           </a:extLst>
         </p:spPr>
@@ -9733,7 +11960,7 @@
           <a:p>
             <a:pPr algn="r"/>
             <a:fld id="{F7021451-1387-4CA6-816F-3879F97B5CBC}" type="slidenum">
-              <a:rPr b="0" lang="en-US"/>
+              <a:rPr lang="en-US" b="0"/>
               <a:t>4</a:t>
             </a:fld>
             <a:endParaRPr lang="en-US"/>
@@ -9788,7 +12015,7 @@
           </a:bodyPr>
           <a:lstStyle/>
           <a:p>
-            <a:pPr indent="0" marL="0">
+            <a:pPr marL="0" indent="0">
               <a:buNone/>
             </a:pPr>
             <a:r>
@@ -9829,7 +12056,7 @@
           </a:bodyPr>
           <a:lstStyle/>
           <a:p>
-            <a:pPr indent="0" marL="0">
+            <a:pPr marL="0" indent="0">
               <a:buNone/>
             </a:pPr>
             <a:r>
@@ -9871,6 +12098,13 @@
             <a:prstDash val="solid"/>
           </a:ln>
         </p:spPr>
+        <p:txBody>
+          <a:bodyPr/>
+          <a:lstStyle/>
+          <a:p>
+            <a:endParaRPr lang="en-US"/>
+          </a:p>
+        </p:txBody>
       </p:sp>
       <p:sp>
         <p:nvSpPr>
@@ -9895,7 +12129,7 @@
           </a:bodyPr>
           <a:lstStyle/>
           <a:p>
-            <a:pPr algn="ctr" indent="0" marL="0">
+            <a:pPr marL="0" indent="0" algn="ctr">
               <a:buNone/>
             </a:pPr>
             <a:r>
@@ -9937,6 +12171,13 @@
             <a:prstDash val="solid"/>
           </a:ln>
         </p:spPr>
+        <p:txBody>
+          <a:bodyPr/>
+          <a:lstStyle/>
+          <a:p>
+            <a:endParaRPr lang="en-US"/>
+          </a:p>
+        </p:txBody>
       </p:sp>
       <p:sp>
         <p:nvSpPr>
@@ -9961,7 +12202,7 @@
           </a:bodyPr>
           <a:lstStyle/>
           <a:p>
-            <a:pPr algn="ctr" indent="0" marL="0">
+            <a:pPr marL="0" indent="0" algn="ctr">
               <a:buNone/>
             </a:pPr>
             <a:r>
@@ -10081,6 +12322,13 @@
             <a:prstDash val="solid"/>
           </a:ln>
         </p:spPr>
+        <p:txBody>
+          <a:bodyPr/>
+          <a:lstStyle/>
+          <a:p>
+            <a:endParaRPr lang="en-US"/>
+          </a:p>
+        </p:txBody>
       </p:sp>
       <p:sp>
         <p:nvSpPr>
@@ -10106,6 +12354,13 @@
             <a:prstDash val="solid"/>
           </a:ln>
         </p:spPr>
+        <p:txBody>
+          <a:bodyPr/>
+          <a:lstStyle/>
+          <a:p>
+            <a:endParaRPr lang="en-US"/>
+          </a:p>
+        </p:txBody>
       </p:sp>
       <p:sp>
         <p:nvSpPr>
@@ -10130,7 +12385,7 @@
           </a:bodyPr>
           <a:lstStyle/>
           <a:p>
-            <a:pPr indent="0" marL="0">
+            <a:pPr marL="0" indent="0">
               <a:buNone/>
             </a:pPr>
             <a:r>
@@ -10167,11 +12422,11 @@
         </p:spPr>
         <p:txBody>
           <a:bodyPr wrap="square" lIns="0" tIns="0" rIns="0" bIns="0" rtlCol="0" anchor="t">
-            <a:normAutofit/>
+            <a:normAutofit fontScale="47500" lnSpcReduction="20000"/>
           </a:bodyPr>
           <a:lstStyle/>
           <a:p>
-            <a:pPr indent="0" marL="0">
+            <a:pPr marL="0" indent="0">
               <a:buNone/>
             </a:pPr>
             <a:r>
@@ -10209,7 +12464,7 @@
           </a:prstGeom>
           <a:extLst>
             <a:ext uri="{C572A759-6A51-4108-AA02-DFA0A04FC94B}">
-              <ma14:wrappingTextBoxFlag xmlns:ma14="http://schemas.microsoft.com/office/mac/drawingml/2011/main" val="0"/>
+              <ma14:wrappingTextBoxFlag xmlns:ma14="http://schemas.microsoft.com/office/mac/drawingml/2011/main" xmlns="" val="0"/>
             </a:ext>
           </a:extLst>
         </p:spPr>
@@ -10230,7 +12485,7 @@
           <a:p>
             <a:pPr algn="r"/>
             <a:fld id="{F7021451-1387-4CA6-816F-3879F97B5CBC}" type="slidenum">
-              <a:rPr b="0" lang="en-US"/>
+              <a:rPr lang="en-US" b="0"/>
               <a:t>5</a:t>
             </a:fld>
             <a:endParaRPr lang="en-US"/>
@@ -10286,6 +12541,13 @@
             <a:prstDash val="solid"/>
           </a:ln>
         </p:spPr>
+        <p:txBody>
+          <a:bodyPr/>
+          <a:lstStyle/>
+          <a:p>
+            <a:endParaRPr lang="en-US"/>
+          </a:p>
+        </p:txBody>
       </p:sp>
       <p:sp>
         <p:nvSpPr>
@@ -10308,7 +12570,7 @@
           <a:bodyPr wrap="square" lIns="0" tIns="0" rIns="0" bIns="0" rtlCol="0" anchor="ctr"/>
           <a:lstStyle/>
           <a:p>
-            <a:pPr indent="0" marL="0">
+            <a:pPr marL="0" indent="0">
               <a:buNone/>
             </a:pPr>
             <a:r>
@@ -10349,7 +12611,7 @@
           </a:bodyPr>
           <a:lstStyle/>
           <a:p>
-            <a:pPr indent="0" marL="0">
+            <a:pPr marL="0" indent="0">
               <a:buNone/>
             </a:pPr>
             <a:r>
@@ -10364,86 +12626,6 @@
               <a:t>For M = 4, which FIR taps belong to phase E₂?</a:t>
             </a:r>
             <a:endParaRPr lang="en-US" sz="2300" dirty="0"/>
-          </a:p>
-        </p:txBody>
-      </p:sp>
-      <p:sp>
-        <p:nvSpPr>
-          <p:cNvPr id="5" name="Text 3"/>
-          <p:cNvSpPr/>
-          <p:nvPr/>
-        </p:nvSpPr>
-        <p:spPr>
-          <a:xfrm>
-            <a:off x="1078992" y="3767328"/>
-            <a:ext cx="1188720" cy="228600"/>
-          </a:xfrm>
-          <a:prstGeom prst="rect">
-            <a:avLst/>
-          </a:prstGeom>
-          <a:noFill/>
-          <a:ln/>
-        </p:spPr>
-        <p:txBody>
-          <a:bodyPr wrap="square" lIns="0" tIns="0" rIns="0" bIns="0" rtlCol="0" anchor="ctr"/>
-          <a:lstStyle/>
-          <a:p>
-            <a:pPr indent="0" marL="0">
-              <a:buNone/>
-            </a:pPr>
-            <a:r>
-              <a:rPr lang="en-US" sz="1100" b="1" dirty="0">
-                <a:solidFill>
-                  <a:srgbClr val="2F855A"/>
-                </a:solidFill>
-                <a:latin typeface="Aptos" pitchFamily="34" charset="0"/>
-                <a:ea typeface="Aptos" pitchFamily="34" charset="-122"/>
-                <a:cs typeface="Aptos" pitchFamily="34" charset="-120"/>
-              </a:rPr>
-              <a:t>Good answer</a:t>
-            </a:r>
-            <a:endParaRPr lang="en-US" sz="1100" dirty="0"/>
-          </a:p>
-        </p:txBody>
-      </p:sp>
-      <p:sp>
-        <p:nvSpPr>
-          <p:cNvPr id="6" name="Text 4"/>
-          <p:cNvSpPr/>
-          <p:nvPr/>
-        </p:nvSpPr>
-        <p:spPr>
-          <a:xfrm>
-            <a:off x="1078992" y="4096512"/>
-            <a:ext cx="9784080" cy="1280160"/>
-          </a:xfrm>
-          <a:prstGeom prst="rect">
-            <a:avLst/>
-          </a:prstGeom>
-          <a:noFill/>
-          <a:ln/>
-        </p:spPr>
-        <p:txBody>
-          <a:bodyPr wrap="square" lIns="0" tIns="0" rIns="0" bIns="0" rtlCol="0" anchor="ctr">
-            <a:normAutofit/>
-          </a:bodyPr>
-          <a:lstStyle/>
-          <a:p>
-            <a:pPr indent="0" marL="0">
-              <a:buNone/>
-            </a:pPr>
-            <a:r>
-              <a:rPr lang="en-US" sz="1700" dirty="0">
-                <a:solidFill>
-                  <a:srgbClr val="1F2937"/>
-                </a:solidFill>
-                <a:latin typeface="Aptos" pitchFamily="34" charset="0"/>
-                <a:ea typeface="Aptos" pitchFamily="34" charset="-122"/>
-                <a:cs typeface="Aptos" pitchFamily="34" charset="-120"/>
-              </a:rPr>
-              <a:t>Tap indices n = 2, 6, 10, 14, … because they satisfy n = 4r + 2. Equivalently, e₂[r] = h[4r+2].</a:t>
-            </a:r>
-            <a:endParaRPr lang="en-US" sz="1700" dirty="0"/>
           </a:p>
         </p:txBody>
       </p:sp>
@@ -10467,7 +12649,7 @@
           </a:prstGeom>
           <a:extLst>
             <a:ext uri="{C572A759-6A51-4108-AA02-DFA0A04FC94B}">
-              <ma14:wrappingTextBoxFlag xmlns:ma14="http://schemas.microsoft.com/office/mac/drawingml/2011/main" val="0"/>
+              <ma14:wrappingTextBoxFlag xmlns:ma14="http://schemas.microsoft.com/office/mac/drawingml/2011/main" xmlns="" val="0"/>
             </a:ext>
           </a:extLst>
         </p:spPr>
@@ -10488,7 +12670,7 @@
           <a:p>
             <a:pPr algn="r"/>
             <a:fld id="{F7021451-1387-4CA6-816F-3879F97B5CBC}" type="slidenum">
-              <a:rPr b="0" lang="en-US"/>
+              <a:rPr lang="en-US" b="0"/>
               <a:t>6</a:t>
             </a:fld>
             <a:endParaRPr lang="en-US"/>
@@ -10505,12 +12687,325 @@
 
 <file path=ppt/slides/slide7.xml><?xml version="1.0" encoding="utf-8"?>
 <p:sld xmlns:a="http://schemas.openxmlformats.org/drawingml/2006/main" xmlns:r="http://schemas.openxmlformats.org/officeDocument/2006/relationships" xmlns:p="http://schemas.openxmlformats.org/presentationml/2006/main">
+  <p:cSld>
+    <p:spTree>
+      <p:nvGrpSpPr>
+        <p:cNvPr id="1" name="">
+          <a:extLst>
+            <a:ext uri="{FF2B5EF4-FFF2-40B4-BE49-F238E27FC236}">
+              <a16:creationId xmlns:a16="http://schemas.microsoft.com/office/drawing/2014/main" id="{06700152-F3F5-4A40-4385-C07EC980AC28}"/>
+            </a:ext>
+          </a:extLst>
+        </p:cNvPr>
+        <p:cNvGrpSpPr/>
+        <p:nvPr/>
+      </p:nvGrpSpPr>
+      <p:grpSpPr>
+        <a:xfrm>
+          <a:off x="0" y="0"/>
+          <a:ext cx="0" cy="0"/>
+          <a:chOff x="0" y="0"/>
+          <a:chExt cx="0" cy="0"/>
+        </a:xfrm>
+      </p:grpSpPr>
+      <p:sp>
+        <p:nvSpPr>
+          <p:cNvPr id="2" name="Shape 0">
+            <a:extLst>
+              <a:ext uri="{FF2B5EF4-FFF2-40B4-BE49-F238E27FC236}">
+                <a16:creationId xmlns:a16="http://schemas.microsoft.com/office/drawing/2014/main" id="{0A9334B8-4565-A8B3-CFCA-1D8199E6EB6E}"/>
+              </a:ext>
+            </a:extLst>
+          </p:cNvPr>
+          <p:cNvSpPr/>
+          <p:nvPr/>
+        </p:nvSpPr>
+        <p:spPr>
+          <a:xfrm>
+            <a:off x="822960" y="1417320"/>
+            <a:ext cx="10561320" cy="1874520"/>
+          </a:xfrm>
+          <a:prstGeom prst="roundRect">
+            <a:avLst/>
+          </a:prstGeom>
+          <a:solidFill>
+            <a:srgbClr val="FFF7ED"/>
+          </a:solidFill>
+          <a:ln w="15240">
+            <a:solidFill>
+              <a:srgbClr val="FED7AA"/>
+            </a:solidFill>
+            <a:prstDash val="solid"/>
+          </a:ln>
+        </p:spPr>
+        <p:txBody>
+          <a:bodyPr/>
+          <a:lstStyle/>
+          <a:p>
+            <a:endParaRPr lang="en-US"/>
+          </a:p>
+        </p:txBody>
+      </p:sp>
+      <p:sp>
+        <p:nvSpPr>
+          <p:cNvPr id="3" name="Text 1">
+            <a:extLst>
+              <a:ext uri="{FF2B5EF4-FFF2-40B4-BE49-F238E27FC236}">
+                <a16:creationId xmlns:a16="http://schemas.microsoft.com/office/drawing/2014/main" id="{0827AA03-6DF7-98FD-EF28-8BDC2AB64B74}"/>
+              </a:ext>
+            </a:extLst>
+          </p:cNvPr>
+          <p:cNvSpPr/>
+          <p:nvPr/>
+        </p:nvSpPr>
+        <p:spPr>
+          <a:xfrm>
+            <a:off x="1078992" y="1664208"/>
+            <a:ext cx="2011680" cy="274320"/>
+          </a:xfrm>
+          <a:prstGeom prst="rect">
+            <a:avLst/>
+          </a:prstGeom>
+          <a:noFill/>
+          <a:ln/>
+        </p:spPr>
+        <p:txBody>
+          <a:bodyPr wrap="square" lIns="0" tIns="0" rIns="0" bIns="0" rtlCol="0" anchor="ctr"/>
+          <a:lstStyle/>
+          <a:p>
+            <a:pPr marL="0" indent="0">
+              <a:buNone/>
+            </a:pPr>
+            <a:r>
+              <a:rPr lang="en-US" sz="1200" b="1" dirty="0">
+                <a:solidFill>
+                  <a:srgbClr val="D97706"/>
+                </a:solidFill>
+                <a:latin typeface="Aptos" pitchFamily="34" charset="0"/>
+                <a:ea typeface="Aptos" pitchFamily="34" charset="-122"/>
+                <a:cs typeface="Aptos" pitchFamily="34" charset="-120"/>
+              </a:rPr>
+              <a:t>CONCEPT CHECK</a:t>
+            </a:r>
+            <a:endParaRPr lang="en-US" sz="1200" dirty="0"/>
+          </a:p>
+        </p:txBody>
+      </p:sp>
+      <p:sp>
+        <p:nvSpPr>
+          <p:cNvPr id="4" name="Text 2">
+            <a:extLst>
+              <a:ext uri="{FF2B5EF4-FFF2-40B4-BE49-F238E27FC236}">
+                <a16:creationId xmlns:a16="http://schemas.microsoft.com/office/drawing/2014/main" id="{C55EE5DA-BA03-FB73-76A5-1D57B88F3C9C}"/>
+              </a:ext>
+            </a:extLst>
+          </p:cNvPr>
+          <p:cNvSpPr/>
+          <p:nvPr/>
+        </p:nvSpPr>
+        <p:spPr>
+          <a:xfrm>
+            <a:off x="1078992" y="2084832"/>
+            <a:ext cx="9966960" cy="868680"/>
+          </a:xfrm>
+          <a:prstGeom prst="rect">
+            <a:avLst/>
+          </a:prstGeom>
+          <a:noFill/>
+          <a:ln/>
+        </p:spPr>
+        <p:txBody>
+          <a:bodyPr wrap="square" lIns="0" tIns="0" rIns="0" bIns="0" rtlCol="0" anchor="ctr">
+            <a:normAutofit/>
+          </a:bodyPr>
+          <a:lstStyle/>
+          <a:p>
+            <a:pPr marL="0" indent="0">
+              <a:buNone/>
+            </a:pPr>
+            <a:r>
+              <a:rPr lang="en-US" sz="2300" b="1" dirty="0">
+                <a:solidFill>
+                  <a:srgbClr val="17324D"/>
+                </a:solidFill>
+                <a:latin typeface="Aptos" pitchFamily="34" charset="0"/>
+                <a:ea typeface="Aptos" pitchFamily="34" charset="-122"/>
+                <a:cs typeface="Aptos" pitchFamily="34" charset="-120"/>
+              </a:rPr>
+              <a:t>For M = 4, which FIR taps belong to phase E₂?</a:t>
+            </a:r>
+            <a:endParaRPr lang="en-US" sz="2300" dirty="0"/>
+          </a:p>
+        </p:txBody>
+      </p:sp>
+      <p:sp>
+        <p:nvSpPr>
+          <p:cNvPr id="5" name="Text 3">
+            <a:extLst>
+              <a:ext uri="{FF2B5EF4-FFF2-40B4-BE49-F238E27FC236}">
+                <a16:creationId xmlns:a16="http://schemas.microsoft.com/office/drawing/2014/main" id="{342FDE33-3604-6829-A7BB-E28138B0C22B}"/>
+              </a:ext>
+            </a:extLst>
+          </p:cNvPr>
+          <p:cNvSpPr/>
+          <p:nvPr/>
+        </p:nvSpPr>
+        <p:spPr>
+          <a:xfrm>
+            <a:off x="1078992" y="3767328"/>
+            <a:ext cx="1188720" cy="228600"/>
+          </a:xfrm>
+          <a:prstGeom prst="rect">
+            <a:avLst/>
+          </a:prstGeom>
+          <a:noFill/>
+          <a:ln/>
+        </p:spPr>
+        <p:txBody>
+          <a:bodyPr wrap="square" lIns="0" tIns="0" rIns="0" bIns="0" rtlCol="0" anchor="ctr"/>
+          <a:lstStyle/>
+          <a:p>
+            <a:pPr marL="0" indent="0">
+              <a:buNone/>
+            </a:pPr>
+            <a:r>
+              <a:rPr lang="en-US" sz="1100" b="1" dirty="0">
+                <a:solidFill>
+                  <a:srgbClr val="2F855A"/>
+                </a:solidFill>
+                <a:latin typeface="Aptos" pitchFamily="34" charset="0"/>
+                <a:ea typeface="Aptos" pitchFamily="34" charset="-122"/>
+                <a:cs typeface="Aptos" pitchFamily="34" charset="-120"/>
+              </a:rPr>
+              <a:t>Good answer</a:t>
+            </a:r>
+            <a:endParaRPr lang="en-US" sz="1100" dirty="0"/>
+          </a:p>
+        </p:txBody>
+      </p:sp>
+      <p:sp>
+        <p:nvSpPr>
+          <p:cNvPr id="6" name="Text 4">
+            <a:extLst>
+              <a:ext uri="{FF2B5EF4-FFF2-40B4-BE49-F238E27FC236}">
+                <a16:creationId xmlns:a16="http://schemas.microsoft.com/office/drawing/2014/main" id="{C27F8516-1624-59C6-8C3A-060901F36B8C}"/>
+              </a:ext>
+            </a:extLst>
+          </p:cNvPr>
+          <p:cNvSpPr/>
+          <p:nvPr/>
+        </p:nvSpPr>
+        <p:spPr>
+          <a:xfrm>
+            <a:off x="1078992" y="4096512"/>
+            <a:ext cx="9784080" cy="1280160"/>
+          </a:xfrm>
+          <a:prstGeom prst="rect">
+            <a:avLst/>
+          </a:prstGeom>
+          <a:noFill/>
+          <a:ln/>
+        </p:spPr>
+        <p:txBody>
+          <a:bodyPr wrap="square" lIns="0" tIns="0" rIns="0" bIns="0" rtlCol="0" anchor="ctr">
+            <a:normAutofit/>
+          </a:bodyPr>
+          <a:lstStyle/>
+          <a:p>
+            <a:pPr marL="0" indent="0">
+              <a:buNone/>
+            </a:pPr>
+            <a:r>
+              <a:rPr lang="en-US" sz="1700" dirty="0">
+                <a:solidFill>
+                  <a:srgbClr val="1F2937"/>
+                </a:solidFill>
+                <a:latin typeface="Aptos" pitchFamily="34" charset="0"/>
+                <a:ea typeface="Aptos" pitchFamily="34" charset="-122"/>
+                <a:cs typeface="Aptos" pitchFamily="34" charset="-120"/>
+              </a:rPr>
+              <a:t>Tap indices n = 2, 6, 10, 14, … because they satisfy n = 4r + 2. Equivalently, e₂[r] = h[4r+2].</a:t>
+            </a:r>
+            <a:endParaRPr lang="en-US" sz="1700" dirty="0"/>
+          </a:p>
+        </p:txBody>
+      </p:sp>
+      <p:sp>
+        <p:nvSpPr>
+          <p:cNvPr id="25" name="Slide Number Placeholder 0">
+            <a:extLst>
+              <a:ext uri="{FF2B5EF4-FFF2-40B4-BE49-F238E27FC236}">
+                <a16:creationId xmlns:a16="http://schemas.microsoft.com/office/drawing/2014/main" id="{5FE12A81-8F42-4BFF-1933-31765E9421DC}"/>
+              </a:ext>
+            </a:extLst>
+          </p:cNvPr>
+          <p:cNvSpPr>
+            <a:spLocks noGrp="1"/>
+          </p:cNvSpPr>
+          <p:nvPr>
+            <p:ph type="sldNum" sz="quarter" idx="4294967295"/>
+          </p:nvPr>
+        </p:nvSpPr>
+        <p:spPr>
+          <a:xfrm>
+            <a:off x="11750040" y="6519672"/>
+            <a:ext cx="201168" cy="164592"/>
+          </a:xfrm>
+          <a:prstGeom prst="rect">
+            <a:avLst/>
+          </a:prstGeom>
+          <a:extLst>
+            <a:ext uri="{C572A759-6A51-4108-AA02-DFA0A04FC94B}">
+              <ma14:wrappingTextBoxFlag xmlns="" xmlns:ma14="http://schemas.microsoft.com/office/mac/drawingml/2011/main" val="0"/>
+            </a:ext>
+          </a:extLst>
+        </p:spPr>
+        <p:txBody>
+          <a:bodyPr/>
+          <a:lstStyle>
+            <a:lvl1pPr>
+              <a:defRPr sz="800">
+                <a:solidFill>
+                  <a:srgbClr val="64748B"/>
+                </a:solidFill>
+                <a:latin typeface="Aptos"/>
+                <a:ea typeface="Aptos"/>
+                <a:cs typeface="Aptos"/>
+              </a:defRPr>
+            </a:lvl1pPr>
+          </a:lstStyle>
+          <a:p>
+            <a:pPr algn="r"/>
+            <a:fld id="{F7021451-1387-4CA6-816F-3879F97B5CBC}" type="slidenum">
+              <a:rPr lang="en-US" b="0"/>
+              <a:t>7</a:t>
+            </a:fld>
+            <a:endParaRPr lang="en-US"/>
+          </a:p>
+        </p:txBody>
+      </p:sp>
+    </p:spTree>
+    <p:extLst>
+      <p:ext uri="{BB962C8B-B14F-4D97-AF65-F5344CB8AC3E}">
+        <p14:creationId xmlns:p14="http://schemas.microsoft.com/office/powerpoint/2010/main" val="1596321129"/>
+      </p:ext>
+    </p:extLst>
+  </p:cSld>
+  <p:clrMapOvr>
+    <a:masterClrMapping/>
+  </p:clrMapOvr>
+</p:sld>
+</file>
+
+<file path=ppt/slides/slide8.xml><?xml version="1.0" encoding="utf-8"?>
+<p:sld xmlns:a="http://schemas.openxmlformats.org/drawingml/2006/main" xmlns:r="http://schemas.openxmlformats.org/officeDocument/2006/relationships" xmlns:p="http://schemas.openxmlformats.org/presentationml/2006/main">
   <p:cSld name="Slide 7">
     <p:bg>
       <p:bgPr>
         <a:solidFill>
           <a:srgbClr val="17324D"/>
         </a:solidFill>
+        <a:effectLst/>
       </p:bgPr>
     </p:bg>
     <p:spTree>
@@ -10548,7 +13043,7 @@
           <a:bodyPr wrap="square" lIns="0" tIns="0" rIns="0" bIns="0" rtlCol="0" anchor="ctr"/>
           <a:lstStyle/>
           <a:p>
-            <a:pPr indent="0" marL="0">
+            <a:pPr marL="0" indent="0">
               <a:buNone/>
             </a:pPr>
             <a:r>
@@ -10589,7 +13084,7 @@
           </a:bodyPr>
           <a:lstStyle/>
           <a:p>
-            <a:pPr indent="0" marL="0">
+            <a:pPr marL="0" indent="0">
               <a:buNone/>
             </a:pPr>
             <a:r>
@@ -10628,7 +13123,7 @@
           <a:bodyPr wrap="square" lIns="0" tIns="0" rIns="0" bIns="0" rtlCol="0" anchor="ctr"/>
           <a:lstStyle/>
           <a:p>
-            <a:pPr indent="0" marL="0">
+            <a:pPr marL="0" indent="0">
               <a:buNone/>
             </a:pPr>
             <a:r>
@@ -10666,7 +13161,7 @@
           </a:prstGeom>
           <a:extLst>
             <a:ext uri="{C572A759-6A51-4108-AA02-DFA0A04FC94B}">
-              <ma14:wrappingTextBoxFlag xmlns:ma14="http://schemas.microsoft.com/office/mac/drawingml/2011/main" val="0"/>
+              <ma14:wrappingTextBoxFlag xmlns:ma14="http://schemas.microsoft.com/office/mac/drawingml/2011/main" xmlns="" val="0"/>
             </a:ext>
           </a:extLst>
         </p:spPr>
@@ -10687,8 +13182,8 @@
           <a:p>
             <a:pPr algn="r"/>
             <a:fld id="{F7021451-1387-4CA6-816F-3879F97B5CBC}" type="slidenum">
-              <a:rPr b="0" lang="en-US"/>
-              <a:t>7</a:t>
+              <a:rPr lang="en-US" b="0"/>
+              <a:t>8</a:t>
             </a:fld>
             <a:endParaRPr lang="en-US"/>
           </a:p>
@@ -10702,7 +13197,7 @@
 </p:sld>
 </file>
 
-<file path=ppt/slides/slide8.xml><?xml version="1.0" encoding="utf-8"?>
+<file path=ppt/slides/slide9.xml><?xml version="1.0" encoding="utf-8"?>
 <p:sld xmlns:a="http://schemas.openxmlformats.org/drawingml/2006/main" xmlns:r="http://schemas.openxmlformats.org/officeDocument/2006/relationships" xmlns:p="http://schemas.openxmlformats.org/presentationml/2006/main">
   <p:cSld name="Slide 8">
     <p:spTree>
@@ -10742,7 +13237,7 @@
           </a:bodyPr>
           <a:lstStyle/>
           <a:p>
-            <a:pPr indent="0" marL="0">
+            <a:pPr marL="0" indent="0">
               <a:buNone/>
             </a:pPr>
             <a:r>
@@ -10783,7 +13278,7 @@
           </a:bodyPr>
           <a:lstStyle/>
           <a:p>
-            <a:pPr indent="0" marL="0">
+            <a:pPr marL="0" indent="0">
               <a:buNone/>
             </a:pPr>
             <a:r>
@@ -10825,6 +13320,13 @@
             <a:prstDash val="solid"/>
           </a:ln>
         </p:spPr>
+        <p:txBody>
+          <a:bodyPr/>
+          <a:lstStyle/>
+          <a:p>
+            <a:endParaRPr lang="en-US"/>
+          </a:p>
+        </p:txBody>
       </p:sp>
       <p:sp>
         <p:nvSpPr>
@@ -10849,7 +13351,7 @@
           </a:bodyPr>
           <a:lstStyle/>
           <a:p>
-            <a:pPr algn="ctr" indent="0" marL="0">
+            <a:pPr marL="0" indent="0" algn="ctr">
               <a:buNone/>
             </a:pPr>
             <a:r>
@@ -10891,6 +13393,13 @@
             <a:tailEnd type="triangle"/>
           </a:ln>
         </p:spPr>
+        <p:txBody>
+          <a:bodyPr/>
+          <a:lstStyle/>
+          <a:p>
+            <a:endParaRPr lang="en-US"/>
+          </a:p>
+        </p:txBody>
       </p:sp>
       <p:sp>
         <p:nvSpPr>
@@ -10916,6 +13425,13 @@
             <a:prstDash val="solid"/>
           </a:ln>
         </p:spPr>
+        <p:txBody>
+          <a:bodyPr/>
+          <a:lstStyle/>
+          <a:p>
+            <a:endParaRPr lang="en-US"/>
+          </a:p>
+        </p:txBody>
       </p:sp>
       <p:sp>
         <p:nvSpPr>
@@ -10940,7 +13456,7 @@
           </a:bodyPr>
           <a:lstStyle/>
           <a:p>
-            <a:pPr algn="ctr" indent="0" marL="0">
+            <a:pPr marL="0" indent="0" algn="ctr">
               <a:buNone/>
             </a:pPr>
             <a:r>
@@ -10982,6 +13498,13 @@
             <a:tailEnd type="triangle"/>
           </a:ln>
         </p:spPr>
+        <p:txBody>
+          <a:bodyPr/>
+          <a:lstStyle/>
+          <a:p>
+            <a:endParaRPr lang="en-US"/>
+          </a:p>
+        </p:txBody>
       </p:sp>
       <p:sp>
         <p:nvSpPr>
@@ -11007,6 +13530,13 @@
             <a:prstDash val="solid"/>
           </a:ln>
         </p:spPr>
+        <p:txBody>
+          <a:bodyPr/>
+          <a:lstStyle/>
+          <a:p>
+            <a:endParaRPr lang="en-US"/>
+          </a:p>
+        </p:txBody>
       </p:sp>
       <p:sp>
         <p:nvSpPr>
@@ -11031,7 +13561,7 @@
           </a:bodyPr>
           <a:lstStyle/>
           <a:p>
-            <a:pPr algn="ctr" indent="0" marL="0">
+            <a:pPr marL="0" indent="0" algn="ctr">
               <a:buNone/>
             </a:pPr>
             <a:r>
@@ -11073,6 +13603,13 @@
             <a:tailEnd type="triangle"/>
           </a:ln>
         </p:spPr>
+        <p:txBody>
+          <a:bodyPr/>
+          <a:lstStyle/>
+          <a:p>
+            <a:endParaRPr lang="en-US"/>
+          </a:p>
+        </p:txBody>
       </p:sp>
       <p:sp>
         <p:nvSpPr>
@@ -11098,6 +13635,13 @@
             <a:prstDash val="solid"/>
           </a:ln>
         </p:spPr>
+        <p:txBody>
+          <a:bodyPr/>
+          <a:lstStyle/>
+          <a:p>
+            <a:endParaRPr lang="en-US"/>
+          </a:p>
+        </p:txBody>
       </p:sp>
       <p:sp>
         <p:nvSpPr>
@@ -11122,7 +13666,7 @@
           </a:bodyPr>
           <a:lstStyle/>
           <a:p>
-            <a:pPr algn="ctr" indent="0" marL="0">
+            <a:pPr marL="0" indent="0" algn="ctr">
               <a:buNone/>
             </a:pPr>
             <a:r>
@@ -11142,14 +13686,14 @@
       </p:sp>
       <p:pic>
         <p:nvPicPr>
-          <p:cNvPr id="15" name="Image 0" descr="/mnt/data/week7_polyphase/assets/decimation_savings.png">    </p:cNvPr>
+          <p:cNvPr id="15" name="Image 0" descr="/mnt/data/week7_polyphase/assets/decimation_savings.png"/>
           <p:cNvPicPr>
             <a:picLocks noChangeAspect="1"/>
           </p:cNvPicPr>
           <p:nvPr/>
         </p:nvPicPr>
         <p:blipFill>
-          <a:blip r:embed="rId1"/>
+          <a:blip r:embed="rId3"/>
           <a:stretch>
             <a:fillRect/>
           </a:stretch>
@@ -11188,6 +13732,13 @@
             <a:prstDash val="solid"/>
           </a:ln>
         </p:spPr>
+        <p:txBody>
+          <a:bodyPr/>
+          <a:lstStyle/>
+          <a:p>
+            <a:endParaRPr lang="en-US"/>
+          </a:p>
+        </p:txBody>
       </p:sp>
       <p:sp>
         <p:nvSpPr>
@@ -11212,7 +13763,7 @@
           </a:bodyPr>
           <a:lstStyle/>
           <a:p>
-            <a:pPr algn="ctr" indent="0" marL="0">
+            <a:pPr marL="0" indent="0" algn="ctr">
               <a:buNone/>
             </a:pPr>
             <a:r>
@@ -11254,6 +13805,13 @@
             <a:prstDash val="solid"/>
           </a:ln>
         </p:spPr>
+        <p:txBody>
+          <a:bodyPr/>
+          <a:lstStyle/>
+          <a:p>
+            <a:endParaRPr lang="en-US"/>
+          </a:p>
+        </p:txBody>
       </p:sp>
       <p:sp>
         <p:nvSpPr>
@@ -11279,6 +13837,13 @@
             <a:prstDash val="solid"/>
           </a:ln>
         </p:spPr>
+        <p:txBody>
+          <a:bodyPr/>
+          <a:lstStyle/>
+          <a:p>
+            <a:endParaRPr lang="en-US"/>
+          </a:p>
+        </p:txBody>
       </p:sp>
       <p:sp>
         <p:nvSpPr>
@@ -11303,7 +13868,7 @@
           </a:bodyPr>
           <a:lstStyle/>
           <a:p>
-            <a:pPr indent="0" marL="0">
+            <a:pPr marL="0" indent="0">
               <a:buNone/>
             </a:pPr>
             <a:r>
@@ -11344,7 +13909,7 @@
           </a:bodyPr>
           <a:lstStyle/>
           <a:p>
-            <a:pPr indent="0" marL="0">
+            <a:pPr marL="0" indent="0">
               <a:buNone/>
             </a:pPr>
             <a:r>
@@ -11386,6 +13951,13 @@
             <a:prstDash val="solid"/>
           </a:ln>
         </p:spPr>
+        <p:txBody>
+          <a:bodyPr/>
+          <a:lstStyle/>
+          <a:p>
+            <a:endParaRPr lang="en-US"/>
+          </a:p>
+        </p:txBody>
       </p:sp>
       <p:sp>
         <p:nvSpPr>
@@ -11411,6 +13983,13 @@
             <a:prstDash val="solid"/>
           </a:ln>
         </p:spPr>
+        <p:txBody>
+          <a:bodyPr/>
+          <a:lstStyle/>
+          <a:p>
+            <a:endParaRPr lang="en-US"/>
+          </a:p>
+        </p:txBody>
       </p:sp>
       <p:sp>
         <p:nvSpPr>
@@ -11435,7 +14014,7 @@
           </a:bodyPr>
           <a:lstStyle/>
           <a:p>
-            <a:pPr indent="0" marL="0">
+            <a:pPr marL="0" indent="0">
               <a:buNone/>
             </a:pPr>
             <a:r>
@@ -11472,11 +14051,11 @@
         </p:spPr>
         <p:txBody>
           <a:bodyPr wrap="square" lIns="0" tIns="0" rIns="0" bIns="0" rtlCol="0" anchor="t">
-            <a:normAutofit/>
+            <a:normAutofit lnSpcReduction="10000"/>
           </a:bodyPr>
           <a:lstStyle/>
           <a:p>
-            <a:pPr indent="0" marL="0">
+            <a:pPr marL="0" indent="0">
               <a:buNone/>
             </a:pPr>
             <a:r>
@@ -11496,7 +14075,7 @@
       </p:sp>
       <p:sp>
         <p:nvSpPr>
-          <p:cNvPr id="25" name="Slide Number Placeholder 0"/>
+          <p:cNvPr id="26" name="Slide Number Placeholder 0"/>
           <p:cNvSpPr>
             <a:spLocks noGrp="1"/>
           </p:cNvSpPr>
@@ -11514,7 +14093,7 @@
           </a:prstGeom>
           <a:extLst>
             <a:ext uri="{C572A759-6A51-4108-AA02-DFA0A04FC94B}">
-              <ma14:wrappingTextBoxFlag xmlns:ma14="http://schemas.microsoft.com/office/mac/drawingml/2011/main" val="0"/>
+              <ma14:wrappingTextBoxFlag xmlns:ma14="http://schemas.microsoft.com/office/mac/drawingml/2011/main" xmlns="" val="0"/>
             </a:ext>
           </a:extLst>
         </p:spPr>
@@ -11535,1341 +14114,7 @@
           <a:p>
             <a:pPr algn="r"/>
             <a:fld id="{F7021451-1387-4CA6-816F-3879F97B5CBC}" type="slidenum">
-              <a:rPr b="0" lang="en-US"/>
-              <a:t>8</a:t>
-            </a:fld>
-            <a:endParaRPr lang="en-US"/>
-          </a:p>
-        </p:txBody>
-      </p:sp>
-    </p:spTree>
-  </p:cSld>
-  <p:clrMapOvr>
-    <a:masterClrMapping/>
-  </p:clrMapOvr>
-</p:sld>
-</file>
-
-<file path=ppt/slides/slide9.xml><?xml version="1.0" encoding="utf-8"?>
-<p:sld xmlns:a="http://schemas.openxmlformats.org/drawingml/2006/main" xmlns:r="http://schemas.openxmlformats.org/officeDocument/2006/relationships" xmlns:p="http://schemas.openxmlformats.org/presentationml/2006/main">
-  <p:cSld name="Slide 9">
-    <p:spTree>
-      <p:nvGrpSpPr>
-        <p:cNvPr id="1" name=""/>
-        <p:cNvGrpSpPr/>
-        <p:nvPr/>
-      </p:nvGrpSpPr>
-      <p:grpSpPr>
-        <a:xfrm>
-          <a:off x="0" y="0"/>
-          <a:ext cx="0" cy="0"/>
-          <a:chOff x="0" y="0"/>
-          <a:chExt cx="0" cy="0"/>
-        </a:xfrm>
-      </p:grpSpPr>
-      <p:sp>
-        <p:nvSpPr>
-          <p:cNvPr id="2" name="Text 0"/>
-          <p:cNvSpPr/>
-          <p:nvPr/>
-        </p:nvSpPr>
-        <p:spPr>
-          <a:xfrm>
-            <a:off x="566928" y="310896"/>
-            <a:ext cx="11018520" cy="438912"/>
-          </a:xfrm>
-          <a:prstGeom prst="rect">
-            <a:avLst/>
-          </a:prstGeom>
-          <a:noFill/>
-          <a:ln/>
-        </p:spPr>
-        <p:txBody>
-          <a:bodyPr wrap="square" lIns="0" tIns="0" rIns="0" bIns="0" rtlCol="0" anchor="ctr">
-            <a:normAutofit/>
-          </a:bodyPr>
-          <a:lstStyle/>
-          <a:p>
-            <a:pPr indent="0" marL="0">
-              <a:buNone/>
-            </a:pPr>
-            <a:r>
-              <a:rPr lang="en-US" sz="2500" b="1" dirty="0">
-                <a:solidFill>
-                  <a:srgbClr val="17324D"/>
-                </a:solidFill>
-                <a:latin typeface="Aptos" pitchFamily="34" charset="0"/>
-                <a:ea typeface="Aptos" pitchFamily="34" charset="-122"/>
-                <a:cs typeface="Aptos" pitchFamily="34" charset="-120"/>
-              </a:rPr>
-              <a:t>First Noble Identity: the precise statement</a:t>
-            </a:r>
-            <a:endParaRPr lang="en-US" sz="2500" dirty="0"/>
-          </a:p>
-        </p:txBody>
-      </p:sp>
-      <p:sp>
-        <p:nvSpPr>
-          <p:cNvPr id="3" name="Text 1"/>
-          <p:cNvSpPr/>
-          <p:nvPr/>
-        </p:nvSpPr>
-        <p:spPr>
-          <a:xfrm>
-            <a:off x="585216" y="795528"/>
-            <a:ext cx="10744200" cy="292608"/>
-          </a:xfrm>
-          <a:prstGeom prst="rect">
-            <a:avLst/>
-          </a:prstGeom>
-          <a:noFill/>
-          <a:ln/>
-        </p:spPr>
-        <p:txBody>
-          <a:bodyPr wrap="square" lIns="0" tIns="0" rIns="0" bIns="0" rtlCol="0" anchor="ctr">
-            <a:normAutofit/>
-          </a:bodyPr>
-          <a:lstStyle/>
-          <a:p>
-            <a:pPr indent="0" marL="0">
-              <a:buNone/>
-            </a:pPr>
-            <a:r>
-              <a:rPr lang="en-US" sz="1150" dirty="0">
-                <a:solidFill>
-                  <a:srgbClr val="64748B"/>
-                </a:solidFill>
-                <a:latin typeface="Aptos" pitchFamily="34" charset="0"/>
-                <a:ea typeface="Aptos" pitchFamily="34" charset="-122"/>
-                <a:cs typeface="Aptos" pitchFamily="34" charset="-120"/>
-              </a:rPr>
-              <a:t>A rate changer commutes with a filter only after the filter has the required zᴹ structure.</a:t>
-            </a:r>
-            <a:endParaRPr lang="en-US" sz="1150" dirty="0"/>
-          </a:p>
-        </p:txBody>
-      </p:sp>
-      <p:sp>
-        <p:nvSpPr>
-          <p:cNvPr id="4" name="Shape 2"/>
-          <p:cNvSpPr/>
-          <p:nvPr/>
-        </p:nvSpPr>
-        <p:spPr>
-          <a:xfrm>
-            <a:off x="914400" y="1417320"/>
-            <a:ext cx="1017270" cy="658368"/>
-          </a:xfrm>
-          <a:prstGeom prst="roundRect">
-            <a:avLst/>
-          </a:prstGeom>
-          <a:solidFill>
-            <a:srgbClr val="F8FAFC"/>
-          </a:solidFill>
-          <a:ln w="19050">
-            <a:solidFill>
-              <a:srgbClr val="1F7A8C"/>
-            </a:solidFill>
-            <a:prstDash val="solid"/>
-          </a:ln>
-        </p:spPr>
-      </p:sp>
-      <p:sp>
-        <p:nvSpPr>
-          <p:cNvPr id="5" name="Text 3"/>
-          <p:cNvSpPr/>
-          <p:nvPr/>
-        </p:nvSpPr>
-        <p:spPr>
-          <a:xfrm>
-            <a:off x="960120" y="1490472"/>
-            <a:ext cx="925830" cy="512064"/>
-          </a:xfrm>
-          <a:prstGeom prst="rect">
-            <a:avLst/>
-          </a:prstGeom>
-          <a:noFill/>
-          <a:ln/>
-        </p:spPr>
-        <p:txBody>
-          <a:bodyPr wrap="square" lIns="0" tIns="0" rIns="0" bIns="0" rtlCol="0" anchor="ctr">
-            <a:normAutofit/>
-          </a:bodyPr>
-          <a:lstStyle/>
-          <a:p>
-            <a:pPr algn="ctr" indent="0" marL="0">
-              <a:buNone/>
-            </a:pPr>
-            <a:r>
-              <a:rPr lang="en-US" sz="1400" b="1" dirty="0">
-                <a:solidFill>
-                  <a:srgbClr val="17324D"/>
-                </a:solidFill>
-                <a:latin typeface="Aptos" pitchFamily="34" charset="0"/>
-                <a:ea typeface="Aptos" pitchFamily="34" charset="-122"/>
-                <a:cs typeface="Aptos" pitchFamily="34" charset="-120"/>
-              </a:rPr>
-              <a:t>x[n]</a:t>
-            </a:r>
-            <a:endParaRPr lang="en-US" sz="1400" dirty="0"/>
-          </a:p>
-        </p:txBody>
-      </p:sp>
-      <p:sp>
-        <p:nvSpPr>
-          <p:cNvPr id="6" name="Shape 4"/>
-          <p:cNvSpPr/>
-          <p:nvPr/>
-        </p:nvSpPr>
-        <p:spPr>
-          <a:xfrm>
-            <a:off x="1931670" y="1746504"/>
-            <a:ext cx="201168" cy="0"/>
-          </a:xfrm>
-          <a:prstGeom prst="line">
-            <a:avLst/>
-          </a:prstGeom>
-          <a:noFill/>
-          <a:ln w="21590">
-            <a:solidFill>
-              <a:srgbClr val="64748B"/>
-            </a:solidFill>
-            <a:prstDash val="solid"/>
-            <a:headEnd type="none"/>
-            <a:tailEnd type="triangle"/>
-          </a:ln>
-        </p:spPr>
-      </p:sp>
-      <p:sp>
-        <p:nvSpPr>
-          <p:cNvPr id="7" name="Shape 5"/>
-          <p:cNvSpPr/>
-          <p:nvPr/>
-        </p:nvSpPr>
-        <p:spPr>
-          <a:xfrm>
-            <a:off x="2160270" y="1417320"/>
-            <a:ext cx="1017270" cy="658368"/>
-          </a:xfrm>
-          <a:prstGeom prst="roundRect">
-            <a:avLst/>
-          </a:prstGeom>
-          <a:solidFill>
-            <a:srgbClr val="F8FAFC"/>
-          </a:solidFill>
-          <a:ln w="19050">
-            <a:solidFill>
-              <a:srgbClr val="1F7A8C"/>
-            </a:solidFill>
-            <a:prstDash val="solid"/>
-          </a:ln>
-        </p:spPr>
-      </p:sp>
-      <p:sp>
-        <p:nvSpPr>
-          <p:cNvPr id="8" name="Text 6"/>
-          <p:cNvSpPr/>
-          <p:nvPr/>
-        </p:nvSpPr>
-        <p:spPr>
-          <a:xfrm>
-            <a:off x="2205990" y="1490472"/>
-            <a:ext cx="925830" cy="512064"/>
-          </a:xfrm>
-          <a:prstGeom prst="rect">
-            <a:avLst/>
-          </a:prstGeom>
-          <a:noFill/>
-          <a:ln/>
-        </p:spPr>
-        <p:txBody>
-          <a:bodyPr wrap="square" lIns="0" tIns="0" rIns="0" bIns="0" rtlCol="0" anchor="ctr">
-            <a:normAutofit/>
-          </a:bodyPr>
-          <a:lstStyle/>
-          <a:p>
-            <a:pPr algn="ctr" indent="0" marL="0">
-              <a:buNone/>
-            </a:pPr>
-            <a:r>
-              <a:rPr lang="en-US" sz="1400" b="1" dirty="0">
-                <a:solidFill>
-                  <a:srgbClr val="17324D"/>
-                </a:solidFill>
-                <a:latin typeface="Aptos" pitchFamily="34" charset="0"/>
-                <a:ea typeface="Aptos" pitchFamily="34" charset="-122"/>
-                <a:cs typeface="Aptos" pitchFamily="34" charset="-120"/>
-              </a:rPr>
-              <a:t>G(zᴹ)</a:t>
-            </a:r>
-            <a:endParaRPr lang="en-US" sz="1400" dirty="0"/>
-          </a:p>
-        </p:txBody>
-      </p:sp>
-      <p:sp>
-        <p:nvSpPr>
-          <p:cNvPr id="9" name="Shape 7"/>
-          <p:cNvSpPr/>
-          <p:nvPr/>
-        </p:nvSpPr>
-        <p:spPr>
-          <a:xfrm>
-            <a:off x="3177540" y="1746504"/>
-            <a:ext cx="201168" cy="0"/>
-          </a:xfrm>
-          <a:prstGeom prst="line">
-            <a:avLst/>
-          </a:prstGeom>
-          <a:noFill/>
-          <a:ln w="21590">
-            <a:solidFill>
-              <a:srgbClr val="64748B"/>
-            </a:solidFill>
-            <a:prstDash val="solid"/>
-            <a:headEnd type="none"/>
-            <a:tailEnd type="triangle"/>
-          </a:ln>
-        </p:spPr>
-      </p:sp>
-      <p:sp>
-        <p:nvSpPr>
-          <p:cNvPr id="10" name="Shape 8"/>
-          <p:cNvSpPr/>
-          <p:nvPr/>
-        </p:nvSpPr>
-        <p:spPr>
-          <a:xfrm>
-            <a:off x="3406140" y="1417320"/>
-            <a:ext cx="1017270" cy="658368"/>
-          </a:xfrm>
-          <a:prstGeom prst="roundRect">
-            <a:avLst/>
-          </a:prstGeom>
-          <a:solidFill>
-            <a:srgbClr val="F8FAFC"/>
-          </a:solidFill>
-          <a:ln w="19050">
-            <a:solidFill>
-              <a:srgbClr val="D97706"/>
-            </a:solidFill>
-            <a:prstDash val="solid"/>
-          </a:ln>
-        </p:spPr>
-      </p:sp>
-      <p:sp>
-        <p:nvSpPr>
-          <p:cNvPr id="11" name="Text 9"/>
-          <p:cNvSpPr/>
-          <p:nvPr/>
-        </p:nvSpPr>
-        <p:spPr>
-          <a:xfrm>
-            <a:off x="3451860" y="1490472"/>
-            <a:ext cx="925830" cy="512064"/>
-          </a:xfrm>
-          <a:prstGeom prst="rect">
-            <a:avLst/>
-          </a:prstGeom>
-          <a:noFill/>
-          <a:ln/>
-        </p:spPr>
-        <p:txBody>
-          <a:bodyPr wrap="square" lIns="0" tIns="0" rIns="0" bIns="0" rtlCol="0" anchor="ctr">
-            <a:normAutofit/>
-          </a:bodyPr>
-          <a:lstStyle/>
-          <a:p>
-            <a:pPr algn="ctr" indent="0" marL="0">
-              <a:buNone/>
-            </a:pPr>
-            <a:r>
-              <a:rPr lang="en-US" sz="1400" b="1" dirty="0">
-                <a:solidFill>
-                  <a:srgbClr val="17324D"/>
-                </a:solidFill>
-                <a:latin typeface="Aptos" pitchFamily="34" charset="0"/>
-                <a:ea typeface="Aptos" pitchFamily="34" charset="-122"/>
-                <a:cs typeface="Aptos" pitchFamily="34" charset="-120"/>
-              </a:rPr>
-              <a:t>↓ M</a:t>
-            </a:r>
-            <a:endParaRPr lang="en-US" sz="1400" dirty="0"/>
-          </a:p>
-        </p:txBody>
-      </p:sp>
-      <p:sp>
-        <p:nvSpPr>
-          <p:cNvPr id="12" name="Shape 10"/>
-          <p:cNvSpPr/>
-          <p:nvPr/>
-        </p:nvSpPr>
-        <p:spPr>
-          <a:xfrm>
-            <a:off x="4423410" y="1746504"/>
-            <a:ext cx="201168" cy="0"/>
-          </a:xfrm>
-          <a:prstGeom prst="line">
-            <a:avLst/>
-          </a:prstGeom>
-          <a:noFill/>
-          <a:ln w="21590">
-            <a:solidFill>
-              <a:srgbClr val="64748B"/>
-            </a:solidFill>
-            <a:prstDash val="solid"/>
-            <a:headEnd type="none"/>
-            <a:tailEnd type="triangle"/>
-          </a:ln>
-        </p:spPr>
-      </p:sp>
-      <p:sp>
-        <p:nvSpPr>
-          <p:cNvPr id="13" name="Shape 11"/>
-          <p:cNvSpPr/>
-          <p:nvPr/>
-        </p:nvSpPr>
-        <p:spPr>
-          <a:xfrm>
-            <a:off x="4652010" y="1417320"/>
-            <a:ext cx="1017270" cy="658368"/>
-          </a:xfrm>
-          <a:prstGeom prst="roundRect">
-            <a:avLst/>
-          </a:prstGeom>
-          <a:solidFill>
-            <a:srgbClr val="F8FAFC"/>
-          </a:solidFill>
-          <a:ln w="19050">
-            <a:solidFill>
-              <a:srgbClr val="1F7A8C"/>
-            </a:solidFill>
-            <a:prstDash val="solid"/>
-          </a:ln>
-        </p:spPr>
-      </p:sp>
-      <p:sp>
-        <p:nvSpPr>
-          <p:cNvPr id="14" name="Text 12"/>
-          <p:cNvSpPr/>
-          <p:nvPr/>
-        </p:nvSpPr>
-        <p:spPr>
-          <a:xfrm>
-            <a:off x="4697730" y="1490472"/>
-            <a:ext cx="925830" cy="512064"/>
-          </a:xfrm>
-          <a:prstGeom prst="rect">
-            <a:avLst/>
-          </a:prstGeom>
-          <a:noFill/>
-          <a:ln/>
-        </p:spPr>
-        <p:txBody>
-          <a:bodyPr wrap="square" lIns="0" tIns="0" rIns="0" bIns="0" rtlCol="0" anchor="ctr">
-            <a:normAutofit/>
-          </a:bodyPr>
-          <a:lstStyle/>
-          <a:p>
-            <a:pPr algn="ctr" indent="0" marL="0">
-              <a:buNone/>
-            </a:pPr>
-            <a:r>
-              <a:rPr lang="en-US" sz="1400" b="1" dirty="0">
-                <a:solidFill>
-                  <a:srgbClr val="17324D"/>
-                </a:solidFill>
-                <a:latin typeface="Aptos" pitchFamily="34" charset="0"/>
-                <a:ea typeface="Aptos" pitchFamily="34" charset="-122"/>
-                <a:cs typeface="Aptos" pitchFamily="34" charset="-120"/>
-              </a:rPr>
-              <a:t>y[m]</a:t>
-            </a:r>
-            <a:endParaRPr lang="en-US" sz="1400" dirty="0"/>
-          </a:p>
-        </p:txBody>
-      </p:sp>
-      <p:sp>
-        <p:nvSpPr>
-          <p:cNvPr id="15" name="Text 13"/>
-          <p:cNvSpPr/>
-          <p:nvPr/>
-        </p:nvSpPr>
-        <p:spPr>
-          <a:xfrm>
-            <a:off x="5669280" y="1481328"/>
-            <a:ext cx="640080" cy="457200"/>
-          </a:xfrm>
-          <a:prstGeom prst="rect">
-            <a:avLst/>
-          </a:prstGeom>
-          <a:noFill/>
-          <a:ln/>
-        </p:spPr>
-        <p:txBody>
-          <a:bodyPr wrap="square" lIns="0" tIns="0" rIns="0" bIns="0" rtlCol="0" anchor="ctr"/>
-          <a:lstStyle/>
-          <a:p>
-            <a:pPr algn="ctr" indent="0" marL="0">
-              <a:buNone/>
-            </a:pPr>
-            <a:r>
-              <a:rPr lang="en-US" sz="2800" b="1" dirty="0">
-                <a:solidFill>
-                  <a:srgbClr val="17324D"/>
-                </a:solidFill>
-                <a:latin typeface="Cambria Math" pitchFamily="34" charset="0"/>
-                <a:ea typeface="Cambria Math" pitchFamily="34" charset="-122"/>
-                <a:cs typeface="Cambria Math" pitchFamily="34" charset="-120"/>
-              </a:rPr>
-              <a:t>≡</a:t>
-            </a:r>
-            <a:endParaRPr lang="en-US" sz="2800" dirty="0"/>
-          </a:p>
-        </p:txBody>
-      </p:sp>
-      <p:sp>
-        <p:nvSpPr>
-          <p:cNvPr id="16" name="Shape 14"/>
-          <p:cNvSpPr/>
-          <p:nvPr/>
-        </p:nvSpPr>
-        <p:spPr>
-          <a:xfrm>
-            <a:off x="6355080" y="1417320"/>
-            <a:ext cx="1017270" cy="658368"/>
-          </a:xfrm>
-          <a:prstGeom prst="roundRect">
-            <a:avLst/>
-          </a:prstGeom>
-          <a:solidFill>
-            <a:srgbClr val="F8FAFC"/>
-          </a:solidFill>
-          <a:ln w="19050">
-            <a:solidFill>
-              <a:srgbClr val="1F7A8C"/>
-            </a:solidFill>
-            <a:prstDash val="solid"/>
-          </a:ln>
-        </p:spPr>
-      </p:sp>
-      <p:sp>
-        <p:nvSpPr>
-          <p:cNvPr id="17" name="Text 15"/>
-          <p:cNvSpPr/>
-          <p:nvPr/>
-        </p:nvSpPr>
-        <p:spPr>
-          <a:xfrm>
-            <a:off x="6400800" y="1490472"/>
-            <a:ext cx="925830" cy="512064"/>
-          </a:xfrm>
-          <a:prstGeom prst="rect">
-            <a:avLst/>
-          </a:prstGeom>
-          <a:noFill/>
-          <a:ln/>
-        </p:spPr>
-        <p:txBody>
-          <a:bodyPr wrap="square" lIns="0" tIns="0" rIns="0" bIns="0" rtlCol="0" anchor="ctr">
-            <a:normAutofit/>
-          </a:bodyPr>
-          <a:lstStyle/>
-          <a:p>
-            <a:pPr algn="ctr" indent="0" marL="0">
-              <a:buNone/>
-            </a:pPr>
-            <a:r>
-              <a:rPr lang="en-US" sz="1400" b="1" dirty="0">
-                <a:solidFill>
-                  <a:srgbClr val="17324D"/>
-                </a:solidFill>
-                <a:latin typeface="Aptos" pitchFamily="34" charset="0"/>
-                <a:ea typeface="Aptos" pitchFamily="34" charset="-122"/>
-                <a:cs typeface="Aptos" pitchFamily="34" charset="-120"/>
-              </a:rPr>
-              <a:t>x[n]</a:t>
-            </a:r>
-            <a:endParaRPr lang="en-US" sz="1400" dirty="0"/>
-          </a:p>
-        </p:txBody>
-      </p:sp>
-      <p:sp>
-        <p:nvSpPr>
-          <p:cNvPr id="18" name="Shape 16"/>
-          <p:cNvSpPr/>
-          <p:nvPr/>
-        </p:nvSpPr>
-        <p:spPr>
-          <a:xfrm>
-            <a:off x="7372350" y="1746504"/>
-            <a:ext cx="201168" cy="0"/>
-          </a:xfrm>
-          <a:prstGeom prst="line">
-            <a:avLst/>
-          </a:prstGeom>
-          <a:noFill/>
-          <a:ln w="21590">
-            <a:solidFill>
-              <a:srgbClr val="64748B"/>
-            </a:solidFill>
-            <a:prstDash val="solid"/>
-            <a:headEnd type="none"/>
-            <a:tailEnd type="triangle"/>
-          </a:ln>
-        </p:spPr>
-      </p:sp>
-      <p:sp>
-        <p:nvSpPr>
-          <p:cNvPr id="19" name="Shape 17"/>
-          <p:cNvSpPr/>
-          <p:nvPr/>
-        </p:nvSpPr>
-        <p:spPr>
-          <a:xfrm>
-            <a:off x="7600950" y="1417320"/>
-            <a:ext cx="1017270" cy="658368"/>
-          </a:xfrm>
-          <a:prstGeom prst="roundRect">
-            <a:avLst/>
-          </a:prstGeom>
-          <a:solidFill>
-            <a:srgbClr val="F8FAFC"/>
-          </a:solidFill>
-          <a:ln w="19050">
-            <a:solidFill>
-              <a:srgbClr val="D97706"/>
-            </a:solidFill>
-            <a:prstDash val="solid"/>
-          </a:ln>
-        </p:spPr>
-      </p:sp>
-      <p:sp>
-        <p:nvSpPr>
-          <p:cNvPr id="20" name="Text 18"/>
-          <p:cNvSpPr/>
-          <p:nvPr/>
-        </p:nvSpPr>
-        <p:spPr>
-          <a:xfrm>
-            <a:off x="7646670" y="1490472"/>
-            <a:ext cx="925830" cy="512064"/>
-          </a:xfrm>
-          <a:prstGeom prst="rect">
-            <a:avLst/>
-          </a:prstGeom>
-          <a:noFill/>
-          <a:ln/>
-        </p:spPr>
-        <p:txBody>
-          <a:bodyPr wrap="square" lIns="0" tIns="0" rIns="0" bIns="0" rtlCol="0" anchor="ctr">
-            <a:normAutofit/>
-          </a:bodyPr>
-          <a:lstStyle/>
-          <a:p>
-            <a:pPr algn="ctr" indent="0" marL="0">
-              <a:buNone/>
-            </a:pPr>
-            <a:r>
-              <a:rPr lang="en-US" sz="1400" b="1" dirty="0">
-                <a:solidFill>
-                  <a:srgbClr val="17324D"/>
-                </a:solidFill>
-                <a:latin typeface="Aptos" pitchFamily="34" charset="0"/>
-                <a:ea typeface="Aptos" pitchFamily="34" charset="-122"/>
-                <a:cs typeface="Aptos" pitchFamily="34" charset="-120"/>
-              </a:rPr>
-              <a:t>↓ M</a:t>
-            </a:r>
-            <a:endParaRPr lang="en-US" sz="1400" dirty="0"/>
-          </a:p>
-        </p:txBody>
-      </p:sp>
-      <p:sp>
-        <p:nvSpPr>
-          <p:cNvPr id="21" name="Shape 19"/>
-          <p:cNvSpPr/>
-          <p:nvPr/>
-        </p:nvSpPr>
-        <p:spPr>
-          <a:xfrm>
-            <a:off x="8618220" y="1746504"/>
-            <a:ext cx="201168" cy="0"/>
-          </a:xfrm>
-          <a:prstGeom prst="line">
-            <a:avLst/>
-          </a:prstGeom>
-          <a:noFill/>
-          <a:ln w="21590">
-            <a:solidFill>
-              <a:srgbClr val="64748B"/>
-            </a:solidFill>
-            <a:prstDash val="solid"/>
-            <a:headEnd type="none"/>
-            <a:tailEnd type="triangle"/>
-          </a:ln>
-        </p:spPr>
-      </p:sp>
-      <p:sp>
-        <p:nvSpPr>
-          <p:cNvPr id="22" name="Shape 20"/>
-          <p:cNvSpPr/>
-          <p:nvPr/>
-        </p:nvSpPr>
-        <p:spPr>
-          <a:xfrm>
-            <a:off x="8846820" y="1417320"/>
-            <a:ext cx="1017270" cy="658368"/>
-          </a:xfrm>
-          <a:prstGeom prst="roundRect">
-            <a:avLst/>
-          </a:prstGeom>
-          <a:solidFill>
-            <a:srgbClr val="F8FAFC"/>
-          </a:solidFill>
-          <a:ln w="19050">
-            <a:solidFill>
-              <a:srgbClr val="1F7A8C"/>
-            </a:solidFill>
-            <a:prstDash val="solid"/>
-          </a:ln>
-        </p:spPr>
-      </p:sp>
-      <p:sp>
-        <p:nvSpPr>
-          <p:cNvPr id="23" name="Text 21"/>
-          <p:cNvSpPr/>
-          <p:nvPr/>
-        </p:nvSpPr>
-        <p:spPr>
-          <a:xfrm>
-            <a:off x="8892540" y="1490472"/>
-            <a:ext cx="925830" cy="512064"/>
-          </a:xfrm>
-          <a:prstGeom prst="rect">
-            <a:avLst/>
-          </a:prstGeom>
-          <a:noFill/>
-          <a:ln/>
-        </p:spPr>
-        <p:txBody>
-          <a:bodyPr wrap="square" lIns="0" tIns="0" rIns="0" bIns="0" rtlCol="0" anchor="ctr">
-            <a:normAutofit/>
-          </a:bodyPr>
-          <a:lstStyle/>
-          <a:p>
-            <a:pPr algn="ctr" indent="0" marL="0">
-              <a:buNone/>
-            </a:pPr>
-            <a:r>
-              <a:rPr lang="en-US" sz="1400" b="1" dirty="0">
-                <a:solidFill>
-                  <a:srgbClr val="17324D"/>
-                </a:solidFill>
-                <a:latin typeface="Aptos" pitchFamily="34" charset="0"/>
-                <a:ea typeface="Aptos" pitchFamily="34" charset="-122"/>
-                <a:cs typeface="Aptos" pitchFamily="34" charset="-120"/>
-              </a:rPr>
-              <a:t>G(z)</a:t>
-            </a:r>
-            <a:endParaRPr lang="en-US" sz="1400" dirty="0"/>
-          </a:p>
-        </p:txBody>
-      </p:sp>
-      <p:sp>
-        <p:nvSpPr>
-          <p:cNvPr id="24" name="Shape 22"/>
-          <p:cNvSpPr/>
-          <p:nvPr/>
-        </p:nvSpPr>
-        <p:spPr>
-          <a:xfrm>
-            <a:off x="9864090" y="1746504"/>
-            <a:ext cx="201168" cy="0"/>
-          </a:xfrm>
-          <a:prstGeom prst="line">
-            <a:avLst/>
-          </a:prstGeom>
-          <a:noFill/>
-          <a:ln w="21590">
-            <a:solidFill>
-              <a:srgbClr val="64748B"/>
-            </a:solidFill>
-            <a:prstDash val="solid"/>
-            <a:headEnd type="none"/>
-            <a:tailEnd type="triangle"/>
-          </a:ln>
-        </p:spPr>
-      </p:sp>
-      <p:sp>
-        <p:nvSpPr>
-          <p:cNvPr id="25" name="Shape 23"/>
-          <p:cNvSpPr/>
-          <p:nvPr/>
-        </p:nvSpPr>
-        <p:spPr>
-          <a:xfrm>
-            <a:off x="10092690" y="1417320"/>
-            <a:ext cx="1017270" cy="658368"/>
-          </a:xfrm>
-          <a:prstGeom prst="roundRect">
-            <a:avLst/>
-          </a:prstGeom>
-          <a:solidFill>
-            <a:srgbClr val="F8FAFC"/>
-          </a:solidFill>
-          <a:ln w="19050">
-            <a:solidFill>
-              <a:srgbClr val="1F7A8C"/>
-            </a:solidFill>
-            <a:prstDash val="solid"/>
-          </a:ln>
-        </p:spPr>
-      </p:sp>
-      <p:sp>
-        <p:nvSpPr>
-          <p:cNvPr id="26" name="Text 24"/>
-          <p:cNvSpPr/>
-          <p:nvPr/>
-        </p:nvSpPr>
-        <p:spPr>
-          <a:xfrm>
-            <a:off x="10138410" y="1490472"/>
-            <a:ext cx="925830" cy="512064"/>
-          </a:xfrm>
-          <a:prstGeom prst="rect">
-            <a:avLst/>
-          </a:prstGeom>
-          <a:noFill/>
-          <a:ln/>
-        </p:spPr>
-        <p:txBody>
-          <a:bodyPr wrap="square" lIns="0" tIns="0" rIns="0" bIns="0" rtlCol="0" anchor="ctr">
-            <a:normAutofit/>
-          </a:bodyPr>
-          <a:lstStyle/>
-          <a:p>
-            <a:pPr algn="ctr" indent="0" marL="0">
-              <a:buNone/>
-            </a:pPr>
-            <a:r>
-              <a:rPr lang="en-US" sz="1400" b="1" dirty="0">
-                <a:solidFill>
-                  <a:srgbClr val="17324D"/>
-                </a:solidFill>
-                <a:latin typeface="Aptos" pitchFamily="34" charset="0"/>
-                <a:ea typeface="Aptos" pitchFamily="34" charset="-122"/>
-                <a:cs typeface="Aptos" pitchFamily="34" charset="-120"/>
-              </a:rPr>
-              <a:t>y[m]</a:t>
-            </a:r>
-            <a:endParaRPr lang="en-US" sz="1400" dirty="0"/>
-          </a:p>
-        </p:txBody>
-      </p:sp>
-      <p:sp>
-        <p:nvSpPr>
-          <p:cNvPr id="27" name="Shape 25"/>
-          <p:cNvSpPr/>
-          <p:nvPr/>
-        </p:nvSpPr>
-        <p:spPr>
-          <a:xfrm>
-            <a:off x="914400" y="2743200"/>
-            <a:ext cx="4754880" cy="1188720"/>
-          </a:xfrm>
-          <a:prstGeom prst="roundRect">
-            <a:avLst/>
-          </a:prstGeom>
-          <a:solidFill>
-            <a:srgbClr val="F6F8FB"/>
-          </a:solidFill>
-          <a:ln w="12700">
-            <a:solidFill>
-              <a:srgbClr val="D9E2EC"/>
-            </a:solidFill>
-            <a:prstDash val="solid"/>
-          </a:ln>
-        </p:spPr>
-      </p:sp>
-      <p:sp>
-        <p:nvSpPr>
-          <p:cNvPr id="28" name="Shape 26"/>
-          <p:cNvSpPr/>
-          <p:nvPr/>
-        </p:nvSpPr>
-        <p:spPr>
-          <a:xfrm>
-            <a:off x="914400" y="2743200"/>
-            <a:ext cx="73152" cy="1188720"/>
-          </a:xfrm>
-          <a:prstGeom prst="rect">
-            <a:avLst/>
-          </a:prstGeom>
-          <a:solidFill>
-            <a:srgbClr val="1F7A8C"/>
-          </a:solidFill>
-          <a:ln w="12700">
-            <a:solidFill>
-              <a:srgbClr val="1F7A8C"/>
-            </a:solidFill>
-            <a:prstDash val="solid"/>
-          </a:ln>
-        </p:spPr>
-      </p:sp>
-      <p:sp>
-        <p:nvSpPr>
-          <p:cNvPr id="29" name="Text 27"/>
-          <p:cNvSpPr/>
-          <p:nvPr/>
-        </p:nvSpPr>
-        <p:spPr>
-          <a:xfrm>
-            <a:off x="1115568" y="2889504"/>
-            <a:ext cx="4407408" cy="256032"/>
-          </a:xfrm>
-          <a:prstGeom prst="rect">
-            <a:avLst/>
-          </a:prstGeom>
-          <a:noFill/>
-          <a:ln/>
-        </p:spPr>
-        <p:txBody>
-          <a:bodyPr wrap="square" lIns="0" tIns="0" rIns="0" bIns="0" rtlCol="0" anchor="ctr">
-            <a:normAutofit/>
-          </a:bodyPr>
-          <a:lstStyle/>
-          <a:p>
-            <a:pPr indent="0" marL="0">
-              <a:buNone/>
-            </a:pPr>
-            <a:r>
-              <a:rPr lang="en-US" sz="1400" b="1" dirty="0">
-                <a:solidFill>
-                  <a:srgbClr val="17324D"/>
-                </a:solidFill>
-                <a:latin typeface="Aptos" pitchFamily="34" charset="0"/>
-                <a:ea typeface="Aptos" pitchFamily="34" charset="-122"/>
-                <a:cs typeface="Aptos" pitchFamily="34" charset="-120"/>
-              </a:rPr>
-              <a:t>What changes</a:t>
-            </a:r>
-            <a:endParaRPr lang="en-US" sz="1400" dirty="0"/>
-          </a:p>
-        </p:txBody>
-      </p:sp>
-      <p:sp>
-        <p:nvSpPr>
-          <p:cNvPr id="30" name="Text 28"/>
-          <p:cNvSpPr/>
-          <p:nvPr/>
-        </p:nvSpPr>
-        <p:spPr>
-          <a:xfrm>
-            <a:off x="1115568" y="3218688"/>
-            <a:ext cx="4407408" cy="585216"/>
-          </a:xfrm>
-          <a:prstGeom prst="rect">
-            <a:avLst/>
-          </a:prstGeom>
-          <a:noFill/>
-          <a:ln/>
-        </p:spPr>
-        <p:txBody>
-          <a:bodyPr wrap="square" lIns="0" tIns="0" rIns="0" bIns="0" rtlCol="0" anchor="t">
-            <a:normAutofit/>
-          </a:bodyPr>
-          <a:lstStyle/>
-          <a:p>
-            <a:pPr indent="0" marL="0">
-              <a:buNone/>
-            </a:pPr>
-            <a:r>
-              <a:rPr lang="en-US" sz="1220" dirty="0">
-                <a:solidFill>
-                  <a:srgbClr val="1F2937"/>
-                </a:solidFill>
-                <a:latin typeface="Aptos" pitchFamily="34" charset="0"/>
-                <a:ea typeface="Aptos" pitchFamily="34" charset="-122"/>
-                <a:cs typeface="Aptos" pitchFamily="34" charset="-120"/>
-              </a:rPr>
-              <a:t>On the right, G(z) runs at the lower sampling rate Fₛ/M.</a:t>
-            </a:r>
-            <a:endParaRPr lang="en-US" sz="1220" dirty="0"/>
-          </a:p>
-        </p:txBody>
-      </p:sp>
-      <p:sp>
-        <p:nvSpPr>
-          <p:cNvPr id="31" name="Shape 29"/>
-          <p:cNvSpPr/>
-          <p:nvPr/>
-        </p:nvSpPr>
-        <p:spPr>
-          <a:xfrm>
-            <a:off x="6355080" y="2743200"/>
-            <a:ext cx="4754880" cy="1188720"/>
-          </a:xfrm>
-          <a:prstGeom prst="roundRect">
-            <a:avLst/>
-          </a:prstGeom>
-          <a:solidFill>
-            <a:srgbClr val="F6F8FB"/>
-          </a:solidFill>
-          <a:ln w="12700">
-            <a:solidFill>
-              <a:srgbClr val="D9E2EC"/>
-            </a:solidFill>
-            <a:prstDash val="solid"/>
-          </a:ln>
-        </p:spPr>
-      </p:sp>
-      <p:sp>
-        <p:nvSpPr>
-          <p:cNvPr id="32" name="Shape 30"/>
-          <p:cNvSpPr/>
-          <p:nvPr/>
-        </p:nvSpPr>
-        <p:spPr>
-          <a:xfrm>
-            <a:off x="6355080" y="2743200"/>
-            <a:ext cx="73152" cy="1188720"/>
-          </a:xfrm>
-          <a:prstGeom prst="rect">
-            <a:avLst/>
-          </a:prstGeom>
-          <a:solidFill>
-            <a:srgbClr val="B42318"/>
-          </a:solidFill>
-          <a:ln w="12700">
-            <a:solidFill>
-              <a:srgbClr val="B42318"/>
-            </a:solidFill>
-            <a:prstDash val="solid"/>
-          </a:ln>
-        </p:spPr>
-      </p:sp>
-      <p:sp>
-        <p:nvSpPr>
-          <p:cNvPr id="33" name="Text 31"/>
-          <p:cNvSpPr/>
-          <p:nvPr/>
-        </p:nvSpPr>
-        <p:spPr>
-          <a:xfrm>
-            <a:off x="6556248" y="2889504"/>
-            <a:ext cx="4407408" cy="256032"/>
-          </a:xfrm>
-          <a:prstGeom prst="rect">
-            <a:avLst/>
-          </a:prstGeom>
-          <a:noFill/>
-          <a:ln/>
-        </p:spPr>
-        <p:txBody>
-          <a:bodyPr wrap="square" lIns="0" tIns="0" rIns="0" bIns="0" rtlCol="0" anchor="ctr">
-            <a:normAutofit/>
-          </a:bodyPr>
-          <a:lstStyle/>
-          <a:p>
-            <a:pPr indent="0" marL="0">
-              <a:buNone/>
-            </a:pPr>
-            <a:r>
-              <a:rPr lang="en-US" sz="1400" b="1" dirty="0">
-                <a:solidFill>
-                  <a:srgbClr val="17324D"/>
-                </a:solidFill>
-                <a:latin typeface="Aptos" pitchFamily="34" charset="0"/>
-                <a:ea typeface="Aptos" pitchFamily="34" charset="-122"/>
-                <a:cs typeface="Aptos" pitchFamily="34" charset="-120"/>
-              </a:rPr>
-              <a:t>What does NOT work</a:t>
-            </a:r>
-            <a:endParaRPr lang="en-US" sz="1400" dirty="0"/>
-          </a:p>
-        </p:txBody>
-      </p:sp>
-      <p:sp>
-        <p:nvSpPr>
-          <p:cNvPr id="34" name="Text 32"/>
-          <p:cNvSpPr/>
-          <p:nvPr/>
-        </p:nvSpPr>
-        <p:spPr>
-          <a:xfrm>
-            <a:off x="6556248" y="3218688"/>
-            <a:ext cx="4407408" cy="585216"/>
-          </a:xfrm>
-          <a:prstGeom prst="rect">
-            <a:avLst/>
-          </a:prstGeom>
-          <a:noFill/>
-          <a:ln/>
-        </p:spPr>
-        <p:txBody>
-          <a:bodyPr wrap="square" lIns="0" tIns="0" rIns="0" bIns="0" rtlCol="0" anchor="t">
-            <a:normAutofit/>
-          </a:bodyPr>
-          <a:lstStyle/>
-          <a:p>
-            <a:pPr indent="0" marL="0">
-              <a:buNone/>
-            </a:pPr>
-            <a:r>
-              <a:rPr lang="en-US" sz="1220" dirty="0">
-                <a:solidFill>
-                  <a:srgbClr val="1F2937"/>
-                </a:solidFill>
-                <a:latin typeface="Aptos" pitchFamily="34" charset="0"/>
-                <a:ea typeface="Aptos" pitchFamily="34" charset="-122"/>
-                <a:cs typeface="Aptos" pitchFamily="34" charset="-120"/>
-              </a:rPr>
-              <a:t>You cannot commute ↓M through an arbitrary G(z) and expect the same system.</a:t>
-            </a:r>
-            <a:endParaRPr lang="en-US" sz="1220" dirty="0"/>
-          </a:p>
-        </p:txBody>
-      </p:sp>
-      <p:sp>
-        <p:nvSpPr>
-          <p:cNvPr id="35" name="Shape 33"/>
-          <p:cNvSpPr/>
-          <p:nvPr/>
-        </p:nvSpPr>
-        <p:spPr>
-          <a:xfrm>
-            <a:off x="1965960" y="4343400"/>
-            <a:ext cx="8229600" cy="685800"/>
-          </a:xfrm>
-          <a:prstGeom prst="roundRect">
-            <a:avLst/>
-          </a:prstGeom>
-          <a:solidFill>
-            <a:srgbClr val="EEF7F9"/>
-          </a:solidFill>
-          <a:ln w="12700">
-            <a:solidFill>
-              <a:srgbClr val="B7DDE3"/>
-            </a:solidFill>
-            <a:prstDash val="solid"/>
-          </a:ln>
-        </p:spPr>
-      </p:sp>
-      <p:sp>
-        <p:nvSpPr>
-          <p:cNvPr id="36" name="Text 34"/>
-          <p:cNvSpPr/>
-          <p:nvPr/>
-        </p:nvSpPr>
-        <p:spPr>
-          <a:xfrm>
-            <a:off x="2039112" y="4416552"/>
-            <a:ext cx="8083296" cy="539496"/>
-          </a:xfrm>
-          <a:prstGeom prst="rect">
-            <a:avLst/>
-          </a:prstGeom>
-          <a:noFill/>
-          <a:ln/>
-        </p:spPr>
-        <p:txBody>
-          <a:bodyPr wrap="square" lIns="0" tIns="0" rIns="0" bIns="0" rtlCol="0" anchor="ctr">
-            <a:normAutofit/>
-          </a:bodyPr>
-          <a:lstStyle/>
-          <a:p>
-            <a:pPr algn="ctr" indent="0" marL="0">
-              <a:buNone/>
-            </a:pPr>
-            <a:r>
-              <a:rPr lang="en-US" sz="2300" dirty="0">
-                <a:solidFill>
-                  <a:srgbClr val="17324D"/>
-                </a:solidFill>
-                <a:latin typeface="Cambria Math" pitchFamily="34" charset="0"/>
-                <a:ea typeface="Cambria Math" pitchFamily="34" charset="-122"/>
-                <a:cs typeface="Cambria Math" pitchFamily="34" charset="-120"/>
-              </a:rPr>
-              <a:t>G(zᴹ) → ↓M   ≡   ↓M → G(z)</a:t>
-            </a:r>
-            <a:endParaRPr lang="en-US" sz="2300" dirty="0"/>
-          </a:p>
-        </p:txBody>
-      </p:sp>
-      <p:sp>
-        <p:nvSpPr>
-          <p:cNvPr id="37" name="Shape 35"/>
-          <p:cNvSpPr/>
-          <p:nvPr/>
-        </p:nvSpPr>
-        <p:spPr>
-          <a:xfrm>
-            <a:off x="1965960" y="5257800"/>
-            <a:ext cx="8229600" cy="658368"/>
-          </a:xfrm>
-          <a:prstGeom prst="roundRect">
-            <a:avLst/>
-          </a:prstGeom>
-          <a:solidFill>
-            <a:srgbClr val="F6F8FB"/>
-          </a:solidFill>
-          <a:ln w="12700">
-            <a:solidFill>
-              <a:srgbClr val="D9E2EC"/>
-            </a:solidFill>
-            <a:prstDash val="solid"/>
-          </a:ln>
-        </p:spPr>
-      </p:sp>
-      <p:sp>
-        <p:nvSpPr>
-          <p:cNvPr id="38" name="Shape 36"/>
-          <p:cNvSpPr/>
-          <p:nvPr/>
-        </p:nvSpPr>
-        <p:spPr>
-          <a:xfrm>
-            <a:off x="1965960" y="5257800"/>
-            <a:ext cx="73152" cy="658368"/>
-          </a:xfrm>
-          <a:prstGeom prst="rect">
-            <a:avLst/>
-          </a:prstGeom>
-          <a:solidFill>
-            <a:srgbClr val="2F855A"/>
-          </a:solidFill>
-          <a:ln w="12700">
-            <a:solidFill>
-              <a:srgbClr val="2F855A"/>
-            </a:solidFill>
-            <a:prstDash val="solid"/>
-          </a:ln>
-        </p:spPr>
-      </p:sp>
-      <p:sp>
-        <p:nvSpPr>
-          <p:cNvPr id="39" name="Text 37"/>
-          <p:cNvSpPr/>
-          <p:nvPr/>
-        </p:nvSpPr>
-        <p:spPr>
-          <a:xfrm>
-            <a:off x="2167128" y="5404104"/>
-            <a:ext cx="7882128" cy="256032"/>
-          </a:xfrm>
-          <a:prstGeom prst="rect">
-            <a:avLst/>
-          </a:prstGeom>
-          <a:noFill/>
-          <a:ln/>
-        </p:spPr>
-        <p:txBody>
-          <a:bodyPr wrap="square" lIns="0" tIns="0" rIns="0" bIns="0" rtlCol="0" anchor="ctr">
-            <a:normAutofit/>
-          </a:bodyPr>
-          <a:lstStyle/>
-          <a:p>
-            <a:pPr indent="0" marL="0">
-              <a:buNone/>
-            </a:pPr>
-            <a:r>
-              <a:rPr lang="en-US" sz="1400" b="1" dirty="0">
-                <a:solidFill>
-                  <a:srgbClr val="17324D"/>
-                </a:solidFill>
-                <a:latin typeface="Aptos" pitchFamily="34" charset="0"/>
-                <a:ea typeface="Aptos" pitchFamily="34" charset="-122"/>
-                <a:cs typeface="Aptos" pitchFamily="34" charset="-120"/>
-              </a:rPr>
-              <a:t>Why polyphase matters</a:t>
-            </a:r>
-            <a:endParaRPr lang="en-US" sz="1400" dirty="0"/>
-          </a:p>
-        </p:txBody>
-      </p:sp>
-      <p:sp>
-        <p:nvSpPr>
-          <p:cNvPr id="40" name="Text 38"/>
-          <p:cNvSpPr/>
-          <p:nvPr/>
-        </p:nvSpPr>
-        <p:spPr>
-          <a:xfrm>
-            <a:off x="2167128" y="5733288"/>
-            <a:ext cx="7882128" cy="54864"/>
-          </a:xfrm>
-          <a:prstGeom prst="rect">
-            <a:avLst/>
-          </a:prstGeom>
-          <a:noFill/>
-          <a:ln/>
-        </p:spPr>
-        <p:txBody>
-          <a:bodyPr wrap="square" lIns="0" tIns="0" rIns="0" bIns="0" rtlCol="0" anchor="t">
-            <a:normAutofit/>
-          </a:bodyPr>
-          <a:lstStyle/>
-          <a:p>
-            <a:pPr indent="0" marL="0">
-              <a:buNone/>
-            </a:pPr>
-            <a:r>
-              <a:rPr lang="en-US" sz="1220" dirty="0">
-                <a:solidFill>
-                  <a:srgbClr val="1F2937"/>
-                </a:solidFill>
-                <a:latin typeface="Aptos" pitchFamily="34" charset="0"/>
-                <a:ea typeface="Aptos" pitchFamily="34" charset="-122"/>
-                <a:cs typeface="Aptos" pitchFamily="34" charset="-120"/>
-              </a:rPr>
-              <a:t>Every branch in H(z)=Σz⁻ᵏEₖ(zᴹ) contains exactly the form needed by the Noble Identity.</a:t>
-            </a:r>
-            <a:endParaRPr lang="en-US" sz="1220" dirty="0"/>
-          </a:p>
-        </p:txBody>
-      </p:sp>
-      <p:sp>
-        <p:nvSpPr>
-          <p:cNvPr id="25" name="Slide Number Placeholder 0"/>
-          <p:cNvSpPr>
-            <a:spLocks noGrp="1"/>
-          </p:cNvSpPr>
-          <p:nvPr>
-            <p:ph type="sldNum" sz="quarter" idx="4294967295"/>
-          </p:nvPr>
-        </p:nvSpPr>
-        <p:spPr>
-          <a:xfrm>
-            <a:off x="11750040" y="6519672"/>
-            <a:ext cx="201168" cy="164592"/>
-          </a:xfrm>
-          <a:prstGeom prst="rect">
-            <a:avLst/>
-          </a:prstGeom>
-          <a:extLst>
-            <a:ext uri="{C572A759-6A51-4108-AA02-DFA0A04FC94B}">
-              <ma14:wrappingTextBoxFlag xmlns:ma14="http://schemas.microsoft.com/office/mac/drawingml/2011/main" val="0"/>
-            </a:ext>
-          </a:extLst>
-        </p:spPr>
-        <p:txBody>
-          <a:bodyPr/>
-          <a:lstStyle>
-            <a:lvl1pPr>
-              <a:defRPr sz="800">
-                <a:solidFill>
-                  <a:srgbClr val="64748B"/>
-                </a:solidFill>
-                <a:latin typeface="Aptos"/>
-                <a:ea typeface="Aptos"/>
-                <a:cs typeface="Aptos"/>
-              </a:defRPr>
-            </a:lvl1pPr>
-          </a:lstStyle>
-          <a:p>
-            <a:pPr algn="r"/>
-            <a:fld id="{F7021451-1387-4CA6-816F-3879F97B5CBC}" type="slidenum">
-              <a:rPr b="0" lang="en-US"/>
+              <a:rPr lang="en-US" b="0"/>
               <a:t>9</a:t>
             </a:fld>
             <a:endParaRPr lang="en-US"/>
@@ -13177,4 +14422,319 @@
     </a:ext>
   </a:extLst>
 </a:theme>
+</file>
+
+<file path=ppt/theme/theme2.xml><?xml version="1.0" encoding="utf-8"?>
+<a:theme xmlns:a="http://schemas.openxmlformats.org/drawingml/2006/main" name="Office Theme">
+  <a:themeElements>
+    <a:clrScheme name="Office">
+      <a:dk1>
+        <a:sysClr val="windowText" lastClr="000000"/>
+      </a:dk1>
+      <a:lt1>
+        <a:sysClr val="window" lastClr="FFFFFF"/>
+      </a:lt1>
+      <a:dk2>
+        <a:srgbClr val="0E2841"/>
+      </a:dk2>
+      <a:lt2>
+        <a:srgbClr val="E8E8E8"/>
+      </a:lt2>
+      <a:accent1>
+        <a:srgbClr val="156082"/>
+      </a:accent1>
+      <a:accent2>
+        <a:srgbClr val="E97132"/>
+      </a:accent2>
+      <a:accent3>
+        <a:srgbClr val="196B24"/>
+      </a:accent3>
+      <a:accent4>
+        <a:srgbClr val="0F9ED5"/>
+      </a:accent4>
+      <a:accent5>
+        <a:srgbClr val="A02B93"/>
+      </a:accent5>
+      <a:accent6>
+        <a:srgbClr val="4EA72E"/>
+      </a:accent6>
+      <a:hlink>
+        <a:srgbClr val="467886"/>
+      </a:hlink>
+      <a:folHlink>
+        <a:srgbClr val="96607D"/>
+      </a:folHlink>
+    </a:clrScheme>
+    <a:fontScheme name="Office">
+      <a:majorFont>
+        <a:latin typeface="Aptos Display" panose="02110004020202020204"/>
+        <a:ea typeface=""/>
+        <a:cs typeface=""/>
+        <a:font script="Jpan" typeface="游ゴシック Light"/>
+        <a:font script="Hang" typeface="맑은 고딕"/>
+        <a:font script="Hans" typeface="等线 Light"/>
+        <a:font script="Hant" typeface="新細明體"/>
+        <a:font script="Arab" typeface="Times New Roman"/>
+        <a:font script="Hebr" typeface="Times New Roman"/>
+        <a:font script="Thai" typeface="Angsana New"/>
+        <a:font script="Ethi" typeface="Nyala"/>
+        <a:font script="Beng" typeface="Vrinda"/>
+        <a:font script="Gujr" typeface="Shruti"/>
+        <a:font script="Khmr" typeface="MoolBoran"/>
+        <a:font script="Knda" typeface="Tunga"/>
+        <a:font script="Guru" typeface="Raavi"/>
+        <a:font script="Cans" typeface="Euphemia"/>
+        <a:font script="Cher" typeface="Plantagenet Cherokee"/>
+        <a:font script="Yiii" typeface="Microsoft Yi Baiti"/>
+        <a:font script="Tibt" typeface="Microsoft Himalaya"/>
+        <a:font script="Thaa" typeface="MV Boli"/>
+        <a:font script="Deva" typeface="Mangal"/>
+        <a:font script="Telu" typeface="Gautami"/>
+        <a:font script="Taml" typeface="Latha"/>
+        <a:font script="Syrc" typeface="Estrangelo Edessa"/>
+        <a:font script="Orya" typeface="Kalinga"/>
+        <a:font script="Mlym" typeface="Kartika"/>
+        <a:font script="Laoo" typeface="DokChampa"/>
+        <a:font script="Sinh" typeface="Iskoola Pota"/>
+        <a:font script="Mong" typeface="Mongolian Baiti"/>
+        <a:font script="Viet" typeface="Times New Roman"/>
+        <a:font script="Uigh" typeface="Microsoft Uighur"/>
+        <a:font script="Geor" typeface="Sylfaen"/>
+        <a:font script="Armn" typeface="Arial"/>
+        <a:font script="Bugi" typeface="Leelawadee UI"/>
+        <a:font script="Bopo" typeface="Microsoft JhengHei"/>
+        <a:font script="Java" typeface="Javanese Text"/>
+        <a:font script="Lisu" typeface="Segoe UI"/>
+        <a:font script="Mymr" typeface="Myanmar Text"/>
+        <a:font script="Nkoo" typeface="Ebrima"/>
+        <a:font script="Olck" typeface="Nirmala UI"/>
+        <a:font script="Osma" typeface="Ebrima"/>
+        <a:font script="Phag" typeface="Phagspa"/>
+        <a:font script="Syrn" typeface="Estrangelo Edessa"/>
+        <a:font script="Syrj" typeface="Estrangelo Edessa"/>
+        <a:font script="Syre" typeface="Estrangelo Edessa"/>
+        <a:font script="Sora" typeface="Nirmala UI"/>
+        <a:font script="Tale" typeface="Microsoft Tai Le"/>
+        <a:font script="Talu" typeface="Microsoft New Tai Lue"/>
+        <a:font script="Tfng" typeface="Ebrima"/>
+      </a:majorFont>
+      <a:minorFont>
+        <a:latin typeface="Aptos" panose="02110004020202020204"/>
+        <a:ea typeface=""/>
+        <a:cs typeface=""/>
+        <a:font script="Jpan" typeface="游ゴシック"/>
+        <a:font script="Hang" typeface="맑은 고딕"/>
+        <a:font script="Hans" typeface="等线"/>
+        <a:font script="Hant" typeface="新細明體"/>
+        <a:font script="Arab" typeface="Arial"/>
+        <a:font script="Hebr" typeface="Arial"/>
+        <a:font script="Thai" typeface="Cordia New"/>
+        <a:font script="Ethi" typeface="Nyala"/>
+        <a:font script="Beng" typeface="Vrinda"/>
+        <a:font script="Gujr" typeface="Shruti"/>
+        <a:font script="Khmr" typeface="DaunPenh"/>
+        <a:font script="Knda" typeface="Tunga"/>
+        <a:font script="Guru" typeface="Raavi"/>
+        <a:font script="Cans" typeface="Euphemia"/>
+        <a:font script="Cher" typeface="Plantagenet Cherokee"/>
+        <a:font script="Yiii" typeface="Microsoft Yi Baiti"/>
+        <a:font script="Tibt" typeface="Microsoft Himalaya"/>
+        <a:font script="Thaa" typeface="MV Boli"/>
+        <a:font script="Deva" typeface="Mangal"/>
+        <a:font script="Telu" typeface="Gautami"/>
+        <a:font script="Taml" typeface="Latha"/>
+        <a:font script="Syrc" typeface="Estrangelo Edessa"/>
+        <a:font script="Orya" typeface="Kalinga"/>
+        <a:font script="Mlym" typeface="Kartika"/>
+        <a:font script="Laoo" typeface="DokChampa"/>
+        <a:font script="Sinh" typeface="Iskoola Pota"/>
+        <a:font script="Mong" typeface="Mongolian Baiti"/>
+        <a:font script="Viet" typeface="Arial"/>
+        <a:font script="Uigh" typeface="Microsoft Uighur"/>
+        <a:font script="Geor" typeface="Sylfaen"/>
+        <a:font script="Armn" typeface="Arial"/>
+        <a:font script="Bugi" typeface="Leelawadee UI"/>
+        <a:font script="Bopo" typeface="Microsoft JhengHei"/>
+        <a:font script="Java" typeface="Javanese Text"/>
+        <a:font script="Lisu" typeface="Segoe UI"/>
+        <a:font script="Mymr" typeface="Myanmar Text"/>
+        <a:font script="Nkoo" typeface="Ebrima"/>
+        <a:font script="Olck" typeface="Nirmala UI"/>
+        <a:font script="Osma" typeface="Ebrima"/>
+        <a:font script="Phag" typeface="Phagspa"/>
+        <a:font script="Syrn" typeface="Estrangelo Edessa"/>
+        <a:font script="Syrj" typeface="Estrangelo Edessa"/>
+        <a:font script="Syre" typeface="Estrangelo Edessa"/>
+        <a:font script="Sora" typeface="Nirmala UI"/>
+        <a:font script="Tale" typeface="Microsoft Tai Le"/>
+        <a:font script="Talu" typeface="Microsoft New Tai Lue"/>
+        <a:font script="Tfng" typeface="Ebrima"/>
+      </a:minorFont>
+    </a:fontScheme>
+    <a:fmtScheme name="Office">
+      <a:fillStyleLst>
+        <a:solidFill>
+          <a:schemeClr val="phClr"/>
+        </a:solidFill>
+        <a:gradFill rotWithShape="1">
+          <a:gsLst>
+            <a:gs pos="0">
+              <a:schemeClr val="phClr">
+                <a:lumMod val="110000"/>
+                <a:satMod val="105000"/>
+                <a:tint val="67000"/>
+              </a:schemeClr>
+            </a:gs>
+            <a:gs pos="50000">
+              <a:schemeClr val="phClr">
+                <a:lumMod val="105000"/>
+                <a:satMod val="103000"/>
+                <a:tint val="73000"/>
+              </a:schemeClr>
+            </a:gs>
+            <a:gs pos="100000">
+              <a:schemeClr val="phClr">
+                <a:lumMod val="105000"/>
+                <a:satMod val="109000"/>
+                <a:tint val="81000"/>
+              </a:schemeClr>
+            </a:gs>
+          </a:gsLst>
+          <a:lin ang="5400000" scaled="0"/>
+        </a:gradFill>
+        <a:gradFill rotWithShape="1">
+          <a:gsLst>
+            <a:gs pos="0">
+              <a:schemeClr val="phClr">
+                <a:satMod val="103000"/>
+                <a:lumMod val="102000"/>
+                <a:tint val="94000"/>
+              </a:schemeClr>
+            </a:gs>
+            <a:gs pos="50000">
+              <a:schemeClr val="phClr">
+                <a:satMod val="110000"/>
+                <a:lumMod val="100000"/>
+                <a:shade val="100000"/>
+              </a:schemeClr>
+            </a:gs>
+            <a:gs pos="100000">
+              <a:schemeClr val="phClr">
+                <a:lumMod val="99000"/>
+                <a:satMod val="120000"/>
+                <a:shade val="78000"/>
+              </a:schemeClr>
+            </a:gs>
+          </a:gsLst>
+          <a:lin ang="5400000" scaled="0"/>
+        </a:gradFill>
+      </a:fillStyleLst>
+      <a:lnStyleLst>
+        <a:ln w="12700" cap="flat" cmpd="sng" algn="ctr">
+          <a:solidFill>
+            <a:schemeClr val="phClr"/>
+          </a:solidFill>
+          <a:prstDash val="solid"/>
+          <a:miter lim="800000"/>
+        </a:ln>
+        <a:ln w="19050" cap="flat" cmpd="sng" algn="ctr">
+          <a:solidFill>
+            <a:schemeClr val="phClr"/>
+          </a:solidFill>
+          <a:prstDash val="solid"/>
+          <a:miter lim="800000"/>
+        </a:ln>
+        <a:ln w="25400" cap="flat" cmpd="sng" algn="ctr">
+          <a:solidFill>
+            <a:schemeClr val="phClr"/>
+          </a:solidFill>
+          <a:prstDash val="solid"/>
+          <a:miter lim="800000"/>
+        </a:ln>
+      </a:lnStyleLst>
+      <a:effectStyleLst>
+        <a:effectStyle>
+          <a:effectLst/>
+        </a:effectStyle>
+        <a:effectStyle>
+          <a:effectLst/>
+        </a:effectStyle>
+        <a:effectStyle>
+          <a:effectLst>
+            <a:outerShdw blurRad="57150" dist="19050" dir="5400000" algn="ctr" rotWithShape="0">
+              <a:srgbClr val="000000">
+                <a:alpha val="63000"/>
+              </a:srgbClr>
+            </a:outerShdw>
+          </a:effectLst>
+        </a:effectStyle>
+      </a:effectStyleLst>
+      <a:bgFillStyleLst>
+        <a:solidFill>
+          <a:schemeClr val="phClr"/>
+        </a:solidFill>
+        <a:solidFill>
+          <a:schemeClr val="phClr">
+            <a:tint val="95000"/>
+            <a:satMod val="170000"/>
+          </a:schemeClr>
+        </a:solidFill>
+        <a:gradFill rotWithShape="1">
+          <a:gsLst>
+            <a:gs pos="0">
+              <a:schemeClr val="phClr">
+                <a:tint val="93000"/>
+                <a:satMod val="150000"/>
+                <a:shade val="98000"/>
+                <a:lumMod val="102000"/>
+              </a:schemeClr>
+            </a:gs>
+            <a:gs pos="50000">
+              <a:schemeClr val="phClr">
+                <a:tint val="98000"/>
+                <a:satMod val="130000"/>
+                <a:shade val="90000"/>
+                <a:lumMod val="103000"/>
+              </a:schemeClr>
+            </a:gs>
+            <a:gs pos="100000">
+              <a:schemeClr val="phClr">
+                <a:shade val="63000"/>
+                <a:satMod val="120000"/>
+              </a:schemeClr>
+            </a:gs>
+          </a:gsLst>
+          <a:lin ang="5400000" scaled="0"/>
+        </a:gradFill>
+      </a:bgFillStyleLst>
+    </a:fmtScheme>
+  </a:themeElements>
+  <a:objectDefaults>
+    <a:lnDef>
+      <a:spPr/>
+      <a:bodyPr/>
+      <a:lstStyle/>
+      <a:style>
+        <a:lnRef idx="2">
+          <a:schemeClr val="accent1"/>
+        </a:lnRef>
+        <a:fillRef idx="0">
+          <a:schemeClr val="accent1"/>
+        </a:fillRef>
+        <a:effectRef idx="1">
+          <a:schemeClr val="accent1"/>
+        </a:effectRef>
+        <a:fontRef idx="minor">
+          <a:schemeClr val="tx1"/>
+        </a:fontRef>
+      </a:style>
+    </a:lnDef>
+  </a:objectDefaults>
+  <a:extraClrSchemeLst/>
+  <a:extLst>
+    <a:ext uri="{05A4C25C-085E-4340-85A3-A5531E510DB2}">
+      <thm15:themeFamily xmlns:thm15="http://schemas.microsoft.com/office/thememl/2012/main" name="Office Theme" id="{2E142A2C-CD16-42D6-873A-C26D2A0506FA}" vid="{1BDDFF52-6CD6-40A5-AB3C-68EB2F1E4D0A}"/>
+    </a:ext>
+  </a:extLst>
+</a:theme>
 </file>